--- a/docs/SwaraVeda_Review2.pptx
+++ b/docs/SwaraVeda_Review2.pptx
@@ -10,20 +10,15 @@
   <p:sldIdLst>
     <p:sldId id="279" r:id="rId2"/>
     <p:sldId id="281" r:id="rId3"/>
+    <p:sldId id="291" r:id="rId176"/>
+    <p:sldId id="290" r:id="rId175"/>
+    <p:sldId id="289" r:id="rId174"/>
+    <p:sldId id="288" r:id="rId173"/>
+    <p:sldId id="287" r:id="rId172"/>
+    <p:sldId id="286" r:id="rId171"/>
+    <p:sldId id="285" r:id="rId170"/>
+    <p:sldId id="284" r:id="rId169"/>
     <p:sldId id="283" r:id="rId168"/>
-    <p:sldId id="284" r:id="rId169"/>
-    <p:sldId id="285" r:id="rId170"/>
-    <p:sldId id="286" r:id="rId171"/>
-    <p:sldId id="287" r:id="rId172"/>
-    <p:sldId id="288" r:id="rId173"/>
-    <p:sldId id="289" r:id="rId174"/>
-    <p:sldId id="290" r:id="rId175"/>
-    <p:sldId id="291" r:id="rId176"/>
-    <p:sldId id="292" r:id="rId177"/>
-    <p:sldId id="293" r:id="rId178"/>
-    <p:sldId id="294" r:id="rId179"/>
-    <p:sldId id="295" r:id="rId180"/>
-    <p:sldId id="296" r:id="rId181"/>
     <p:sldId id="282" r:id="rId4"/>
   </p:sldIdLst>
   <p:sldSz cx="9144000" cy="6858000" type="screen4x3"/>
@@ -4437,7 +4432,7 @@
                 <a:cs typeface="Times New Roman" panose="02020603050405020304" pitchFamily="18" charset="0"/>
                 <a:sym typeface="Times New Roman"/>
               </a:rPr>
-              <a:t>SwaraVeda: An AI-Assisted Community Archive for Endangered Indian Dialects</a:t>
+              <a:t>SwaraVeda: A Community-Driven Digital Archive for Endangered Indian Dialects</a:t>
             </a:r>
             <a:endParaRPr sz="1050" b="1" dirty="0">
               <a:latin typeface="Times New Roman" panose="02020603050405020304" pitchFamily="18" charset="0"/>
@@ -4759,14 +4754,20 @@
       </p:grpSpPr>
       <p:sp>
         <p:nvSpPr>
-          <p:cNvPr id="11" name="Title 11"/>
+          <p:cNvPr id="3" name="Google Shape;68;g78e6671419f8a2a0_22">
+            <a:extLst>
+              <a:ext uri="{FF2B5EF4-FFF2-40B4-BE49-F238E27FC236}">
+                <a16:creationId xmlns:a16="http://schemas.microsoft.com/office/drawing/2014/main" id="{BA677A83-D006-E1F4-CCF8-948027C21AB2}"/>
+              </a:ext>
+            </a:extLst>
+          </p:cNvPr>
           <p:cNvSpPr txBox="1"/>
           <p:nvPr/>
         </p:nvSpPr>
         <p:spPr>
           <a:xfrm>
             <a:off x="628650" y="1131097"/>
-            <a:ext cx="7886700" cy="760000"/>
+            <a:ext cx="7886700" cy="994275"/>
           </a:xfrm>
           <a:prstGeom prst="rect">
             <a:avLst/>
@@ -4777,12 +4778,12 @@
           </a:ln>
         </p:spPr>
         <p:txBody>
-          <a:bodyPr wrap="square" lIns="68569" tIns="34275" rIns="68569" bIns="34275" anchor="ctr">
+          <a:bodyPr spcFirstLastPara="1" wrap="square" lIns="68569" tIns="34275" rIns="68569" bIns="34275" anchor="ctr" anchorCtr="0">
             <a:normAutofit/>
           </a:bodyPr>
           <a:lstStyle/>
           <a:p>
-            <a:pPr algn="ctr">
+            <a:pPr algn="ctr" defTabSz="685800">
               <a:lnSpc>
                 <a:spcPct val="90000"/>
               </a:lnSpc>
@@ -4792,396 +4793,31 @@
                 <a:latin typeface="Times New Roman" panose="02020603050405020304" pitchFamily="18" charset="0"/>
                 <a:cs typeface="Times New Roman" panose="02020603050405020304" pitchFamily="18" charset="0"/>
               </a:rPr>
-              <a:t>Implementation - Search and Review Logic</a:t>
-            </a:r>
+              <a:t>Work to be completed</a:t>
+            </a:r>
+            <a:endParaRPr sz="2400" dirty="0">
+              <a:latin typeface="Times New Roman" panose="02020603050405020304" pitchFamily="18" charset="0"/>
+              <a:cs typeface="Times New Roman" panose="02020603050405020304" pitchFamily="18" charset="0"/>
+            </a:endParaRPr>
           </a:p>
         </p:txBody>
       </p:sp>
       <p:sp>
         <p:nvSpPr>
-          <p:cNvPr id="12" name="Text 12"/>
+          <p:cNvPr id="5" name="Google Shape;69;g78e6671419f8a2a0_22">
+            <a:extLst>
+              <a:ext uri="{FF2B5EF4-FFF2-40B4-BE49-F238E27FC236}">
+                <a16:creationId xmlns:a16="http://schemas.microsoft.com/office/drawing/2014/main" id="{13186C97-59A2-67F5-3892-203B43C861C9}"/>
+              </a:ext>
+            </a:extLst>
+          </p:cNvPr>
           <p:cNvSpPr txBox="1"/>
           <p:nvPr/>
         </p:nvSpPr>
         <p:spPr>
           <a:xfrm>
-            <a:off x="502920" y="2057400"/>
-            <a:ext cx="2514600" cy="3108960"/>
-          </a:xfrm>
-          <a:prstGeom prst="roundRect">
-            <a:avLst>
-              <a:gd name="adj" fmla="val 8000"/>
-            </a:avLst>
-          </a:prstGeom>
-          <a:solidFill>
-            <a:srgbClr val="FDF4E6"/>
-          </a:solidFill>
-          <a:ln>
-            <a:noFill/>
-          </a:ln>
-        </p:spPr>
-        <p:txBody>
-          <a:bodyPr wrap="square" lIns="164592" tIns="164592" rIns="164592" bIns="164592" anchor="t">
-            <a:noAutofit/>
-          </a:bodyPr>
-          <a:lstStyle/>
-          <a:p>
-            <a:pPr marL="0" indent="0" algn="ctr">
-              <a:lnSpc>
-                <a:spcPct val="100000"/>
-              </a:lnSpc>
-              <a:spcBef>
-                <a:spcPts val="0"/>
-              </a:spcBef>
-              <a:buNone/>
-            </a:pPr>
-            <a:r>
-              <a:rPr lang="en-US" sz="1500" b="1" dirty="0">
-                <a:solidFill>
-                  <a:srgbClr val="B45309"/>
-                </a:solidFill>
-              </a:rPr>
-              <a:t>Keyword search</a:t>
-            </a:r>
-          </a:p>
-          <a:p>
-            <a:pPr marL="0" indent="0" algn="ctr">
-              <a:lnSpc>
-                <a:spcPct val="100000"/>
-              </a:lnSpc>
-              <a:spcBef>
-                <a:spcPts val="800"/>
-              </a:spcBef>
-              <a:buNone/>
-            </a:pPr>
-            <a:r>
-              <a:rPr lang="en-US" sz="1200" dirty="0">
-                <a:solidFill>
-                  <a:srgbClr val="262626"/>
-                </a:solidFill>
-              </a:rPr>
-              <a:t>tsvector('simple', corrected or ASR text)</a:t>
-            </a:r>
-          </a:p>
-          <a:p>
-            <a:pPr marL="0" indent="0" algn="ctr">
-              <a:lnSpc>
-                <a:spcPct val="100000"/>
-              </a:lnSpc>
-              <a:spcBef>
-                <a:spcPts val="800"/>
-              </a:spcBef>
-              <a:buNone/>
-            </a:pPr>
-            <a:r>
-              <a:rPr lang="en-US" sz="1200" dirty="0">
-                <a:solidFill>
-                  <a:srgbClr val="262626"/>
-                </a:solidFill>
-              </a:rPr>
-              <a:t>matched with plainto_tsquery(q)</a:t>
-            </a:r>
-          </a:p>
-          <a:p>
-            <a:pPr marL="0" indent="0" algn="ctr">
-              <a:lnSpc>
-                <a:spcPct val="100000"/>
-              </a:lnSpc>
-              <a:spcBef>
-                <a:spcPts val="800"/>
-              </a:spcBef>
-              <a:buNone/>
-            </a:pPr>
-            <a:r>
-              <a:rPr lang="en-US" sz="1200" dirty="0">
-                <a:solidFill>
-                  <a:srgbClr val="262626"/>
-                </a:solidFill>
-              </a:rPr>
-              <a:t>ranked by ts_rank</a:t>
-            </a:r>
-          </a:p>
-          <a:p>
-            <a:pPr marL="0" indent="0" algn="ctr">
-              <a:lnSpc>
-                <a:spcPct val="100000"/>
-              </a:lnSpc>
-              <a:spcBef>
-                <a:spcPts val="800"/>
-              </a:spcBef>
-              <a:buNone/>
-            </a:pPr>
-            <a:r>
-              <a:rPr lang="en-US" sz="1200" dirty="0">
-                <a:solidFill>
-                  <a:srgbClr val="262626"/>
-                </a:solidFill>
-              </a:rPr>
-              <a:t>only public recordings</a:t>
-            </a:r>
-          </a:p>
-        </p:txBody>
-      </p:sp>
-      <p:sp>
-        <p:nvSpPr>
-          <p:cNvPr id="13" name="Text 13"/>
-          <p:cNvSpPr txBox="1"/>
-          <p:nvPr/>
-        </p:nvSpPr>
-        <p:spPr>
-          <a:xfrm>
-            <a:off x="3246120" y="2057400"/>
-            <a:ext cx="2514600" cy="3108960"/>
-          </a:xfrm>
-          <a:prstGeom prst="roundRect">
-            <a:avLst>
-              <a:gd name="adj" fmla="val 8000"/>
-            </a:avLst>
-          </a:prstGeom>
-          <a:solidFill>
-            <a:srgbClr val="FCF0F5"/>
-          </a:solidFill>
-          <a:ln>
-            <a:noFill/>
-          </a:ln>
-        </p:spPr>
-        <p:txBody>
-          <a:bodyPr wrap="square" lIns="164592" tIns="164592" rIns="164592" bIns="164592" anchor="t">
-            <a:noAutofit/>
-          </a:bodyPr>
-          <a:lstStyle/>
-          <a:p>
-            <a:pPr marL="0" indent="0" algn="ctr">
-              <a:lnSpc>
-                <a:spcPct val="100000"/>
-              </a:lnSpc>
-              <a:spcBef>
-                <a:spcPts val="0"/>
-              </a:spcBef>
-              <a:buNone/>
-            </a:pPr>
-            <a:r>
-              <a:rPr lang="en-US" sz="1500" b="1" dirty="0">
-                <a:solidFill>
-                  <a:srgbClr val="A3326A"/>
-                </a:solidFill>
-              </a:rPr>
-              <a:t>Search by meaning</a:t>
-            </a:r>
-          </a:p>
-          <a:p>
-            <a:pPr marL="0" indent="0" algn="ctr">
-              <a:lnSpc>
-                <a:spcPct val="100000"/>
-              </a:lnSpc>
-              <a:spcBef>
-                <a:spcPts val="800"/>
-              </a:spcBef>
-              <a:buNone/>
-            </a:pPr>
-            <a:r>
-              <a:rPr lang="en-US" sz="1200" dirty="0">
-                <a:solidFill>
-                  <a:srgbClr val="262626"/>
-                </a:solidFill>
-              </a:rPr>
-              <a:t>v_q ← MiniLM(q)</a:t>
-            </a:r>
-          </a:p>
-          <a:p>
-            <a:pPr marL="0" indent="0" algn="ctr">
-              <a:lnSpc>
-                <a:spcPct val="100000"/>
-              </a:lnSpc>
-              <a:spcBef>
-                <a:spcPts val="800"/>
-              </a:spcBef>
-              <a:buNone/>
-            </a:pPr>
-            <a:r>
-              <a:rPr lang="en-US" sz="1200" dirty="0">
-                <a:solidFill>
-                  <a:srgbClr val="262626"/>
-                </a:solidFill>
-              </a:rPr>
-              <a:t>rank segments by cosine distance</a:t>
-            </a:r>
-          </a:p>
-          <a:p>
-            <a:pPr marL="0" indent="0" algn="ctr">
-              <a:lnSpc>
-                <a:spcPct val="100000"/>
-              </a:lnSpc>
-              <a:spcBef>
-                <a:spcPts val="800"/>
-              </a:spcBef>
-              <a:buNone/>
-            </a:pPr>
-            <a:r>
-              <a:rPr lang="en-US" sz="1200" dirty="0">
-                <a:solidFill>
-                  <a:srgbClr val="262626"/>
-                </a:solidFill>
-              </a:rPr>
-              <a:t>(pgvector &lt;=&gt; operator)</a:t>
-            </a:r>
-          </a:p>
-          <a:p>
-            <a:pPr marL="0" indent="0" algn="ctr">
-              <a:lnSpc>
-                <a:spcPct val="100000"/>
-              </a:lnSpc>
-              <a:spcBef>
-                <a:spcPts val="800"/>
-              </a:spcBef>
-              <a:buNone/>
-            </a:pPr>
-            <a:r>
-              <a:rPr lang="en-US" sz="1200" dirty="0">
-                <a:solidFill>
-                  <a:srgbClr val="262626"/>
-                </a:solidFill>
-              </a:rPr>
-              <a:t>works across scripts and languages</a:t>
-            </a:r>
-          </a:p>
-        </p:txBody>
-      </p:sp>
-      <p:sp>
-        <p:nvSpPr>
-          <p:cNvPr id="14" name="Text 14"/>
-          <p:cNvSpPr txBox="1"/>
-          <p:nvPr/>
-        </p:nvSpPr>
-        <p:spPr>
-          <a:xfrm>
-            <a:off x="5989320" y="2057400"/>
-            <a:ext cx="2514600" cy="3108960"/>
-          </a:xfrm>
-          <a:prstGeom prst="roundRect">
-            <a:avLst>
-              <a:gd name="adj" fmla="val 8000"/>
-            </a:avLst>
-          </a:prstGeom>
-          <a:solidFill>
-            <a:srgbClr val="EAF5EE"/>
-          </a:solidFill>
-          <a:ln>
-            <a:noFill/>
-          </a:ln>
-        </p:spPr>
-        <p:txBody>
-          <a:bodyPr wrap="square" lIns="164592" tIns="164592" rIns="164592" bIns="164592" anchor="t">
-            <a:noAutofit/>
-          </a:bodyPr>
-          <a:lstStyle/>
-          <a:p>
-            <a:pPr marL="0" indent="0" algn="ctr">
-              <a:lnSpc>
-                <a:spcPct val="100000"/>
-              </a:lnSpc>
-              <a:spcBef>
-                <a:spcPts val="0"/>
-              </a:spcBef>
-              <a:buNone/>
-            </a:pPr>
-            <a:r>
-              <a:rPr lang="en-US" sz="1500" b="1" dirty="0">
-                <a:solidFill>
-                  <a:srgbClr val="2F7A4A"/>
-                </a:solidFill>
-              </a:rPr>
-              <a:t>Review workflow</a:t>
-            </a:r>
-          </a:p>
-          <a:p>
-            <a:pPr marL="0" indent="0" algn="ctr">
-              <a:lnSpc>
-                <a:spcPct val="100000"/>
-              </a:lnSpc>
-              <a:spcBef>
-                <a:spcPts val="800"/>
-              </a:spcBef>
-              <a:buNone/>
-            </a:pPr>
-            <a:r>
-              <a:rPr lang="en-US" sz="1200" dirty="0">
-                <a:solidFill>
-                  <a:srgbClr val="262626"/>
-                </a:solidFill>
-              </a:rPr>
-              <a:t>draft → corrected → verified</a:t>
-            </a:r>
-          </a:p>
-          <a:p>
-            <a:pPr marL="0" indent="0" algn="ctr">
-              <a:lnSpc>
-                <a:spcPct val="100000"/>
-              </a:lnSpc>
-              <a:spcBef>
-                <a:spcPts val="800"/>
-              </a:spcBef>
-              <a:buNone/>
-            </a:pPr>
-            <a:r>
-              <a:rPr lang="en-US" sz="1200" dirty="0">
-                <a:solidFill>
-                  <a:srgbClr val="262626"/>
-                </a:solidFill>
-              </a:rPr>
-              <a:t>corrections re-embedded</a:t>
-            </a:r>
-          </a:p>
-          <a:p>
-            <a:pPr marL="0" indent="0" algn="ctr">
-              <a:lnSpc>
-                <a:spcPct val="100000"/>
-              </a:lnSpc>
-              <a:spcBef>
-                <a:spcPts val="800"/>
-              </a:spcBef>
-              <a:buNone/>
-            </a:pPr>
-            <a:r>
-              <a:rPr lang="en-US" sz="1200" dirty="0">
-                <a:solidFill>
-                  <a:srgbClr val="262626"/>
-                </a:solidFill>
-              </a:rPr>
-              <a:t>export = corrected AND</a:t>
-            </a:r>
-          </a:p>
-          <a:p>
-            <a:pPr marL="0" indent="0" algn="ctr">
-              <a:lnSpc>
-                <a:spcPct val="100000"/>
-              </a:lnSpc>
-              <a:spcBef>
-                <a:spcPts val="800"/>
-              </a:spcBef>
-              <a:buNone/>
-            </a:pPr>
-            <a:r>
-              <a:rPr lang="en-US" sz="1200" dirty="0">
-                <a:solidFill>
-                  <a:srgbClr val="262626"/>
-                </a:solidFill>
-              </a:rPr>
-              <a:t>AI-training consent</a:t>
-            </a:r>
-          </a:p>
-        </p:txBody>
-      </p:sp>
-      <p:sp>
-        <p:nvSpPr>
-          <p:cNvPr id="15" name="Text 15"/>
-          <p:cNvSpPr txBox="1"/>
-          <p:nvPr/>
-        </p:nvSpPr>
-        <p:spPr>
-          <a:xfrm>
-            <a:off x="502920" y="5394960"/>
-            <a:ext cx="8138160" cy="822960"/>
+            <a:off x="822960" y="2011680"/>
+            <a:ext cx="7589520" cy="4206240"/>
           </a:xfrm>
           <a:prstGeom prst="rect">
             <a:avLst/>
@@ -5192,35 +4828,182 @@
           </a:ln>
         </p:spPr>
         <p:txBody>
-          <a:bodyPr wrap="square" lIns="73152" tIns="73152" rIns="73152" bIns="73152" anchor="t">
+          <a:bodyPr spcFirstLastPara="1" wrap="square" lIns="68569" tIns="34275" rIns="68569" bIns="34275" anchor="t" anchorCtr="0">
             <a:noAutofit/>
           </a:bodyPr>
           <a:lstStyle/>
           <a:p>
-            <a:pPr marL="0" indent="0" algn="l">
-              <a:lnSpc>
-                <a:spcPct val="105000"/>
-              </a:lnSpc>
-              <a:spcBef>
-                <a:spcPts val="0"/>
-              </a:spcBef>
-              <a:buNone/>
+            <a:pPr marL="457200" indent="-342900">
+              <a:lnSpc>
+                <a:spcPct val="90000"/>
+              </a:lnSpc>
+              <a:spcBef>
+                <a:spcPts val="1100"/>
+              </a:spcBef>
+              <a:buSzPts val="1800"/>
+              <a:buFont typeface="Arial"/>
+              <a:buChar char="•"/>
             </a:pPr>
             <a:r>
-              <a:rPr lang="en-US" sz="1200" b="1" dirty="0">
-                <a:solidFill>
-                  <a:srgbClr val="262626"/>
-                </a:solidFill>
-              </a:rPr>
-              <a:t xml:space="preserve">Privacy: </a:t>
-            </a:r>
-            <a:r>
-              <a:rPr lang="en-US" sz="1200" dirty="0">
+              <a:rPr lang="en-US" sz="1600" dirty="0" b="1">
                 <a:solidFill>
                   <a:srgbClr val="595959"/>
                 </a:solidFill>
               </a:rPr>
-              <a:t>recordings without public-listening consent are visible only to their uploader, verifiers and admins, and never appear in search.</a:t>
+              <a:t>Field data: </a:t>
+            </a:r>
+            <a:r>
+              <a:rPr lang="en-US" sz="1600" dirty="0">
+                <a:solidFill>
+                  <a:srgbClr val="595959"/>
+                </a:solidFill>
+              </a:rPr>
+              <a:t>record with Tulu and Kodava speakers; correct and verify the transcripts</a:t>
+            </a:r>
+          </a:p>
+          <a:p>
+            <a:pPr marL="457200" indent="-342900">
+              <a:lnSpc>
+                <a:spcPct val="90000"/>
+              </a:lnSpc>
+              <a:spcBef>
+                <a:spcPts val="1100"/>
+              </a:spcBef>
+              <a:buSzPts val="1800"/>
+              <a:buFont typeface="Arial"/>
+              <a:buChar char="•"/>
+            </a:pPr>
+            <a:r>
+              <a:rPr lang="en-US" sz="1600" dirty="0" b="1">
+                <a:solidFill>
+                  <a:srgbClr val="595959"/>
+                </a:solidFill>
+              </a:rPr>
+              <a:t>Storage setup: </a:t>
+            </a:r>
+            <a:r>
+              <a:rPr lang="en-US" sz="1600" dirty="0">
+                <a:solidFill>
+                  <a:srgbClr val="595959"/>
+                </a:solidFill>
+              </a:rPr>
+              <a:t>finish the cloud storage configuration so uploads work on the live server</a:t>
+            </a:r>
+          </a:p>
+          <a:p>
+            <a:pPr marL="457200" indent="-342900">
+              <a:lnSpc>
+                <a:spcPct val="90000"/>
+              </a:lnSpc>
+              <a:spcBef>
+                <a:spcPts val="1100"/>
+              </a:spcBef>
+              <a:buSzPts val="1800"/>
+              <a:buFont typeface="Arial"/>
+              <a:buChar char="•"/>
+            </a:pPr>
+            <a:r>
+              <a:rPr lang="en-US" sz="1600" dirty="0" b="1">
+                <a:solidFill>
+                  <a:srgbClr val="595959"/>
+                </a:solidFill>
+              </a:rPr>
+              <a:t>Dataset dashboard: </a:t>
+            </a:r>
+            <a:r>
+              <a:rPr lang="en-US" sz="1600" dirty="0">
+                <a:solidFill>
+                  <a:srgbClr val="595959"/>
+                </a:solidFill>
+              </a:rPr>
+              <a:t>show how many verified hours Vani has for each dialect</a:t>
+            </a:r>
+          </a:p>
+          <a:p>
+            <a:pPr marL="457200" indent="-342900">
+              <a:lnSpc>
+                <a:spcPct val="90000"/>
+              </a:lnSpc>
+              <a:spcBef>
+                <a:spcPts val="1100"/>
+              </a:spcBef>
+              <a:buSzPts val="1800"/>
+              <a:buFont typeface="Arial"/>
+              <a:buChar char="•"/>
+            </a:pPr>
+            <a:r>
+              <a:rPr lang="en-US" sz="1600" dirty="0" b="1">
+                <a:solidFill>
+                  <a:srgbClr val="595959"/>
+                </a:solidFill>
+              </a:rPr>
+              <a:t>Speakers: </a:t>
+            </a:r>
+            <a:r>
+              <a:rPr lang="en-US" sz="1600" dirty="0">
+                <a:solidFill>
+                  <a:srgbClr val="595959"/>
+                </a:solidFill>
+              </a:rPr>
+              <a:t>tell speakers apart in a recording (diarization)</a:t>
+            </a:r>
+          </a:p>
+          <a:p>
+            <a:pPr marL="457200" indent="-342900">
+              <a:lnSpc>
+                <a:spcPct val="90000"/>
+              </a:lnSpc>
+              <a:spcBef>
+                <a:spcPts val="1100"/>
+              </a:spcBef>
+              <a:buSzPts val="1800"/>
+              <a:buFont typeface="Arial"/>
+              <a:buChar char="•"/>
+            </a:pPr>
+            <a:r>
+              <a:rPr lang="en-US" sz="1600" dirty="0" b="1">
+                <a:solidFill>
+                  <a:srgbClr val="595959"/>
+                </a:solidFill>
+              </a:rPr>
+              <a:t>Accessibility: </a:t>
+            </a:r>
+            <a:r>
+              <a:rPr lang="en-US" sz="1600" dirty="0">
+                <a:solidFill>
+                  <a:srgbClr val="595959"/>
+                </a:solidFill>
+              </a:rPr>
+              <a:t>interface in Kannada, Hindi and other Indian languages</a:t>
+            </a:r>
+          </a:p>
+          <a:p>
+            <a:pPr marL="457200" indent="-342900">
+              <a:lnSpc>
+                <a:spcPct val="90000"/>
+              </a:lnSpc>
+              <a:spcBef>
+                <a:spcPts val="1100"/>
+              </a:spcBef>
+              <a:buSzPts val="1800"/>
+              <a:buFont typeface="Arial"/>
+              <a:buChar char="•"/>
+            </a:pPr>
+            <a:r>
+              <a:rPr lang="en-US" sz="1600" dirty="0" b="1">
+                <a:solidFill>
+                  <a:srgbClr val="595959"/>
+                </a:solidFill>
+              </a:rPr>
+              <a:t>Train Vani: </a:t>
+            </a:r>
+            <a:r>
+              <a:rPr lang="en-US" sz="1600" dirty="0">
+                <a:solidFill>
+                  <a:srgbClr val="595959"/>
+                </a:solidFill>
+              </a:rPr>
+              <a:t>fine-tune Whisper on the exported dataset and measure word error rate</a:t>
             </a:r>
           </a:p>
         </p:txBody>
@@ -5252,14 +5035,20 @@
       </p:grpSpPr>
       <p:sp>
         <p:nvSpPr>
-          <p:cNvPr id="11" name="Title 11"/>
+          <p:cNvPr id="3" name="Google Shape;68;g78e6671419f8a2a0_22">
+            <a:extLst>
+              <a:ext uri="{FF2B5EF4-FFF2-40B4-BE49-F238E27FC236}">
+                <a16:creationId xmlns:a16="http://schemas.microsoft.com/office/drawing/2014/main" id="{BA677A83-D006-E1F4-CCF8-948027C21AB2}"/>
+              </a:ext>
+            </a:extLst>
+          </p:cNvPr>
           <p:cNvSpPr txBox="1"/>
           <p:nvPr/>
         </p:nvSpPr>
         <p:spPr>
           <a:xfrm>
             <a:off x="628650" y="1131097"/>
-            <a:ext cx="7886700" cy="760000"/>
+            <a:ext cx="7886700" cy="994275"/>
           </a:xfrm>
           <a:prstGeom prst="rect">
             <a:avLst/>
@@ -5270,12 +5059,12 @@
           </a:ln>
         </p:spPr>
         <p:txBody>
-          <a:bodyPr wrap="square" lIns="68569" tIns="34275" rIns="68569" bIns="34275" anchor="ctr">
+          <a:bodyPr spcFirstLastPara="1" wrap="square" lIns="68569" tIns="34275" rIns="68569" bIns="34275" anchor="ctr" anchorCtr="0">
             <a:normAutofit/>
           </a:bodyPr>
           <a:lstStyle/>
           <a:p>
-            <a:pPr algn="ctr">
+            <a:pPr algn="ctr" defTabSz="685800">
               <a:lnSpc>
                 <a:spcPct val="90000"/>
               </a:lnSpc>
@@ -5285,593 +5074,187 @@
                 <a:latin typeface="Times New Roman" panose="02020603050405020304" pitchFamily="18" charset="0"/>
                 <a:cs typeface="Times New Roman" panose="02020603050405020304" pitchFamily="18" charset="0"/>
               </a:rPr>
-              <a:t>Implementation - Technology Stack</a:t>
-            </a:r>
+              <a:t>References</a:t>
+            </a:r>
+            <a:endParaRPr sz="2400" dirty="0">
+              <a:latin typeface="Times New Roman" panose="02020603050405020304" pitchFamily="18" charset="0"/>
+              <a:cs typeface="Times New Roman" panose="02020603050405020304" pitchFamily="18" charset="0"/>
+            </a:endParaRPr>
           </a:p>
         </p:txBody>
       </p:sp>
-      <p:graphicFrame>
-        <p:nvGraphicFramePr>
-          <p:cNvPr id="12" name="Tech stack"/>
-          <p:cNvGraphicFramePr>
-            <a:graphicFrameLocks noGrp="1"/>
-          </p:cNvGraphicFramePr>
+      <p:sp>
+        <p:nvSpPr>
+          <p:cNvPr id="5" name="Google Shape;69;g78e6671419f8a2a0_22">
+            <a:extLst>
+              <a:ext uri="{FF2B5EF4-FFF2-40B4-BE49-F238E27FC236}">
+                <a16:creationId xmlns:a16="http://schemas.microsoft.com/office/drawing/2014/main" id="{13186C97-59A2-67F5-3892-203B43C861C9}"/>
+              </a:ext>
+            </a:extLst>
+          </p:cNvPr>
+          <p:cNvSpPr txBox="1"/>
           <p:nvPr/>
-        </p:nvGraphicFramePr>
-        <p:xfrm>
-          <a:off x="640080" y="2011680"/>
-          <a:ext cx="7863840" cy="3867912"/>
-        </p:xfrm>
-        <a:graphic>
-          <a:graphicData uri="http://schemas.openxmlformats.org/drawingml/2006/table">
-            <a:tbl>
-              <a:tblPr firstRow="1" bandRow="1"/>
-              <a:tblGrid>
-                <a:gridCol w="1920240"/>
-                <a:gridCol w="5943600"/>
-              </a:tblGrid>
-              <a:tr h="429768">
-                <a:tc>
-                  <a:txBody>
-                    <a:bodyPr/>
-                    <a:lstStyle/>
-                    <a:p>
-                      <a:pPr marL="0" indent="0" algn="l">
-                        <a:lnSpc>
-                          <a:spcPct val="100000"/>
-                        </a:lnSpc>
-                        <a:spcBef>
-                          <a:spcPts val="0"/>
-                        </a:spcBef>
-                        <a:buNone/>
-                      </a:pPr>
-                      <a:r>
-                        <a:rPr lang="en-US" sz="1200" b="1" dirty="0">
-                          <a:solidFill>
-                            <a:srgbClr val="FFFFFF"/>
-                          </a:solidFill>
-                        </a:rPr>
-                        <a:t>Layer</a:t>
-                      </a:r>
-                    </a:p>
-                  </a:txBody>
-                  <a:tcPr marL="91440" marR="91440" marT="54000" marB="54000" anchor="ctr">
-                    <a:solidFill>
-                      <a:srgbClr val="B45309"/>
-                    </a:solidFill>
-                  </a:tcPr>
-                </a:tc>
-                <a:tc>
-                  <a:txBody>
-                    <a:bodyPr/>
-                    <a:lstStyle/>
-                    <a:p>
-                      <a:pPr marL="0" indent="0" algn="l">
-                        <a:lnSpc>
-                          <a:spcPct val="100000"/>
-                        </a:lnSpc>
-                        <a:spcBef>
-                          <a:spcPts val="0"/>
-                        </a:spcBef>
-                        <a:buNone/>
-                      </a:pPr>
-                      <a:r>
-                        <a:rPr lang="en-US" sz="1200" b="1" dirty="0">
-                          <a:solidFill>
-                            <a:srgbClr val="FFFFFF"/>
-                          </a:solidFill>
-                        </a:rPr>
-                        <a:t>Technology</a:t>
-                      </a:r>
-                    </a:p>
-                  </a:txBody>
-                  <a:tcPr marL="91440" marR="91440" marT="54000" marB="54000" anchor="ctr">
-                    <a:solidFill>
-                      <a:srgbClr val="B45309"/>
-                    </a:solidFill>
-                  </a:tcPr>
-                </a:tc>
-              </a:tr>
-              <a:tr h="429768">
-                <a:tc>
-                  <a:txBody>
-                    <a:bodyPr/>
-                    <a:lstStyle/>
-                    <a:p>
-                      <a:pPr marL="0" indent="0" algn="l">
-                        <a:lnSpc>
-                          <a:spcPct val="100000"/>
-                        </a:lnSpc>
-                        <a:spcBef>
-                          <a:spcPts val="0"/>
-                        </a:spcBef>
-                        <a:buNone/>
-                      </a:pPr>
-                      <a:r>
-                        <a:rPr lang="en-US" sz="1200" b="1" dirty="0">
-                          <a:solidFill>
-                            <a:srgbClr val="262626"/>
-                          </a:solidFill>
-                        </a:rPr>
-                        <a:t>Frontend</a:t>
-                      </a:r>
-                    </a:p>
-                  </a:txBody>
-                  <a:tcPr marL="91440" marR="91440" marT="54000" marB="54000" anchor="ctr">
-                    <a:solidFill>
-                      <a:srgbClr val="FFFFFF"/>
-                    </a:solidFill>
-                  </a:tcPr>
-                </a:tc>
-                <a:tc>
-                  <a:txBody>
-                    <a:bodyPr/>
-                    <a:lstStyle/>
-                    <a:p>
-                      <a:pPr marL="0" indent="0" algn="l">
-                        <a:lnSpc>
-                          <a:spcPct val="100000"/>
-                        </a:lnSpc>
-                        <a:spcBef>
-                          <a:spcPts val="0"/>
-                        </a:spcBef>
-                        <a:buNone/>
-                      </a:pPr>
-                      <a:r>
-                        <a:rPr lang="en-US" sz="1200" dirty="0">
-                          <a:solidFill>
-                            <a:srgbClr val="262626"/>
-                          </a:solidFill>
-                        </a:rPr>
-                        <a:t>React 19, TypeScript, Vite, Tailwind CSS (Vercel)</a:t>
-                      </a:r>
-                    </a:p>
-                  </a:txBody>
-                  <a:tcPr marL="91440" marR="91440" marT="54000" marB="54000" anchor="ctr">
-                    <a:solidFill>
-                      <a:srgbClr val="FFFFFF"/>
-                    </a:solidFill>
-                  </a:tcPr>
-                </a:tc>
-              </a:tr>
-              <a:tr h="429768">
-                <a:tc>
-                  <a:txBody>
-                    <a:bodyPr/>
-                    <a:lstStyle/>
-                    <a:p>
-                      <a:pPr marL="0" indent="0" algn="l">
-                        <a:lnSpc>
-                          <a:spcPct val="100000"/>
-                        </a:lnSpc>
-                        <a:spcBef>
-                          <a:spcPts val="0"/>
-                        </a:spcBef>
-                        <a:buNone/>
-                      </a:pPr>
-                      <a:r>
-                        <a:rPr lang="en-US" sz="1200" b="1" dirty="0">
-                          <a:solidFill>
-                            <a:srgbClr val="262626"/>
-                          </a:solidFill>
-                        </a:rPr>
-                        <a:t>Backend</a:t>
-                      </a:r>
-                    </a:p>
-                  </a:txBody>
-                  <a:tcPr marL="91440" marR="91440" marT="54000" marB="54000" anchor="ctr">
-                    <a:solidFill>
-                      <a:srgbClr val="F2F2F2"/>
-                    </a:solidFill>
-                  </a:tcPr>
-                </a:tc>
-                <a:tc>
-                  <a:txBody>
-                    <a:bodyPr/>
-                    <a:lstStyle/>
-                    <a:p>
-                      <a:pPr marL="0" indent="0" algn="l">
-                        <a:lnSpc>
-                          <a:spcPct val="100000"/>
-                        </a:lnSpc>
-                        <a:spcBef>
-                          <a:spcPts val="0"/>
-                        </a:spcBef>
-                        <a:buNone/>
-                      </a:pPr>
-                      <a:r>
-                        <a:rPr lang="en-US" sz="1200" dirty="0">
-                          <a:solidFill>
-                            <a:srgbClr val="262626"/>
-                          </a:solidFill>
-                        </a:rPr>
-                        <a:t>FastAPI, SQLModel, JWT auth, bcrypt (Render, Docker)</a:t>
-                      </a:r>
-                    </a:p>
-                  </a:txBody>
-                  <a:tcPr marL="91440" marR="91440" marT="54000" marB="54000" anchor="ctr">
-                    <a:solidFill>
-                      <a:srgbClr val="F2F2F2"/>
-                    </a:solidFill>
-                  </a:tcPr>
-                </a:tc>
-              </a:tr>
-              <a:tr h="429768">
-                <a:tc>
-                  <a:txBody>
-                    <a:bodyPr/>
-                    <a:lstStyle/>
-                    <a:p>
-                      <a:pPr marL="0" indent="0" algn="l">
-                        <a:lnSpc>
-                          <a:spcPct val="100000"/>
-                        </a:lnSpc>
-                        <a:spcBef>
-                          <a:spcPts val="0"/>
-                        </a:spcBef>
-                        <a:buNone/>
-                      </a:pPr>
-                      <a:r>
-                        <a:rPr lang="en-US" sz="1200" b="1" dirty="0">
-                          <a:solidFill>
-                            <a:srgbClr val="262626"/>
-                          </a:solidFill>
-                        </a:rPr>
-                        <a:t>Database</a:t>
-                      </a:r>
-                    </a:p>
-                  </a:txBody>
-                  <a:tcPr marL="91440" marR="91440" marT="54000" marB="54000" anchor="ctr">
-                    <a:solidFill>
-                      <a:srgbClr val="FFFFFF"/>
-                    </a:solidFill>
-                  </a:tcPr>
-                </a:tc>
-                <a:tc>
-                  <a:txBody>
-                    <a:bodyPr/>
-                    <a:lstStyle/>
-                    <a:p>
-                      <a:pPr marL="0" indent="0" algn="l">
-                        <a:lnSpc>
-                          <a:spcPct val="100000"/>
-                        </a:lnSpc>
-                        <a:spcBef>
-                          <a:spcPts val="0"/>
-                        </a:spcBef>
-                        <a:buNone/>
-                      </a:pPr>
-                      <a:r>
-                        <a:rPr lang="en-US" sz="1200" dirty="0">
-                          <a:solidFill>
-                            <a:srgbClr val="262626"/>
-                          </a:solidFill>
-                        </a:rPr>
-                        <a:t>PostgreSQL + pgvector, full-text search (Supabase)</a:t>
-                      </a:r>
-                    </a:p>
-                  </a:txBody>
-                  <a:tcPr marL="91440" marR="91440" marT="54000" marB="54000" anchor="ctr">
-                    <a:solidFill>
-                      <a:srgbClr val="FFFFFF"/>
-                    </a:solidFill>
-                  </a:tcPr>
-                </a:tc>
-              </a:tr>
-              <a:tr h="429768">
-                <a:tc>
-                  <a:txBody>
-                    <a:bodyPr/>
-                    <a:lstStyle/>
-                    <a:p>
-                      <a:pPr marL="0" indent="0" algn="l">
-                        <a:lnSpc>
-                          <a:spcPct val="100000"/>
-                        </a:lnSpc>
-                        <a:spcBef>
-                          <a:spcPts val="0"/>
-                        </a:spcBef>
-                        <a:buNone/>
-                      </a:pPr>
-                      <a:r>
-                        <a:rPr lang="en-US" sz="1200" b="1" dirty="0">
-                          <a:solidFill>
-                            <a:srgbClr val="262626"/>
-                          </a:solidFill>
-                        </a:rPr>
-                        <a:t>Storage</a:t>
-                      </a:r>
-                    </a:p>
-                  </a:txBody>
-                  <a:tcPr marL="91440" marR="91440" marT="54000" marB="54000" anchor="ctr">
-                    <a:solidFill>
-                      <a:srgbClr val="F2F2F2"/>
-                    </a:solidFill>
-                  </a:tcPr>
-                </a:tc>
-                <a:tc>
-                  <a:txBody>
-                    <a:bodyPr/>
-                    <a:lstStyle/>
-                    <a:p>
-                      <a:pPr marL="0" indent="0" algn="l">
-                        <a:lnSpc>
-                          <a:spcPct val="100000"/>
-                        </a:lnSpc>
-                        <a:spcBef>
-                          <a:spcPts val="0"/>
-                        </a:spcBef>
-                        <a:buNone/>
-                      </a:pPr>
-                      <a:r>
-                        <a:rPr lang="en-US" sz="1200" dirty="0">
-                          <a:solidFill>
-                            <a:srgbClr val="262626"/>
-                          </a:solidFill>
-                        </a:rPr>
-                        <a:t>Supabase Storage with signed upload URLs</a:t>
-                      </a:r>
-                    </a:p>
-                  </a:txBody>
-                  <a:tcPr marL="91440" marR="91440" marT="54000" marB="54000" anchor="ctr">
-                    <a:solidFill>
-                      <a:srgbClr val="F2F2F2"/>
-                    </a:solidFill>
-                  </a:tcPr>
-                </a:tc>
-              </a:tr>
-              <a:tr h="429768">
-                <a:tc>
-                  <a:txBody>
-                    <a:bodyPr/>
-                    <a:lstStyle/>
-                    <a:p>
-                      <a:pPr marL="0" indent="0" algn="l">
-                        <a:lnSpc>
-                          <a:spcPct val="100000"/>
-                        </a:lnSpc>
-                        <a:spcBef>
-                          <a:spcPts val="0"/>
-                        </a:spcBef>
-                        <a:buNone/>
-                      </a:pPr>
-                      <a:r>
-                        <a:rPr lang="en-US" sz="1200" b="1" dirty="0">
-                          <a:solidFill>
-                            <a:srgbClr val="262626"/>
-                          </a:solidFill>
-                        </a:rPr>
-                        <a:t>Speech AI</a:t>
-                      </a:r>
-                    </a:p>
-                  </a:txBody>
-                  <a:tcPr marL="91440" marR="91440" marT="54000" marB="54000" anchor="ctr">
-                    <a:solidFill>
-                      <a:srgbClr val="FFFFFF"/>
-                    </a:solidFill>
-                  </a:tcPr>
-                </a:tc>
-                <a:tc>
-                  <a:txBody>
-                    <a:bodyPr/>
-                    <a:lstStyle/>
-                    <a:p>
-                      <a:pPr marL="0" indent="0" algn="l">
-                        <a:lnSpc>
-                          <a:spcPct val="100000"/>
-                        </a:lnSpc>
-                        <a:spcBef>
-                          <a:spcPts val="0"/>
-                        </a:spcBef>
-                        <a:buNone/>
-                      </a:pPr>
-                      <a:r>
-                        <a:rPr lang="en-US" sz="1200" dirty="0">
-                          <a:solidFill>
-                            <a:srgbClr val="262626"/>
-                          </a:solidFill>
-                        </a:rPr>
-                        <a:t>Whisper large-v3 via Groq; faster-whisper locally</a:t>
-                      </a:r>
-                    </a:p>
-                  </a:txBody>
-                  <a:tcPr marL="91440" marR="91440" marT="54000" marB="54000" anchor="ctr">
-                    <a:solidFill>
-                      <a:srgbClr val="FFFFFF"/>
-                    </a:solidFill>
-                  </a:tcPr>
-                </a:tc>
-              </a:tr>
-              <a:tr h="429768">
-                <a:tc>
-                  <a:txBody>
-                    <a:bodyPr/>
-                    <a:lstStyle/>
-                    <a:p>
-                      <a:pPr marL="0" indent="0" algn="l">
-                        <a:lnSpc>
-                          <a:spcPct val="100000"/>
-                        </a:lnSpc>
-                        <a:spcBef>
-                          <a:spcPts val="0"/>
-                        </a:spcBef>
-                        <a:buNone/>
-                      </a:pPr>
-                      <a:r>
-                        <a:rPr lang="en-US" sz="1200" b="1" dirty="0">
-                          <a:solidFill>
-                            <a:srgbClr val="262626"/>
-                          </a:solidFill>
-                        </a:rPr>
-                        <a:t>Language AI</a:t>
-                      </a:r>
-                    </a:p>
-                  </a:txBody>
-                  <a:tcPr marL="91440" marR="91440" marT="54000" marB="54000" anchor="ctr">
-                    <a:solidFill>
-                      <a:srgbClr val="F2F2F2"/>
-                    </a:solidFill>
-                  </a:tcPr>
-                </a:tc>
-                <a:tc>
-                  <a:txBody>
-                    <a:bodyPr/>
-                    <a:lstStyle/>
-                    <a:p>
-                      <a:pPr marL="0" indent="0" algn="l">
-                        <a:lnSpc>
-                          <a:spcPct val="100000"/>
-                        </a:lnSpc>
-                        <a:spcBef>
-                          <a:spcPts val="0"/>
-                        </a:spcBef>
-                        <a:buNone/>
-                      </a:pPr>
-                      <a:r>
-                        <a:rPr lang="en-US" sz="1200" dirty="0">
-                          <a:solidFill>
-                            <a:srgbClr val="262626"/>
-                          </a:solidFill>
-                        </a:rPr>
-                        <a:t>Llama 3.3 70B (translation); multilingual MiniLM embeddings</a:t>
-                      </a:r>
-                    </a:p>
-                  </a:txBody>
-                  <a:tcPr marL="91440" marR="91440" marT="54000" marB="54000" anchor="ctr">
-                    <a:solidFill>
-                      <a:srgbClr val="F2F2F2"/>
-                    </a:solidFill>
-                  </a:tcPr>
-                </a:tc>
-              </a:tr>
-              <a:tr h="429768">
-                <a:tc>
-                  <a:txBody>
-                    <a:bodyPr/>
-                    <a:lstStyle/>
-                    <a:p>
-                      <a:pPr marL="0" indent="0" algn="l">
-                        <a:lnSpc>
-                          <a:spcPct val="100000"/>
-                        </a:lnSpc>
-                        <a:spcBef>
-                          <a:spcPts val="0"/>
-                        </a:spcBef>
-                        <a:buNone/>
-                      </a:pPr>
-                      <a:r>
-                        <a:rPr lang="en-US" sz="1200" b="1" dirty="0">
-                          <a:solidFill>
-                            <a:srgbClr val="262626"/>
-                          </a:solidFill>
-                        </a:rPr>
-                        <a:t>Audio</a:t>
-                      </a:r>
-                    </a:p>
-                  </a:txBody>
-                  <a:tcPr marL="91440" marR="91440" marT="54000" marB="54000" anchor="ctr">
-                    <a:solidFill>
-                      <a:srgbClr val="FFFFFF"/>
-                    </a:solidFill>
-                  </a:tcPr>
-                </a:tc>
-                <a:tc>
-                  <a:txBody>
-                    <a:bodyPr/>
-                    <a:lstStyle/>
-                    <a:p>
-                      <a:pPr marL="0" indent="0" algn="l">
-                        <a:lnSpc>
-                          <a:spcPct val="100000"/>
-                        </a:lnSpc>
-                        <a:spcBef>
-                          <a:spcPts val="0"/>
-                        </a:spcBef>
-                        <a:buNone/>
-                      </a:pPr>
-                      <a:r>
-                        <a:rPr lang="en-US" sz="1200" dirty="0">
-                          <a:solidFill>
-                            <a:srgbClr val="262626"/>
-                          </a:solidFill>
-                        </a:rPr>
-                        <a:t>ffmpeg, ffprobe</a:t>
-                      </a:r>
-                    </a:p>
-                  </a:txBody>
-                  <a:tcPr marL="91440" marR="91440" marT="54000" marB="54000" anchor="ctr">
-                    <a:solidFill>
-                      <a:srgbClr val="FFFFFF"/>
-                    </a:solidFill>
-                  </a:tcPr>
-                </a:tc>
-              </a:tr>
-              <a:tr h="429768">
-                <a:tc>
-                  <a:txBody>
-                    <a:bodyPr/>
-                    <a:lstStyle/>
-                    <a:p>
-                      <a:pPr marL="0" indent="0" algn="l">
-                        <a:lnSpc>
-                          <a:spcPct val="100000"/>
-                        </a:lnSpc>
-                        <a:spcBef>
-                          <a:spcPts val="0"/>
-                        </a:spcBef>
-                        <a:buNone/>
-                      </a:pPr>
-                      <a:r>
-                        <a:rPr lang="en-US" sz="1200" b="1" dirty="0">
-                          <a:solidFill>
-                            <a:srgbClr val="262626"/>
-                          </a:solidFill>
-                        </a:rPr>
-                        <a:t>Testing / CI</a:t>
-                      </a:r>
-                    </a:p>
-                  </a:txBody>
-                  <a:tcPr marL="91440" marR="91440" marT="54000" marB="54000" anchor="ctr">
-                    <a:solidFill>
-                      <a:srgbClr val="F2F2F2"/>
-                    </a:solidFill>
-                  </a:tcPr>
-                </a:tc>
-                <a:tc>
-                  <a:txBody>
-                    <a:bodyPr/>
-                    <a:lstStyle/>
-                    <a:p>
-                      <a:pPr marL="0" indent="0" algn="l">
-                        <a:lnSpc>
-                          <a:spcPct val="100000"/>
-                        </a:lnSpc>
-                        <a:spcBef>
-                          <a:spcPts val="0"/>
-                        </a:spcBef>
-                        <a:buNone/>
-                      </a:pPr>
-                      <a:r>
-                        <a:rPr lang="en-US" sz="1200" dirty="0">
-                          <a:solidFill>
-                            <a:srgbClr val="262626"/>
-                          </a:solidFill>
-                        </a:rPr>
-                        <a:t>pytest (80 tests), Playwright end-to-end, GitHub Actions</a:t>
-                      </a:r>
-                    </a:p>
-                  </a:txBody>
-                  <a:tcPr marL="91440" marR="91440" marT="54000" marB="54000" anchor="ctr">
-                    <a:solidFill>
-                      <a:srgbClr val="F2F2F2"/>
-                    </a:solidFill>
-                  </a:tcPr>
-                </a:tc>
-              </a:tr>
-            </a:tbl>
-          </a:graphicData>
-        </a:graphic>
-      </p:graphicFrame>
+        </p:nvSpPr>
+        <p:spPr>
+          <a:xfrm>
+            <a:off x="822960" y="2011680"/>
+            <a:ext cx="7589520" cy="4206240"/>
+          </a:xfrm>
+          <a:prstGeom prst="rect">
+            <a:avLst/>
+          </a:prstGeom>
+          <a:noFill/>
+          <a:ln>
+            <a:noFill/>
+          </a:ln>
+        </p:spPr>
+        <p:txBody>
+          <a:bodyPr spcFirstLastPara="1" wrap="square" lIns="68569" tIns="34275" rIns="68569" bIns="34275" anchor="t" anchorCtr="0">
+            <a:noAutofit/>
+          </a:bodyPr>
+          <a:lstStyle/>
+          <a:p>
+            <a:pPr marL="457200" indent="-342900">
+              <a:lnSpc>
+                <a:spcPct val="90000"/>
+              </a:lnSpc>
+              <a:spcBef>
+                <a:spcPts val="700"/>
+              </a:spcBef>
+              <a:buFont typeface="+mj-lt"/>
+              <a:buAutoNum type="arabicPeriod"/>
+            </a:pPr>
+            <a:r>
+              <a:rPr lang="en-US" sz="1300" dirty="0">
+                <a:solidFill>
+                  <a:srgbClr val="595959"/>
+                </a:solidFill>
+              </a:rPr>
+              <a:t>UNESCO, Atlas of the World’s Languages in Danger, 3rd ed., Paris: UNESCO Publishing, 2010.</a:t>
+            </a:r>
+          </a:p>
+          <a:p>
+            <a:pPr marL="457200" indent="-342900">
+              <a:lnSpc>
+                <a:spcPct val="90000"/>
+              </a:lnSpc>
+              <a:spcBef>
+                <a:spcPts val="700"/>
+              </a:spcBef>
+              <a:buFont typeface="+mj-lt"/>
+              <a:buAutoNum type="arabicPeriod"/>
+            </a:pPr>
+            <a:r>
+              <a:rPr lang="en-US" sz="1300" dirty="0">
+                <a:solidFill>
+                  <a:srgbClr val="595959"/>
+                </a:solidFill>
+              </a:rPr>
+              <a:t>A. Radford, J. W. Kim, T. Xu, G. Brockman, C. McLeavey and I. Sutskever, “Robust Speech Recognition via Large-Scale Weak Supervision,” Proc. ICML, 2023.</a:t>
+            </a:r>
+          </a:p>
+          <a:p>
+            <a:pPr marL="457200" indent="-342900">
+              <a:lnSpc>
+                <a:spcPct val="90000"/>
+              </a:lnSpc>
+              <a:spcBef>
+                <a:spcPts val="700"/>
+              </a:spcBef>
+              <a:buFont typeface="+mj-lt"/>
+              <a:buAutoNum type="arabicPeriod"/>
+            </a:pPr>
+            <a:r>
+              <a:rPr lang="en-US" sz="1300" dirty="0">
+                <a:solidFill>
+                  <a:srgbClr val="595959"/>
+                </a:solidFill>
+              </a:rPr>
+              <a:t>N. Reimers and I. Gurevych, “Sentence-BERT: Sentence Embeddings using Siamese BERT-Networks,” Proc. EMNLP-IJCNLP, 2019.</a:t>
+            </a:r>
+          </a:p>
+          <a:p>
+            <a:pPr marL="457200" indent="-342900">
+              <a:lnSpc>
+                <a:spcPct val="90000"/>
+              </a:lnSpc>
+              <a:spcBef>
+                <a:spcPts val="700"/>
+              </a:spcBef>
+              <a:buFont typeface="+mj-lt"/>
+              <a:buAutoNum type="arabicPeriod"/>
+            </a:pPr>
+            <a:r>
+              <a:rPr lang="en-US" sz="1300" dirty="0">
+                <a:solidFill>
+                  <a:srgbClr val="595959"/>
+                </a:solidFill>
+              </a:rPr>
+              <a:t>N. Reimers and I. Gurevych, “Making Monolingual Sentence Embeddings Multilingual using Knowledge Distillation,” Proc. EMNLP, 2020.</a:t>
+            </a:r>
+          </a:p>
+          <a:p>
+            <a:pPr marL="457200" indent="-342900">
+              <a:lnSpc>
+                <a:spcPct val="90000"/>
+              </a:lnSpc>
+              <a:spcBef>
+                <a:spcPts val="700"/>
+              </a:spcBef>
+              <a:buFont typeface="+mj-lt"/>
+              <a:buAutoNum type="arabicPeriod"/>
+            </a:pPr>
+            <a:r>
+              <a:rPr lang="en-US" sz="1300" dirty="0">
+                <a:solidFill>
+                  <a:srgbClr val="595959"/>
+                </a:solidFill>
+              </a:rPr>
+              <a:t>H. Bredin et al., “pyannote.audio: Neural Building Blocks for Speaker Diarization,” Proc. ICASSP, 2020.</a:t>
+            </a:r>
+          </a:p>
+          <a:p>
+            <a:pPr marL="457200" indent="-342900">
+              <a:lnSpc>
+                <a:spcPct val="90000"/>
+              </a:lnSpc>
+              <a:spcBef>
+                <a:spcPts val="700"/>
+              </a:spcBef>
+              <a:buFont typeface="+mj-lt"/>
+              <a:buAutoNum type="arabicPeriod"/>
+            </a:pPr>
+            <a:r>
+              <a:rPr lang="en-US" sz="1300" dirty="0">
+                <a:solidFill>
+                  <a:srgbClr val="595959"/>
+                </a:solidFill>
+              </a:rPr>
+              <a:t>pgvector: open-source vector similarity search for PostgreSQL, github.com/pgvector/pgvector.</a:t>
+            </a:r>
+          </a:p>
+          <a:p>
+            <a:pPr marL="457200" indent="-342900">
+              <a:lnSpc>
+                <a:spcPct val="90000"/>
+              </a:lnSpc>
+              <a:spcBef>
+                <a:spcPts val="700"/>
+              </a:spcBef>
+              <a:buFont typeface="+mj-lt"/>
+              <a:buAutoNum type="arabicPeriod"/>
+            </a:pPr>
+            <a:r>
+              <a:rPr lang="en-US" sz="1300" dirty="0">
+                <a:solidFill>
+                  <a:srgbClr val="595959"/>
+                </a:solidFill>
+              </a:rPr>
+              <a:t>SIL International, ISO 639-3 code tables, iso639-3.sil.org.</a:t>
+            </a:r>
+          </a:p>
+        </p:txBody>
+      </p:sp>
     </p:spTree>
   </p:cSld>
   <p:clrMapOvr>
@@ -5885,7 +5268,13 @@
   <p:cSld>
     <p:spTree>
       <p:nvGrpSpPr>
-        <p:cNvPr id="1" name="Shape 57"/>
+        <p:cNvPr id="1" name="Shape 57">
+          <a:extLst>
+            <a:ext uri="{FF2B5EF4-FFF2-40B4-BE49-F238E27FC236}">
+              <a16:creationId xmlns:a16="http://schemas.microsoft.com/office/drawing/2014/main" id="{59236BD8-2EB6-C6B1-A74F-9CF531C8EB4D}"/>
+            </a:ext>
+          </a:extLst>
+        </p:cNvPr>
         <p:cNvGrpSpPr/>
         <p:nvPr/>
       </p:nvGrpSpPr>
@@ -5899,14 +5288,20 @@
       </p:grpSpPr>
       <p:sp>
         <p:nvSpPr>
-          <p:cNvPr id="11" name="Title 11"/>
+          <p:cNvPr id="4" name="Google Shape;105;p11">
+            <a:extLst>
+              <a:ext uri="{FF2B5EF4-FFF2-40B4-BE49-F238E27FC236}">
+                <a16:creationId xmlns:a16="http://schemas.microsoft.com/office/drawing/2014/main" id="{80E82BBC-903E-03E5-F615-ED94D1174626}"/>
+              </a:ext>
+            </a:extLst>
+          </p:cNvPr>
           <p:cNvSpPr txBox="1"/>
           <p:nvPr/>
         </p:nvSpPr>
         <p:spPr>
           <a:xfrm>
-            <a:off x="628650" y="1131097"/>
-            <a:ext cx="7886700" cy="760000"/>
+            <a:off x="1610325" y="2832109"/>
+            <a:ext cx="5829300" cy="874350"/>
           </a:xfrm>
           <a:prstGeom prst="rect">
             <a:avLst/>
@@ -5917,1725 +5312,39 @@
           </a:ln>
         </p:spPr>
         <p:txBody>
-          <a:bodyPr wrap="square" lIns="68569" tIns="34275" rIns="68569" bIns="34275" anchor="ctr">
-            <a:normAutofit/>
-          </a:bodyPr>
-          <a:lstStyle/>
-          <a:p>
-            <a:pPr algn="ctr">
-              <a:lnSpc>
-                <a:spcPct val="90000"/>
-              </a:lnSpc>
-            </a:pPr>
-            <a:r>
-              <a:rPr lang="en-GB" sz="2400" dirty="0">
-                <a:latin typeface="Times New Roman" panose="02020603050405020304" pitchFamily="18" charset="0"/>
-                <a:cs typeface="Times New Roman" panose="02020603050405020304" pitchFamily="18" charset="0"/>
-              </a:rPr>
-              <a:t>Results - Listening Editor</a:t>
-            </a:r>
-          </a:p>
-        </p:txBody>
-      </p:sp>
-      <p:pic>
-        <p:nvPicPr>
-          <p:cNvPr id="12" name="Screenshot 12" descr="Recording page with waveform player and transcript"/>
-          <p:cNvPicPr>
-            <a:picLocks noChangeAspect="1"/>
-          </p:cNvPicPr>
-          <p:nvPr/>
-        </p:nvPicPr>
-        <p:blipFill>
-          <a:blip r:embed="rIdSV1"/>
-          <a:stretch>
-            <a:fillRect/>
-          </a:stretch>
-        </p:blipFill>
-        <p:spPr>
-          <a:xfrm>
-            <a:off x="457200" y="1965960"/>
-            <a:ext cx="4050453" cy="3566160"/>
-          </a:xfrm>
-          <a:prstGeom prst="rect">
-            <a:avLst/>
-          </a:prstGeom>
-          <a:ln w="9525">
-            <a:solidFill>
-              <a:srgbClr val="BFBFBF"/>
-            </a:solidFill>
-          </a:ln>
-        </p:spPr>
-      </p:pic>
-      <p:pic>
-        <p:nvPicPr>
-          <p:cNvPr id="13" name="Screenshot 13" descr="Editor correcting a passage with AI suggestion"/>
-          <p:cNvPicPr>
-            <a:picLocks noChangeAspect="1"/>
-          </p:cNvPicPr>
-          <p:nvPr/>
-        </p:nvPicPr>
-        <p:blipFill>
-          <a:blip r:embed="rIdSV2"/>
-          <a:stretch>
-            <a:fillRect/>
-          </a:stretch>
-        </p:blipFill>
-        <p:spPr>
-          <a:xfrm>
-            <a:off x="4736253" y="1965960"/>
-            <a:ext cx="3950547" cy="2275858"/>
-          </a:xfrm>
-          <a:prstGeom prst="rect">
-            <a:avLst/>
-          </a:prstGeom>
-          <a:ln w="9525">
-            <a:solidFill>
-              <a:srgbClr val="BFBFBF"/>
-            </a:solidFill>
-          </a:ln>
-        </p:spPr>
-      </p:pic>
-      <p:sp>
-        <p:nvSpPr>
-          <p:cNvPr id="14" name="Text 14"/>
-          <p:cNvSpPr txBox="1"/>
-          <p:nvPr/>
-        </p:nvSpPr>
-        <p:spPr>
-          <a:xfrm>
-            <a:off x="457200" y="5623560"/>
-            <a:ext cx="4050453" cy="548640"/>
-          </a:xfrm>
-          <a:prstGeom prst="rect">
-            <a:avLst/>
-          </a:prstGeom>
-          <a:noFill/>
-          <a:ln>
-            <a:noFill/>
-          </a:ln>
-        </p:spPr>
-        <p:txBody>
-          <a:bodyPr wrap="square" lIns="73152" tIns="73152" rIns="73152" bIns="73152" anchor="t">
+          <a:bodyPr spcFirstLastPara="1" wrap="square" lIns="68569" tIns="34275" rIns="68569" bIns="34275" anchor="t" anchorCtr="0">
             <a:noAutofit/>
           </a:bodyPr>
           <a:lstStyle/>
           <a:p>
-            <a:pPr marL="0" indent="0" algn="l">
-              <a:lnSpc>
-                <a:spcPct val="100000"/>
-              </a:lnSpc>
-              <a:spcBef>
-                <a:spcPts val="0"/>
-              </a:spcBef>
-              <a:buNone/>
+            <a:pPr algn="ctr">
+              <a:lnSpc>
+                <a:spcPct val="90000"/>
+              </a:lnSpc>
+              <a:buSzPts val="5200"/>
             </a:pPr>
             <a:r>
-              <a:rPr lang="en-US" sz="1100" dirty="0">
-                <a:solidFill>
-                  <a:srgbClr val="595959"/>
-                </a:solidFill>
-              </a:rPr>
-              <a:t>Waveform player: the transcript highlights the passage being heard</a:t>
-            </a:r>
-          </a:p>
-        </p:txBody>
-      </p:sp>
-      <p:sp>
-        <p:nvSpPr>
-          <p:cNvPr id="15" name="Text 15"/>
-          <p:cNvSpPr txBox="1"/>
-          <p:nvPr/>
-        </p:nvSpPr>
-        <p:spPr>
-          <a:xfrm>
-            <a:off x="4736253" y="4343400"/>
-            <a:ext cx="3950547" cy="1463040"/>
-          </a:xfrm>
-          <a:prstGeom prst="rect">
-            <a:avLst/>
-          </a:prstGeom>
-          <a:noFill/>
-          <a:ln>
-            <a:noFill/>
-          </a:ln>
-        </p:spPr>
-        <p:txBody>
-          <a:bodyPr wrap="square" lIns="73152" tIns="73152" rIns="73152" bIns="73152" anchor="t">
-            <a:noAutofit/>
-          </a:bodyPr>
-          <a:lstStyle/>
-          <a:p>
-            <a:pPr marL="0" indent="0" algn="l">
-              <a:lnSpc>
-                <a:spcPct val="105000"/>
-              </a:lnSpc>
-              <a:spcBef>
-                <a:spcPts val="0"/>
-              </a:spcBef>
-              <a:buNone/>
-            </a:pPr>
-            <a:r>
-              <a:rPr lang="en-US" sz="1100" dirty="0">
-                <a:solidFill>
-                  <a:srgbClr val="595959"/>
-                </a:solidFill>
-              </a:rPr>
-              <a:t>Correcting a passage: the AI draft, what was actually said, and the AI-suggested Latin script and English meaning</a:t>
-            </a:r>
-          </a:p>
-          <a:p>
-            <a:pPr marL="0" indent="0" algn="l">
-              <a:lnSpc>
-                <a:spcPct val="100000"/>
-              </a:lnSpc>
-              <a:spcBef>
-                <a:spcPts val="600"/>
-              </a:spcBef>
-              <a:buNone/>
-            </a:pPr>
-            <a:r>
-              <a:rPr lang="en-US" sz="1100" dirty="0">
-                <a:solidFill>
-                  <a:srgbClr val="595959"/>
-                </a:solidFill>
-              </a:rPr>
-              <a:t>Ctrl+Enter saves and moves to the next passage</a:t>
-            </a:r>
+              <a:rPr lang="en-GB" sz="3900" b="1" dirty="0">
+                <a:solidFill>
+                  <a:schemeClr val="dk1"/>
+                </a:solidFill>
+                <a:latin typeface="Times New Roman"/>
+                <a:ea typeface="Times New Roman"/>
+                <a:cs typeface="Times New Roman"/>
+                <a:sym typeface="Times New Roman"/>
+              </a:rPr>
+              <a:t>Thank You!</a:t>
+            </a:r>
+            <a:endParaRPr sz="1650" b="1" dirty="0"/>
           </a:p>
         </p:txBody>
       </p:sp>
     </p:spTree>
-  </p:cSld>
-  <p:clrMapOvr>
-    <a:masterClrMapping/>
-  </p:clrMapOvr>
-</p:sld>
-</file>
-
-<file path=ppt/slides/slide13.xml><?xml version="1.0" encoding="utf-8"?>
-<p:sld xmlns:a="http://schemas.openxmlformats.org/drawingml/2006/main" xmlns:r="http://schemas.openxmlformats.org/officeDocument/2006/relationships" xmlns:p="http://schemas.openxmlformats.org/presentationml/2006/main">
-  <p:cSld>
-    <p:spTree>
-      <p:nvGrpSpPr>
-        <p:cNvPr id="1" name="Shape 57"/>
-        <p:cNvGrpSpPr/>
-        <p:nvPr/>
-      </p:nvGrpSpPr>
-      <p:grpSpPr>
-        <a:xfrm>
-          <a:off x="0" y="0"/>
-          <a:ext cx="0" cy="0"/>
-          <a:chOff x="0" y="0"/>
-          <a:chExt cx="0" cy="0"/>
-        </a:xfrm>
-      </p:grpSpPr>
-      <p:sp>
-        <p:nvSpPr>
-          <p:cNvPr id="11" name="Title 11"/>
-          <p:cNvSpPr txBox="1"/>
-          <p:nvPr/>
-        </p:nvSpPr>
-        <p:spPr>
-          <a:xfrm>
-            <a:off x="628650" y="1131097"/>
-            <a:ext cx="7886700" cy="760000"/>
-          </a:xfrm>
-          <a:prstGeom prst="rect">
-            <a:avLst/>
-          </a:prstGeom>
-          <a:noFill/>
-          <a:ln>
-            <a:noFill/>
-          </a:ln>
-        </p:spPr>
-        <p:txBody>
-          <a:bodyPr wrap="square" lIns="68569" tIns="34275" rIns="68569" bIns="34275" anchor="ctr">
-            <a:normAutofit/>
-          </a:bodyPr>
-          <a:lstStyle/>
-          <a:p>
-            <a:pPr algn="ctr">
-              <a:lnSpc>
-                <a:spcPct val="90000"/>
-              </a:lnSpc>
-            </a:pPr>
-            <a:r>
-              <a:rPr lang="en-GB" sz="2400" dirty="0">
-                <a:latin typeface="Times New Roman" panose="02020603050405020304" pitchFamily="18" charset="0"/>
-                <a:cs typeface="Times New Roman" panose="02020603050405020304" pitchFamily="18" charset="0"/>
-              </a:rPr>
-              <a:t>Results - Recording and Search</a:t>
-            </a:r>
-          </a:p>
-        </p:txBody>
-      </p:sp>
-      <p:pic>
-        <p:nvPicPr>
-          <p:cNvPr id="12" name="Screenshot 12" descr="Recording wizard consent step"/>
-          <p:cNvPicPr>
-            <a:picLocks noChangeAspect="1"/>
-          </p:cNvPicPr>
-          <p:nvPr/>
-        </p:nvPicPr>
-        <p:blipFill>
-          <a:blip r:embed="rIdSV1"/>
-          <a:stretch>
-            <a:fillRect/>
-          </a:stretch>
-        </p:blipFill>
-        <p:spPr>
-          <a:xfrm>
-            <a:off x="457200" y="1965960"/>
-            <a:ext cx="2743200" cy="2590800"/>
-          </a:xfrm>
-          <a:prstGeom prst="rect">
-            <a:avLst/>
-          </a:prstGeom>
-          <a:ln w="9525">
-            <a:solidFill>
-              <a:srgbClr val="BFBFBF"/>
-            </a:solidFill>
-          </a:ln>
-        </p:spPr>
-      </p:pic>
-      <p:pic>
-        <p:nvPicPr>
-          <p:cNvPr id="13" name="Screenshot 13" descr="Search by meaning with play buttons"/>
-          <p:cNvPicPr>
-            <a:picLocks noChangeAspect="1"/>
-          </p:cNvPicPr>
-          <p:nvPr/>
-        </p:nvPicPr>
-        <p:blipFill>
-          <a:blip r:embed="rIdSV2"/>
-          <a:stretch>
-            <a:fillRect/>
-          </a:stretch>
-        </p:blipFill>
-        <p:spPr>
-          <a:xfrm>
-            <a:off x="3474720" y="1965960"/>
-            <a:ext cx="5212080" cy="3637598"/>
-          </a:xfrm>
-          <a:prstGeom prst="rect">
-            <a:avLst/>
-          </a:prstGeom>
-          <a:ln w="9525">
-            <a:solidFill>
-              <a:srgbClr val="BFBFBF"/>
-            </a:solidFill>
-          </a:ln>
-        </p:spPr>
-      </p:pic>
-      <p:sp>
-        <p:nvSpPr>
-          <p:cNvPr id="14" name="Text 14"/>
-          <p:cNvSpPr txBox="1"/>
-          <p:nvPr/>
-        </p:nvSpPr>
-        <p:spPr>
-          <a:xfrm>
-            <a:off x="457200" y="4629912"/>
-            <a:ext cx="2743200" cy="685800"/>
-          </a:xfrm>
-          <a:prstGeom prst="rect">
-            <a:avLst/>
-          </a:prstGeom>
-          <a:noFill/>
-          <a:ln>
-            <a:noFill/>
-          </a:ln>
-        </p:spPr>
-        <p:txBody>
-          <a:bodyPr wrap="square" lIns="73152" tIns="73152" rIns="73152" bIns="73152" anchor="t">
-            <a:noAutofit/>
-          </a:bodyPr>
-          <a:lstStyle/>
-          <a:p>
-            <a:pPr marL="0" indent="0" algn="l">
-              <a:lnSpc>
-                <a:spcPct val="100000"/>
-              </a:lnSpc>
-              <a:spcBef>
-                <a:spcPts val="0"/>
-              </a:spcBef>
-              <a:buNone/>
-            </a:pPr>
-            <a:r>
-              <a:rPr lang="en-US" sz="1100" dirty="0">
-                <a:solidFill>
-                  <a:srgbClr val="595959"/>
-                </a:solidFill>
-              </a:rPr>
-              <a:t>Recording wizard: the speaker's two separate consents</a:t>
-            </a:r>
-          </a:p>
-        </p:txBody>
-      </p:sp>
-      <p:sp>
-        <p:nvSpPr>
-          <p:cNvPr id="15" name="Text 15"/>
-          <p:cNvSpPr txBox="1"/>
-          <p:nvPr/>
-        </p:nvSpPr>
-        <p:spPr>
-          <a:xfrm>
-            <a:off x="3474720" y="5676710"/>
-            <a:ext cx="5212080" cy="457200"/>
-          </a:xfrm>
-          <a:prstGeom prst="rect">
-            <a:avLst/>
-          </a:prstGeom>
-          <a:noFill/>
-          <a:ln>
-            <a:noFill/>
-          </a:ln>
-        </p:spPr>
-        <p:txBody>
-          <a:bodyPr wrap="square" lIns="73152" tIns="73152" rIns="73152" bIns="73152" anchor="t">
-            <a:noAutofit/>
-          </a:bodyPr>
-          <a:lstStyle/>
-          <a:p>
-            <a:pPr marL="0" indent="0" algn="l">
-              <a:lnSpc>
-                <a:spcPct val="100000"/>
-              </a:lnSpc>
-              <a:spcBef>
-                <a:spcPts val="0"/>
-              </a:spcBef>
-              <a:buNone/>
-            </a:pPr>
-            <a:r>
-              <a:rPr lang="en-US" sz="1100" dirty="0">
-                <a:solidFill>
-                  <a:srgbClr val="595959"/>
-                </a:solidFill>
-              </a:rPr>
-              <a:t>Search by meaning: every result plays just its passage</a:t>
-            </a:r>
-          </a:p>
-        </p:txBody>
-      </p:sp>
-    </p:spTree>
-  </p:cSld>
-  <p:clrMapOvr>
-    <a:masterClrMapping/>
-  </p:clrMapOvr>
-</p:sld>
-</file>
-
-<file path=ppt/slides/slide14.xml><?xml version="1.0" encoding="utf-8"?>
-<p:sld xmlns:a="http://schemas.openxmlformats.org/drawingml/2006/main" xmlns:r="http://schemas.openxmlformats.org/officeDocument/2006/relationships" xmlns:p="http://schemas.openxmlformats.org/presentationml/2006/main">
-  <p:cSld>
-    <p:spTree>
-      <p:nvGrpSpPr>
-        <p:cNvPr id="1" name="Shape 57"/>
-        <p:cNvGrpSpPr/>
-        <p:nvPr/>
-      </p:nvGrpSpPr>
-      <p:grpSpPr>
-        <a:xfrm>
-          <a:off x="0" y="0"/>
-          <a:ext cx="0" cy="0"/>
-          <a:chOff x="0" y="0"/>
-          <a:chExt cx="0" cy="0"/>
-        </a:xfrm>
-      </p:grpSpPr>
-      <p:sp>
-        <p:nvSpPr>
-          <p:cNvPr id="11" name="Title 11"/>
-          <p:cNvSpPr txBox="1"/>
-          <p:nvPr/>
-        </p:nvSpPr>
-        <p:spPr>
-          <a:xfrm>
-            <a:off x="628650" y="1131097"/>
-            <a:ext cx="7886700" cy="760000"/>
-          </a:xfrm>
-          <a:prstGeom prst="rect">
-            <a:avLst/>
-          </a:prstGeom>
-          <a:noFill/>
-          <a:ln>
-            <a:noFill/>
-          </a:ln>
-        </p:spPr>
-        <p:txBody>
-          <a:bodyPr wrap="square" lIns="68569" tIns="34275" rIns="68569" bIns="34275" anchor="ctr">
-            <a:normAutofit/>
-          </a:bodyPr>
-          <a:lstStyle/>
-          <a:p>
-            <a:pPr algn="ctr">
-              <a:lnSpc>
-                <a:spcPct val="90000"/>
-              </a:lnSpc>
-            </a:pPr>
-            <a:r>
-              <a:rPr lang="en-GB" sz="2400" dirty="0">
-                <a:latin typeface="Times New Roman" panose="02020603050405020304" pitchFamily="18" charset="0"/>
-                <a:cs typeface="Times New Roman" panose="02020603050405020304" pitchFamily="18" charset="0"/>
-              </a:rPr>
-              <a:t>Results - Outcomes</a:t>
-            </a:r>
-          </a:p>
-        </p:txBody>
-      </p:sp>
-      <p:sp>
-        <p:nvSpPr>
-          <p:cNvPr id="12" name="Text 12"/>
-          <p:cNvSpPr txBox="1"/>
-          <p:nvPr/>
-        </p:nvSpPr>
-        <p:spPr>
-          <a:xfrm>
-            <a:off x="548640" y="2011680"/>
-            <a:ext cx="3840480" cy="1417320"/>
-          </a:xfrm>
-          <a:prstGeom prst="roundRect">
-            <a:avLst>
-              <a:gd name="adj" fmla="val 8000"/>
-            </a:avLst>
-          </a:prstGeom>
-          <a:solidFill>
-            <a:srgbClr val="FDF4E6"/>
-          </a:solidFill>
-          <a:ln>
-            <a:noFill/>
-          </a:ln>
-        </p:spPr>
-        <p:txBody>
-          <a:bodyPr wrap="square" lIns="109728" tIns="109728" rIns="109728" bIns="109728" anchor="ctr">
-            <a:noAutofit/>
-          </a:bodyPr>
-          <a:lstStyle/>
-          <a:p>
-            <a:pPr marL="0" indent="0" algn="ctr">
-              <a:lnSpc>
-                <a:spcPct val="100000"/>
-              </a:lnSpc>
-              <a:spcBef>
-                <a:spcPts val="0"/>
-              </a:spcBef>
-              <a:buNone/>
-            </a:pPr>
-            <a:r>
-              <a:rPr lang="en-US" sz="3000" b="1" dirty="0">
-                <a:solidFill>
-                  <a:srgbClr val="B45309"/>
-                </a:solidFill>
-              </a:rPr>
-              <a:t>74</a:t>
-            </a:r>
-          </a:p>
-          <a:p>
-            <a:pPr marL="0" indent="0" algn="ctr">
-              <a:lnSpc>
-                <a:spcPct val="100000"/>
-              </a:lnSpc>
-              <a:spcBef>
-                <a:spcPts val="400"/>
-              </a:spcBef>
-              <a:buNone/>
-            </a:pPr>
-            <a:r>
-              <a:rPr lang="en-US" sz="1200" dirty="0">
-                <a:solidFill>
-                  <a:srgbClr val="262626"/>
-                </a:solidFill>
-              </a:rPr>
-              <a:t>Indian dialects catalogued, with region, script and ISO code</a:t>
-            </a:r>
-          </a:p>
-        </p:txBody>
-      </p:sp>
-      <p:sp>
-        <p:nvSpPr>
-          <p:cNvPr id="13" name="Text 13"/>
-          <p:cNvSpPr txBox="1"/>
-          <p:nvPr/>
-        </p:nvSpPr>
-        <p:spPr>
-          <a:xfrm>
-            <a:off x="4663440" y="2011680"/>
-            <a:ext cx="3840480" cy="1417320"/>
-          </a:xfrm>
-          <a:prstGeom prst="roundRect">
-            <a:avLst>
-              <a:gd name="adj" fmla="val 8000"/>
-            </a:avLst>
-          </a:prstGeom>
-          <a:solidFill>
-            <a:srgbClr val="F2F2F2"/>
-          </a:solidFill>
-          <a:ln>
-            <a:noFill/>
-          </a:ln>
-        </p:spPr>
-        <p:txBody>
-          <a:bodyPr wrap="square" lIns="109728" tIns="109728" rIns="109728" bIns="109728" anchor="ctr">
-            <a:noAutofit/>
-          </a:bodyPr>
-          <a:lstStyle/>
-          <a:p>
-            <a:pPr marL="0" indent="0" algn="ctr">
-              <a:lnSpc>
-                <a:spcPct val="100000"/>
-              </a:lnSpc>
-              <a:spcBef>
-                <a:spcPts val="0"/>
-              </a:spcBef>
-              <a:buNone/>
-            </a:pPr>
-            <a:r>
-              <a:rPr lang="en-US" sz="3000" b="1" dirty="0">
-                <a:solidFill>
-                  <a:srgbClr val="B45309"/>
-                </a:solidFill>
-              </a:rPr>
-              <a:t>80</a:t>
-            </a:r>
-          </a:p>
-          <a:p>
-            <a:pPr marL="0" indent="0" algn="ctr">
-              <a:lnSpc>
-                <a:spcPct val="100000"/>
-              </a:lnSpc>
-              <a:spcBef>
-                <a:spcPts val="400"/>
-              </a:spcBef>
-              <a:buNone/>
-            </a:pPr>
-            <a:r>
-              <a:rPr lang="en-US" sz="1200" dirty="0">
-                <a:solidFill>
-                  <a:srgbClr val="262626"/>
-                </a:solidFill>
-              </a:rPr>
-              <a:t>automated backend tests passing, 5 on real PostgreSQL</a:t>
-            </a:r>
-          </a:p>
-        </p:txBody>
-      </p:sp>
-      <p:sp>
-        <p:nvSpPr>
-          <p:cNvPr id="14" name="Text 14"/>
-          <p:cNvSpPr txBox="1"/>
-          <p:nvPr/>
-        </p:nvSpPr>
-        <p:spPr>
-          <a:xfrm>
-            <a:off x="548640" y="3611880"/>
-            <a:ext cx="3840480" cy="1417320"/>
-          </a:xfrm>
-          <a:prstGeom prst="roundRect">
-            <a:avLst>
-              <a:gd name="adj" fmla="val 8000"/>
-            </a:avLst>
-          </a:prstGeom>
-          <a:solidFill>
-            <a:srgbClr val="F2F2F2"/>
-          </a:solidFill>
-          <a:ln>
-            <a:noFill/>
-          </a:ln>
-        </p:spPr>
-        <p:txBody>
-          <a:bodyPr wrap="square" lIns="109728" tIns="109728" rIns="109728" bIns="109728" anchor="ctr">
-            <a:noAutofit/>
-          </a:bodyPr>
-          <a:lstStyle/>
-          <a:p>
-            <a:pPr marL="0" indent="0" algn="ctr">
-              <a:lnSpc>
-                <a:spcPct val="100000"/>
-              </a:lnSpc>
-              <a:spcBef>
-                <a:spcPts val="0"/>
-              </a:spcBef>
-              <a:buNone/>
-            </a:pPr>
-            <a:r>
-              <a:rPr lang="en-US" sz="3000" b="1" dirty="0">
-                <a:solidFill>
-                  <a:srgbClr val="B45309"/>
-                </a:solidFill>
-              </a:rPr>
-              <a:t>2 MB → 24 KB</a:t>
-            </a:r>
-          </a:p>
-          <a:p>
-            <a:pPr marL="0" indent="0" algn="ctr">
-              <a:lnSpc>
-                <a:spcPct val="100000"/>
-              </a:lnSpc>
-              <a:spcBef>
-                <a:spcPts val="400"/>
-              </a:spcBef>
-              <a:buNone/>
-            </a:pPr>
-            <a:r>
-              <a:rPr lang="en-US" sz="1200" dirty="0">
-                <a:solidFill>
-                  <a:srgbClr val="262626"/>
-                </a:solidFill>
-              </a:rPr>
-              <a:t>a stereo WAV after pre-processing, sent to Whisper</a:t>
-            </a:r>
-          </a:p>
-        </p:txBody>
-      </p:sp>
-      <p:sp>
-        <p:nvSpPr>
-          <p:cNvPr id="15" name="Text 15"/>
-          <p:cNvSpPr txBox="1"/>
-          <p:nvPr/>
-        </p:nvSpPr>
-        <p:spPr>
-          <a:xfrm>
-            <a:off x="4663440" y="3611880"/>
-            <a:ext cx="3840480" cy="1417320"/>
-          </a:xfrm>
-          <a:prstGeom prst="roundRect">
-            <a:avLst>
-              <a:gd name="adj" fmla="val 8000"/>
-            </a:avLst>
-          </a:prstGeom>
-          <a:solidFill>
-            <a:srgbClr val="FDF4E6"/>
-          </a:solidFill>
-          <a:ln>
-            <a:noFill/>
-          </a:ln>
-        </p:spPr>
-        <p:txBody>
-          <a:bodyPr wrap="square" lIns="109728" tIns="109728" rIns="109728" bIns="109728" anchor="ctr">
-            <a:noAutofit/>
-          </a:bodyPr>
-          <a:lstStyle/>
-          <a:p>
-            <a:pPr marL="0" indent="0" algn="ctr">
-              <a:lnSpc>
-                <a:spcPct val="100000"/>
-              </a:lnSpc>
-              <a:spcBef>
-                <a:spcPts val="0"/>
-              </a:spcBef>
-              <a:buNone/>
-            </a:pPr>
-            <a:r>
-              <a:rPr lang="en-US" sz="3000" b="1" dirty="0">
-                <a:solidFill>
-                  <a:srgbClr val="B45309"/>
-                </a:solidFill>
-              </a:rPr>
-              <a:t>0</a:t>
-            </a:r>
-          </a:p>
-          <a:p>
-            <a:pPr marL="0" indent="0" algn="ctr">
-              <a:lnSpc>
-                <a:spcPct val="100000"/>
-              </a:lnSpc>
-              <a:spcBef>
-                <a:spcPts val="400"/>
-              </a:spcBef>
-              <a:buNone/>
-            </a:pPr>
-            <a:r>
-              <a:rPr lang="en-US" sz="1200" dirty="0">
-                <a:solidFill>
-                  <a:srgbClr val="262626"/>
-                </a:solidFill>
-              </a:rPr>
-              <a:t>browser errors across 17 screens in the end-to-end run</a:t>
-            </a:r>
-          </a:p>
-        </p:txBody>
-      </p:sp>
-      <p:sp>
-        <p:nvSpPr>
-          <p:cNvPr id="16" name="Text 16"/>
-          <p:cNvSpPr txBox="1"/>
-          <p:nvPr/>
-        </p:nvSpPr>
-        <p:spPr>
-          <a:xfrm>
-            <a:off x="548640" y="5349240"/>
-            <a:ext cx="8046720" cy="914400"/>
-          </a:xfrm>
-          <a:prstGeom prst="rect">
-            <a:avLst/>
-          </a:prstGeom>
-          <a:noFill/>
-          <a:ln>
-            <a:noFill/>
-          </a:ln>
-        </p:spPr>
-        <p:txBody>
-          <a:bodyPr wrap="square" lIns="73152" tIns="73152" rIns="73152" bIns="73152" anchor="t">
-            <a:noAutofit/>
-          </a:bodyPr>
-          <a:lstStyle/>
-          <a:p>
-            <a:pPr marL="256032" indent="-228600" algn="l">
-              <a:lnSpc>
-                <a:spcPct val="100000"/>
-              </a:lnSpc>
-              <a:spcBef>
-                <a:spcPts val="0"/>
-              </a:spcBef>
-              <a:buFont typeface="Arial"/>
-              <a:buChar char="•"/>
-            </a:pPr>
-            <a:r>
-              <a:rPr lang="en-US" sz="1300" dirty="0">
-                <a:solidFill>
-                  <a:srgbClr val="595959"/>
-                </a:solidFill>
-              </a:rPr>
-              <a:t>Deployed live: swara-veda.vercel.app (frontend) and a Render API with a Supabase database</a:t>
-            </a:r>
-          </a:p>
-          <a:p>
-            <a:pPr marL="256032" indent="-228600" algn="l">
-              <a:lnSpc>
-                <a:spcPct val="100000"/>
-              </a:lnSpc>
-              <a:spcBef>
-                <a:spcPts val="600"/>
-              </a:spcBef>
-              <a:buFont typeface="Arial"/>
-              <a:buChar char="•"/>
-            </a:pPr>
-            <a:r>
-              <a:rPr lang="en-US" sz="1300" dirty="0">
-                <a:solidFill>
-                  <a:srgbClr val="595959"/>
-                </a:solidFill>
-              </a:rPr>
-              <a:t>End-to-end test with real Kannada-script speech: upload, transcription, correction, verification, search and export</a:t>
-            </a:r>
-          </a:p>
-        </p:txBody>
-      </p:sp>
-    </p:spTree>
-  </p:cSld>
-  <p:clrMapOvr>
-    <a:masterClrMapping/>
-  </p:clrMapOvr>
-</p:sld>
-</file>
-
-<file path=ppt/slides/slide15.xml><?xml version="1.0" encoding="utf-8"?>
-<p:sld xmlns:a="http://schemas.openxmlformats.org/drawingml/2006/main" xmlns:r="http://schemas.openxmlformats.org/officeDocument/2006/relationships" xmlns:p="http://schemas.openxmlformats.org/presentationml/2006/main">
-  <p:cSld>
-    <p:spTree>
-      <p:nvGrpSpPr>
-        <p:cNvPr id="1" name="Shape 57"/>
-        <p:cNvGrpSpPr/>
-        <p:nvPr/>
-      </p:nvGrpSpPr>
-      <p:grpSpPr>
-        <a:xfrm>
-          <a:off x="0" y="0"/>
-          <a:ext cx="0" cy="0"/>
-          <a:chOff x="0" y="0"/>
-          <a:chExt cx="0" cy="0"/>
-        </a:xfrm>
-      </p:grpSpPr>
-      <p:sp>
-        <p:nvSpPr>
-          <p:cNvPr id="11" name="Title 11"/>
-          <p:cNvSpPr txBox="1"/>
-          <p:nvPr/>
-        </p:nvSpPr>
-        <p:spPr>
-          <a:xfrm>
-            <a:off x="628650" y="1131097"/>
-            <a:ext cx="7886700" cy="760000"/>
-          </a:xfrm>
-          <a:prstGeom prst="rect">
-            <a:avLst/>
-          </a:prstGeom>
-          <a:noFill/>
-          <a:ln>
-            <a:noFill/>
-          </a:ln>
-        </p:spPr>
-        <p:txBody>
-          <a:bodyPr wrap="square" lIns="68569" tIns="34275" rIns="68569" bIns="34275" anchor="ctr">
-            <a:normAutofit/>
-          </a:bodyPr>
-          <a:lstStyle/>
-          <a:p>
-            <a:pPr algn="ctr">
-              <a:lnSpc>
-                <a:spcPct val="90000"/>
-              </a:lnSpc>
-            </a:pPr>
-            <a:r>
-              <a:rPr lang="en-GB" sz="2400" dirty="0">
-                <a:latin typeface="Times New Roman" panose="02020603050405020304" pitchFamily="18" charset="0"/>
-                <a:cs typeface="Times New Roman" panose="02020603050405020304" pitchFamily="18" charset="0"/>
-              </a:rPr>
-              <a:t>Conclusion</a:t>
-            </a:r>
-          </a:p>
-        </p:txBody>
-      </p:sp>
-      <p:sp>
-        <p:nvSpPr>
-          <p:cNvPr id="12" name="Text 12"/>
-          <p:cNvSpPr txBox="1"/>
-          <p:nvPr/>
-        </p:nvSpPr>
-        <p:spPr>
-          <a:xfrm>
-            <a:off x="685800" y="2103120"/>
-            <a:ext cx="7772400" cy="4023360"/>
-          </a:xfrm>
-          <a:prstGeom prst="rect">
-            <a:avLst/>
-          </a:prstGeom>
-          <a:noFill/>
-          <a:ln>
-            <a:noFill/>
-          </a:ln>
-        </p:spPr>
-        <p:txBody>
-          <a:bodyPr wrap="square" lIns="73152" tIns="73152" rIns="73152" bIns="73152" anchor="t">
-            <a:noAutofit/>
-          </a:bodyPr>
-          <a:lstStyle/>
-          <a:p>
-            <a:pPr marL="256032" indent="-228600" algn="l">
-              <a:lnSpc>
-                <a:spcPct val="105000"/>
-              </a:lnSpc>
-              <a:spcBef>
-                <a:spcPts val="0"/>
-              </a:spcBef>
-              <a:buFont typeface="Arial"/>
-              <a:buChar char="•"/>
-            </a:pPr>
-            <a:r>
-              <a:rPr lang="en-US" sz="1500" dirty="0">
-                <a:solidFill>
-                  <a:srgbClr val="595959"/>
-                </a:solidFill>
-              </a:rPr>
-              <a:t>SwaraVeda turns oral recordings of endangered dialects into verified, searchable text</a:t>
-            </a:r>
-          </a:p>
-          <a:p>
-            <a:pPr marL="256032" indent="-228600" algn="l">
-              <a:lnSpc>
-                <a:spcPct val="105000"/>
-              </a:lnSpc>
-              <a:spcBef>
-                <a:spcPts val="1400"/>
-              </a:spcBef>
-              <a:buFont typeface="Arial"/>
-              <a:buChar char="•"/>
-            </a:pPr>
-            <a:r>
-              <a:rPr lang="en-US" sz="1500" dirty="0">
-                <a:solidFill>
-                  <a:srgbClr val="595959"/>
-                </a:solidFill>
-              </a:rPr>
-              <a:t>AI does the first draft; native speakers keep the authority over every word</a:t>
-            </a:r>
-          </a:p>
-          <a:p>
-            <a:pPr marL="256032" indent="-228600" algn="l">
-              <a:lnSpc>
-                <a:spcPct val="105000"/>
-              </a:lnSpc>
-              <a:spcBef>
-                <a:spcPts val="1400"/>
-              </a:spcBef>
-              <a:buFont typeface="Arial"/>
-              <a:buChar char="•"/>
-            </a:pPr>
-            <a:r>
-              <a:rPr lang="en-US" sz="1500" dirty="0">
-                <a:solidFill>
-                  <a:srgbClr val="595959"/>
-                </a:solidFill>
-              </a:rPr>
-              <a:t>Audio pre-processing and per-dialect language hints make a general speech model usable for low-resource dialects</a:t>
-            </a:r>
-          </a:p>
-          <a:p>
-            <a:pPr marL="256032" indent="-228600" algn="l">
-              <a:lnSpc>
-                <a:spcPct val="105000"/>
-              </a:lnSpc>
-              <a:spcBef>
-                <a:spcPts val="1400"/>
-              </a:spcBef>
-              <a:buFont typeface="Arial"/>
-              <a:buChar char="•"/>
-            </a:pPr>
-            <a:r>
-              <a:rPr lang="en-US" sz="1500" dirty="0">
-                <a:solidFill>
-                  <a:srgbClr val="595959"/>
-                </a:solidFill>
-              </a:rPr>
-              <a:t>Consent is explicit and enforced: private recordings stay private, and only consented data is exported</a:t>
-            </a:r>
-          </a:p>
-          <a:p>
-            <a:pPr marL="256032" indent="-228600" algn="l">
-              <a:lnSpc>
-                <a:spcPct val="105000"/>
-              </a:lnSpc>
-              <a:spcBef>
-                <a:spcPts val="1400"/>
-              </a:spcBef>
-              <a:buFont typeface="Arial"/>
-              <a:buChar char="•"/>
-            </a:pPr>
-            <a:r>
-              <a:rPr lang="en-US" sz="1500" dirty="0">
-                <a:solidFill>
-                  <a:srgbClr val="595959"/>
-                </a:solidFill>
-              </a:rPr>
-              <a:t>The corrected dataset is the foundation for future speech models that understand these dialects</a:t>
-            </a:r>
-          </a:p>
-        </p:txBody>
-      </p:sp>
-    </p:spTree>
-  </p:cSld>
-  <p:clrMapOvr>
-    <a:masterClrMapping/>
-  </p:clrMapOvr>
-</p:sld>
-</file>
-
-<file path=ppt/slides/slide16.xml><?xml version="1.0" encoding="utf-8"?>
-<p:sld xmlns:a="http://schemas.openxmlformats.org/drawingml/2006/main" xmlns:r="http://schemas.openxmlformats.org/officeDocument/2006/relationships" xmlns:p="http://schemas.openxmlformats.org/presentationml/2006/main">
-  <p:cSld>
-    <p:spTree>
-      <p:nvGrpSpPr>
-        <p:cNvPr id="1" name="Shape 57"/>
-        <p:cNvGrpSpPr/>
-        <p:nvPr/>
-      </p:nvGrpSpPr>
-      <p:grpSpPr>
-        <a:xfrm>
-          <a:off x="0" y="0"/>
-          <a:ext cx="0" cy="0"/>
-          <a:chOff x="0" y="0"/>
-          <a:chExt cx="0" cy="0"/>
-        </a:xfrm>
-      </p:grpSpPr>
-      <p:sp>
-        <p:nvSpPr>
-          <p:cNvPr id="11" name="Title 11"/>
-          <p:cNvSpPr txBox="1"/>
-          <p:nvPr/>
-        </p:nvSpPr>
-        <p:spPr>
-          <a:xfrm>
-            <a:off x="628650" y="1131097"/>
-            <a:ext cx="7886700" cy="760000"/>
-          </a:xfrm>
-          <a:prstGeom prst="rect">
-            <a:avLst/>
-          </a:prstGeom>
-          <a:noFill/>
-          <a:ln>
-            <a:noFill/>
-          </a:ln>
-        </p:spPr>
-        <p:txBody>
-          <a:bodyPr wrap="square" lIns="68569" tIns="34275" rIns="68569" bIns="34275" anchor="ctr">
-            <a:normAutofit/>
-          </a:bodyPr>
-          <a:lstStyle/>
-          <a:p>
-            <a:pPr algn="ctr">
-              <a:lnSpc>
-                <a:spcPct val="90000"/>
-              </a:lnSpc>
-            </a:pPr>
-            <a:r>
-              <a:rPr lang="en-GB" sz="2400" dirty="0">
-                <a:latin typeface="Times New Roman" panose="02020603050405020304" pitchFamily="18" charset="0"/>
-                <a:cs typeface="Times New Roman" panose="02020603050405020304" pitchFamily="18" charset="0"/>
-              </a:rPr>
-              <a:t>Work to be Completed</a:t>
-            </a:r>
-          </a:p>
-        </p:txBody>
-      </p:sp>
-      <p:sp>
-        <p:nvSpPr>
-          <p:cNvPr id="12" name="Text 12"/>
-          <p:cNvSpPr txBox="1"/>
-          <p:nvPr/>
-        </p:nvSpPr>
-        <p:spPr>
-          <a:xfrm>
-            <a:off x="548640" y="2011680"/>
-            <a:ext cx="3840480" cy="1188720"/>
-          </a:xfrm>
-          <a:prstGeom prst="roundRect">
-            <a:avLst>
-              <a:gd name="adj" fmla="val 8000"/>
-            </a:avLst>
-          </a:prstGeom>
-          <a:solidFill>
-            <a:srgbClr val="F2F2F2"/>
-          </a:solidFill>
-          <a:ln>
-            <a:noFill/>
-          </a:ln>
-        </p:spPr>
-        <p:txBody>
-          <a:bodyPr wrap="square" lIns="137160" tIns="137160" rIns="137160" bIns="137160" anchor="t">
-            <a:noAutofit/>
-          </a:bodyPr>
-          <a:lstStyle/>
-          <a:p>
-            <a:pPr marL="0" indent="0" algn="l">
-              <a:lnSpc>
-                <a:spcPct val="100000"/>
-              </a:lnSpc>
-              <a:spcBef>
-                <a:spcPts val="0"/>
-              </a:spcBef>
-              <a:buNone/>
-            </a:pPr>
-            <a:r>
-              <a:rPr lang="en-US" sz="1400" b="1" dirty="0">
-                <a:solidFill>
-                  <a:srgbClr val="B45309"/>
-                </a:solidFill>
-              </a:rPr>
-              <a:t>Field data</a:t>
-            </a:r>
-          </a:p>
-          <a:p>
-            <a:pPr marL="0" indent="0" algn="l">
-              <a:lnSpc>
-                <a:spcPct val="105000"/>
-              </a:lnSpc>
-              <a:spcBef>
-                <a:spcPts val="400"/>
-              </a:spcBef>
-              <a:buNone/>
-            </a:pPr>
-            <a:r>
-              <a:rPr lang="en-US" sz="1200" dirty="0">
-                <a:solidFill>
-                  <a:srgbClr val="262626"/>
-                </a:solidFill>
-              </a:rPr>
-              <a:t>Record with Tulu and Kodava speakers; correct and verify the transcripts</a:t>
-            </a:r>
-          </a:p>
-        </p:txBody>
-      </p:sp>
-      <p:sp>
-        <p:nvSpPr>
-          <p:cNvPr id="13" name="Text 13"/>
-          <p:cNvSpPr txBox="1"/>
-          <p:nvPr/>
-        </p:nvSpPr>
-        <p:spPr>
-          <a:xfrm>
-            <a:off x="4663440" y="2011680"/>
-            <a:ext cx="3840480" cy="1188720"/>
-          </a:xfrm>
-          <a:prstGeom prst="roundRect">
-            <a:avLst>
-              <a:gd name="adj" fmla="val 8000"/>
-            </a:avLst>
-          </a:prstGeom>
-          <a:solidFill>
-            <a:srgbClr val="F2F2F2"/>
-          </a:solidFill>
-          <a:ln>
-            <a:noFill/>
-          </a:ln>
-        </p:spPr>
-        <p:txBody>
-          <a:bodyPr wrap="square" lIns="137160" tIns="137160" rIns="137160" bIns="137160" anchor="t">
-            <a:noAutofit/>
-          </a:bodyPr>
-          <a:lstStyle/>
-          <a:p>
-            <a:pPr marL="0" indent="0" algn="l">
-              <a:lnSpc>
-                <a:spcPct val="100000"/>
-              </a:lnSpc>
-              <a:spcBef>
-                <a:spcPts val="0"/>
-              </a:spcBef>
-              <a:buNone/>
-            </a:pPr>
-            <a:r>
-              <a:rPr lang="en-US" sz="1400" b="1" dirty="0">
-                <a:solidFill>
-                  <a:srgbClr val="B45309"/>
-                </a:solidFill>
-              </a:rPr>
-              <a:t>Production AI</a:t>
-            </a:r>
-          </a:p>
-          <a:p>
-            <a:pPr marL="0" indent="0" algn="l">
-              <a:lnSpc>
-                <a:spcPct val="105000"/>
-              </a:lnSpc>
-              <a:spcBef>
-                <a:spcPts val="400"/>
-              </a:spcBef>
-              <a:buNone/>
-            </a:pPr>
-            <a:r>
-              <a:rPr lang="en-US" sz="1200" dirty="0">
-                <a:solidFill>
-                  <a:srgbClr val="262626"/>
-                </a:solidFill>
-              </a:rPr>
-              <a:t>Enable hosted transcription and semantic search keys on the live server</a:t>
-            </a:r>
-          </a:p>
-        </p:txBody>
-      </p:sp>
-      <p:sp>
-        <p:nvSpPr>
-          <p:cNvPr id="14" name="Text 14"/>
-          <p:cNvSpPr txBox="1"/>
-          <p:nvPr/>
-        </p:nvSpPr>
-        <p:spPr>
-          <a:xfrm>
-            <a:off x="548640" y="3383280"/>
-            <a:ext cx="3840480" cy="1188720"/>
-          </a:xfrm>
-          <a:prstGeom prst="roundRect">
-            <a:avLst>
-              <a:gd name="adj" fmla="val 8000"/>
-            </a:avLst>
-          </a:prstGeom>
-          <a:solidFill>
-            <a:srgbClr val="F2F2F2"/>
-          </a:solidFill>
-          <a:ln>
-            <a:noFill/>
-          </a:ln>
-        </p:spPr>
-        <p:txBody>
-          <a:bodyPr wrap="square" lIns="137160" tIns="137160" rIns="137160" bIns="137160" anchor="t">
-            <a:noAutofit/>
-          </a:bodyPr>
-          <a:lstStyle/>
-          <a:p>
-            <a:pPr marL="0" indent="0" algn="l">
-              <a:lnSpc>
-                <a:spcPct val="100000"/>
-              </a:lnSpc>
-              <a:spcBef>
-                <a:spcPts val="0"/>
-              </a:spcBef>
-              <a:buNone/>
-            </a:pPr>
-            <a:r>
-              <a:rPr lang="en-US" sz="1400" b="1" dirty="0">
-                <a:solidFill>
-                  <a:srgbClr val="B45309"/>
-                </a:solidFill>
-              </a:rPr>
-              <a:t>Accessibility</a:t>
-            </a:r>
-          </a:p>
-          <a:p>
-            <a:pPr marL="0" indent="0" algn="l">
-              <a:lnSpc>
-                <a:spcPct val="105000"/>
-              </a:lnSpc>
-              <a:spcBef>
-                <a:spcPts val="400"/>
-              </a:spcBef>
-              <a:buNone/>
-            </a:pPr>
-            <a:r>
-              <a:rPr lang="en-US" sz="1200" dirty="0">
-                <a:solidFill>
-                  <a:srgbClr val="262626"/>
-                </a:solidFill>
-              </a:rPr>
-              <a:t>Interface in Kannada, Hindi and other Indian languages</a:t>
-            </a:r>
-          </a:p>
-        </p:txBody>
-      </p:sp>
-      <p:sp>
-        <p:nvSpPr>
-          <p:cNvPr id="15" name="Text 15"/>
-          <p:cNvSpPr txBox="1"/>
-          <p:nvPr/>
-        </p:nvSpPr>
-        <p:spPr>
-          <a:xfrm>
-            <a:off x="4663440" y="3383280"/>
-            <a:ext cx="3840480" cy="1188720"/>
-          </a:xfrm>
-          <a:prstGeom prst="roundRect">
-            <a:avLst>
-              <a:gd name="adj" fmla="val 8000"/>
-            </a:avLst>
-          </a:prstGeom>
-          <a:solidFill>
-            <a:srgbClr val="F2F2F2"/>
-          </a:solidFill>
-          <a:ln>
-            <a:noFill/>
-          </a:ln>
-        </p:spPr>
-        <p:txBody>
-          <a:bodyPr wrap="square" lIns="137160" tIns="137160" rIns="137160" bIns="137160" anchor="t">
-            <a:noAutofit/>
-          </a:bodyPr>
-          <a:lstStyle/>
-          <a:p>
-            <a:pPr marL="0" indent="0" algn="l">
-              <a:lnSpc>
-                <a:spcPct val="100000"/>
-              </a:lnSpc>
-              <a:spcBef>
-                <a:spcPts val="0"/>
-              </a:spcBef>
-              <a:buNone/>
-            </a:pPr>
-            <a:r>
-              <a:rPr lang="en-US" sz="1400" b="1" dirty="0">
-                <a:solidFill>
-                  <a:srgbClr val="B45309"/>
-                </a:solidFill>
-              </a:rPr>
-              <a:t>Offline use</a:t>
-            </a:r>
-          </a:p>
-          <a:p>
-            <a:pPr marL="0" indent="0" algn="l">
-              <a:lnSpc>
-                <a:spcPct val="105000"/>
-              </a:lnSpc>
-              <a:spcBef>
-                <a:spcPts val="400"/>
-              </a:spcBef>
-              <a:buNone/>
-            </a:pPr>
-            <a:r>
-              <a:rPr lang="en-US" sz="1200" dirty="0">
-                <a:solidFill>
-                  <a:srgbClr val="262626"/>
-                </a:solidFill>
-              </a:rPr>
-              <a:t>Record without internet in villages and upload later</a:t>
-            </a:r>
-          </a:p>
-        </p:txBody>
-      </p:sp>
-      <p:sp>
-        <p:nvSpPr>
-          <p:cNvPr id="16" name="Text 16"/>
-          <p:cNvSpPr txBox="1"/>
-          <p:nvPr/>
-        </p:nvSpPr>
-        <p:spPr>
-          <a:xfrm>
-            <a:off x="548640" y="4754880"/>
-            <a:ext cx="3840480" cy="1188720"/>
-          </a:xfrm>
-          <a:prstGeom prst="roundRect">
-            <a:avLst>
-              <a:gd name="adj" fmla="val 8000"/>
-            </a:avLst>
-          </a:prstGeom>
-          <a:solidFill>
-            <a:srgbClr val="F2F2F2"/>
-          </a:solidFill>
-          <a:ln>
-            <a:noFill/>
-          </a:ln>
-        </p:spPr>
-        <p:txBody>
-          <a:bodyPr wrap="square" lIns="137160" tIns="137160" rIns="137160" bIns="137160" anchor="t">
-            <a:noAutofit/>
-          </a:bodyPr>
-          <a:lstStyle/>
-          <a:p>
-            <a:pPr marL="0" indent="0" algn="l">
-              <a:lnSpc>
-                <a:spcPct val="100000"/>
-              </a:lnSpc>
-              <a:spcBef>
-                <a:spcPts val="0"/>
-              </a:spcBef>
-              <a:buNone/>
-            </a:pPr>
-            <a:r>
-              <a:rPr lang="en-US" sz="1400" b="1" dirty="0">
-                <a:solidFill>
-                  <a:srgbClr val="B45309"/>
-                </a:solidFill>
-              </a:rPr>
-              <a:t>Speakers</a:t>
-            </a:r>
-          </a:p>
-          <a:p>
-            <a:pPr marL="0" indent="0" algn="l">
-              <a:lnSpc>
-                <a:spcPct val="105000"/>
-              </a:lnSpc>
-              <a:spcBef>
-                <a:spcPts val="400"/>
-              </a:spcBef>
-              <a:buNone/>
-            </a:pPr>
-            <a:r>
-              <a:rPr lang="en-US" sz="1200" dirty="0">
-                <a:solidFill>
-                  <a:srgbClr val="262626"/>
-                </a:solidFill>
-              </a:rPr>
-              <a:t>Speaker diarization in hosted mode; expiring links for private audio</a:t>
-            </a:r>
-          </a:p>
-        </p:txBody>
-      </p:sp>
-      <p:sp>
-        <p:nvSpPr>
-          <p:cNvPr id="17" name="Text 17"/>
-          <p:cNvSpPr txBox="1"/>
-          <p:nvPr/>
-        </p:nvSpPr>
-        <p:spPr>
-          <a:xfrm>
-            <a:off x="4663440" y="4754880"/>
-            <a:ext cx="3840480" cy="1188720"/>
-          </a:xfrm>
-          <a:prstGeom prst="roundRect">
-            <a:avLst>
-              <a:gd name="adj" fmla="val 8000"/>
-            </a:avLst>
-          </a:prstGeom>
-          <a:solidFill>
-            <a:srgbClr val="F2F2F2"/>
-          </a:solidFill>
-          <a:ln>
-            <a:noFill/>
-          </a:ln>
-        </p:spPr>
-        <p:txBody>
-          <a:bodyPr wrap="square" lIns="137160" tIns="137160" rIns="137160" bIns="137160" anchor="t">
-            <a:noAutofit/>
-          </a:bodyPr>
-          <a:lstStyle/>
-          <a:p>
-            <a:pPr marL="0" indent="0" algn="l">
-              <a:lnSpc>
-                <a:spcPct val="100000"/>
-              </a:lnSpc>
-              <a:spcBef>
-                <a:spcPts val="0"/>
-              </a:spcBef>
-              <a:buNone/>
-            </a:pPr>
-            <a:r>
-              <a:rPr lang="en-US" sz="1400" b="1" dirty="0">
-                <a:solidFill>
-                  <a:srgbClr val="B45309"/>
-                </a:solidFill>
-              </a:rPr>
-              <a:t>Model</a:t>
-            </a:r>
-          </a:p>
-          <a:p>
-            <a:pPr marL="0" indent="0" algn="l">
-              <a:lnSpc>
-                <a:spcPct val="105000"/>
-              </a:lnSpc>
-              <a:spcBef>
-                <a:spcPts val="400"/>
-              </a:spcBef>
-              <a:buNone/>
-            </a:pPr>
-            <a:r>
-              <a:rPr lang="en-US" sz="1200" dirty="0">
-                <a:solidFill>
-                  <a:srgbClr val="262626"/>
-                </a:solidFill>
-              </a:rPr>
-              <a:t>Fine-tune Whisper on the exported dataset and measure word error rate</a:t>
-            </a:r>
-          </a:p>
-        </p:txBody>
-      </p:sp>
-    </p:spTree>
-  </p:cSld>
-  <p:clrMapOvr>
-    <a:masterClrMapping/>
-  </p:clrMapOvr>
-</p:sld>
-</file>
-
-<file path=ppt/slides/slide17.xml><?xml version="1.0" encoding="utf-8"?>
-<p:sld xmlns:a="http://schemas.openxmlformats.org/drawingml/2006/main" xmlns:r="http://schemas.openxmlformats.org/officeDocument/2006/relationships" xmlns:p="http://schemas.openxmlformats.org/presentationml/2006/main">
-  <p:cSld>
-    <p:spTree>
-      <p:nvGrpSpPr>
-        <p:cNvPr id="1" name="Shape 57"/>
-        <p:cNvGrpSpPr/>
-        <p:nvPr/>
-      </p:nvGrpSpPr>
-      <p:grpSpPr>
-        <a:xfrm>
-          <a:off x="0" y="0"/>
-          <a:ext cx="0" cy="0"/>
-          <a:chOff x="0" y="0"/>
-          <a:chExt cx="0" cy="0"/>
-        </a:xfrm>
-      </p:grpSpPr>
-      <p:sp>
-        <p:nvSpPr>
-          <p:cNvPr id="11" name="Title 11"/>
-          <p:cNvSpPr txBox="1"/>
-          <p:nvPr/>
-        </p:nvSpPr>
-        <p:spPr>
-          <a:xfrm>
-            <a:off x="628650" y="1131097"/>
-            <a:ext cx="7886700" cy="760000"/>
-          </a:xfrm>
-          <a:prstGeom prst="rect">
-            <a:avLst/>
-          </a:prstGeom>
-          <a:noFill/>
-          <a:ln>
-            <a:noFill/>
-          </a:ln>
-        </p:spPr>
-        <p:txBody>
-          <a:bodyPr wrap="square" lIns="68569" tIns="34275" rIns="68569" bIns="34275" anchor="ctr">
-            <a:normAutofit/>
-          </a:bodyPr>
-          <a:lstStyle/>
-          <a:p>
-            <a:pPr algn="ctr">
-              <a:lnSpc>
-                <a:spcPct val="90000"/>
-              </a:lnSpc>
-            </a:pPr>
-            <a:r>
-              <a:rPr lang="en-GB" sz="2400" dirty="0">
-                <a:latin typeface="Times New Roman" panose="02020603050405020304" pitchFamily="18" charset="0"/>
-                <a:cs typeface="Times New Roman" panose="02020603050405020304" pitchFamily="18" charset="0"/>
-              </a:rPr>
-              <a:t>References</a:t>
-            </a:r>
-          </a:p>
-        </p:txBody>
-      </p:sp>
-      <p:sp>
-        <p:nvSpPr>
-          <p:cNvPr id="12" name="Text 12"/>
-          <p:cNvSpPr txBox="1"/>
-          <p:nvPr/>
-        </p:nvSpPr>
-        <p:spPr>
-          <a:xfrm>
-            <a:off x="548640" y="1965960"/>
-            <a:ext cx="8046720" cy="4343400"/>
-          </a:xfrm>
-          <a:prstGeom prst="rect">
-            <a:avLst/>
-          </a:prstGeom>
-          <a:noFill/>
-          <a:ln>
-            <a:noFill/>
-          </a:ln>
-        </p:spPr>
-        <p:txBody>
-          <a:bodyPr wrap="square" lIns="73152" tIns="73152" rIns="73152" bIns="73152" anchor="t">
-            <a:noAutofit/>
-          </a:bodyPr>
-          <a:lstStyle/>
-          <a:p>
-            <a:pPr marL="292608" indent="-292608" algn="l">
-              <a:lnSpc>
-                <a:spcPct val="105000"/>
-              </a:lnSpc>
-              <a:spcBef>
-                <a:spcPts val="0"/>
-              </a:spcBef>
-              <a:buFont typeface="+mj-lt"/>
-              <a:buAutoNum type="arabicPeriod"/>
-            </a:pPr>
-            <a:r>
-              <a:rPr lang="en-US" sz="1200" dirty="0">
-                <a:solidFill>
-                  <a:srgbClr val="595959"/>
-                </a:solidFill>
-              </a:rPr>
-              <a:t>UNESCO, Atlas of the World's Languages in Danger, 3rd ed., Paris: UNESCO Publishing, 2010.</a:t>
-            </a:r>
-          </a:p>
-          <a:p>
-            <a:pPr marL="292608" indent="-292608" algn="l">
-              <a:lnSpc>
-                <a:spcPct val="105000"/>
-              </a:lnSpc>
-              <a:spcBef>
-                <a:spcPts val="700"/>
-              </a:spcBef>
-              <a:buFont typeface="+mj-lt"/>
-              <a:buAutoNum type="arabicPeriod"/>
-            </a:pPr>
-            <a:r>
-              <a:rPr lang="en-US" sz="1200" dirty="0">
-                <a:solidFill>
-                  <a:srgbClr val="595959"/>
-                </a:solidFill>
-              </a:rPr>
-              <a:t>A. Radford, J. W. Kim, T. Xu, G. Brockman, C. McLeavey and I. Sutskever, “Robust Speech Recognition via Large-Scale Weak Supervision,” arXiv:2212.04356, 2022.</a:t>
-            </a:r>
-          </a:p>
-          <a:p>
-            <a:pPr marL="292608" indent="-292608" algn="l">
-              <a:lnSpc>
-                <a:spcPct val="105000"/>
-              </a:lnSpc>
-              <a:spcBef>
-                <a:spcPts val="700"/>
-              </a:spcBef>
-              <a:buFont typeface="+mj-lt"/>
-              <a:buAutoNum type="arabicPeriod"/>
-            </a:pPr>
-            <a:r>
-              <a:rPr lang="en-US" sz="1200" dirty="0">
-                <a:solidFill>
-                  <a:srgbClr val="595959"/>
-                </a:solidFill>
-              </a:rPr>
-              <a:t>N. Reimers and I. Gurevych, “Sentence-BERT: Sentence Embeddings using Siamese BERT-Networks,” Proc. EMNLP-IJCNLP, 2019.</a:t>
-            </a:r>
-          </a:p>
-          <a:p>
-            <a:pPr marL="292608" indent="-292608" algn="l">
-              <a:lnSpc>
-                <a:spcPct val="105000"/>
-              </a:lnSpc>
-              <a:spcBef>
-                <a:spcPts val="700"/>
-              </a:spcBef>
-              <a:buFont typeface="+mj-lt"/>
-              <a:buAutoNum type="arabicPeriod"/>
-            </a:pPr>
-            <a:r>
-              <a:rPr lang="en-US" sz="1200" dirty="0">
-                <a:solidFill>
-                  <a:srgbClr val="595959"/>
-                </a:solidFill>
-              </a:rPr>
-              <a:t>N. Reimers and I. Gurevych, “Making Monolingual Sentence Embeddings Multilingual using Knowledge Distillation,” Proc. EMNLP, 2020.</a:t>
-            </a:r>
-          </a:p>
-          <a:p>
-            <a:pPr marL="292608" indent="-292608" algn="l">
-              <a:lnSpc>
-                <a:spcPct val="105000"/>
-              </a:lnSpc>
-              <a:spcBef>
-                <a:spcPts val="700"/>
-              </a:spcBef>
-              <a:buFont typeface="+mj-lt"/>
-              <a:buAutoNum type="arabicPeriod"/>
-            </a:pPr>
-            <a:r>
-              <a:rPr lang="en-US" sz="1200" dirty="0">
-                <a:solidFill>
-                  <a:srgbClr val="595959"/>
-                </a:solidFill>
-              </a:rPr>
-              <a:t>H. Bredin et al., “pyannote.audio: Neural Building Blocks for Speaker Diarization,” Proc. ICASSP, 2020.</a:t>
-            </a:r>
-          </a:p>
-          <a:p>
-            <a:pPr marL="292608" indent="-292608" algn="l">
-              <a:lnSpc>
-                <a:spcPct val="105000"/>
-              </a:lnSpc>
-              <a:spcBef>
-                <a:spcPts val="700"/>
-              </a:spcBef>
-              <a:buFont typeface="+mj-lt"/>
-              <a:buAutoNum type="arabicPeriod"/>
-            </a:pPr>
-            <a:r>
-              <a:rPr lang="en-US" sz="1200" dirty="0">
-                <a:solidFill>
-                  <a:srgbClr val="595959"/>
-                </a:solidFill>
-              </a:rPr>
-              <a:t>pgvector: open-source vector similarity search for PostgreSQL, github.com/pgvector/pgvector.</a:t>
-            </a:r>
-          </a:p>
-          <a:p>
-            <a:pPr marL="292608" indent="-292608" algn="l">
-              <a:lnSpc>
-                <a:spcPct val="105000"/>
-              </a:lnSpc>
-              <a:spcBef>
-                <a:spcPts val="700"/>
-              </a:spcBef>
-              <a:buFont typeface="+mj-lt"/>
-              <a:buAutoNum type="arabicPeriod"/>
-            </a:pPr>
-            <a:r>
-              <a:rPr lang="en-US" sz="1200" dirty="0">
-                <a:solidFill>
-                  <a:srgbClr val="595959"/>
-                </a:solidFill>
-              </a:rPr>
-              <a:t>SYSTRAN, faster-whisper: Whisper inference with CTranslate2, github.com/SYSTRAN/faster-whisper.</a:t>
-            </a:r>
-          </a:p>
-          <a:p>
-            <a:pPr marL="292608" indent="-292608" algn="l">
-              <a:lnSpc>
-                <a:spcPct val="105000"/>
-              </a:lnSpc>
-              <a:spcBef>
-                <a:spcPts val="700"/>
-              </a:spcBef>
-              <a:buFont typeface="+mj-lt"/>
-              <a:buAutoNum type="arabicPeriod"/>
-            </a:pPr>
-            <a:r>
-              <a:rPr lang="en-US" sz="1200" dirty="0">
-                <a:solidFill>
-                  <a:srgbClr val="595959"/>
-                </a:solidFill>
-              </a:rPr>
-              <a:t>SIL International, ISO 639-3 code tables, iso639-3.sil.org.</a:t>
-            </a:r>
-          </a:p>
-        </p:txBody>
-      </p:sp>
-    </p:spTree>
+    <p:extLst>
+      <p:ext uri="{BB962C8B-B14F-4D97-AF65-F5344CB8AC3E}">
+        <p14:creationId xmlns:p14="http://schemas.microsoft.com/office/powerpoint/2010/main" val="3488515421"/>
+      </p:ext>
+    </p:extLst>
   </p:cSld>
   <p:clrMapOvr>
     <a:masterClrMapping/>
@@ -7992,13 +5701,7 @@
   <p:cSld>
     <p:spTree>
       <p:nvGrpSpPr>
-        <p:cNvPr id="1" name="Shape 57">
-          <a:extLst>
-            <a:ext uri="{FF2B5EF4-FFF2-40B4-BE49-F238E27FC236}">
-              <a16:creationId xmlns:a16="http://schemas.microsoft.com/office/drawing/2014/main" id="{59236BD8-2EB6-C6B1-A74F-9CF531C8EB4D}"/>
-            </a:ext>
-          </a:extLst>
-        </p:cNvPr>
+        <p:cNvPr id="1" name="Shape 57"/>
         <p:cNvGrpSpPr/>
         <p:nvPr/>
       </p:nvGrpSpPr>
@@ -8012,10 +5715,10 @@
       </p:grpSpPr>
       <p:sp>
         <p:nvSpPr>
-          <p:cNvPr id="4" name="Google Shape;105;p11">
+          <p:cNvPr id="3" name="Google Shape;68;g78e6671419f8a2a0_22">
             <a:extLst>
               <a:ext uri="{FF2B5EF4-FFF2-40B4-BE49-F238E27FC236}">
-                <a16:creationId xmlns:a16="http://schemas.microsoft.com/office/drawing/2014/main" id="{80E82BBC-903E-03E5-F615-ED94D1174626}"/>
+                <a16:creationId xmlns:a16="http://schemas.microsoft.com/office/drawing/2014/main" id="{BA677A83-D006-E1F4-CCF8-948027C21AB2}"/>
               </a:ext>
             </a:extLst>
           </p:cNvPr>
@@ -8024,8 +5727,58 @@
         </p:nvSpPr>
         <p:spPr>
           <a:xfrm>
-            <a:off x="1610325" y="2832109"/>
-            <a:ext cx="5829300" cy="874350"/>
+            <a:off x="628650" y="1131097"/>
+            <a:ext cx="7886700" cy="994275"/>
+          </a:xfrm>
+          <a:prstGeom prst="rect">
+            <a:avLst/>
+          </a:prstGeom>
+          <a:noFill/>
+          <a:ln>
+            <a:noFill/>
+          </a:ln>
+        </p:spPr>
+        <p:txBody>
+          <a:bodyPr spcFirstLastPara="1" wrap="square" lIns="68569" tIns="34275" rIns="68569" bIns="34275" anchor="ctr" anchorCtr="0">
+            <a:normAutofit/>
+          </a:bodyPr>
+          <a:lstStyle/>
+          <a:p>
+            <a:pPr algn="ctr" defTabSz="685800">
+              <a:lnSpc>
+                <a:spcPct val="90000"/>
+              </a:lnSpc>
+            </a:pPr>
+            <a:r>
+              <a:rPr lang="en-GB" sz="2400" dirty="0">
+                <a:latin typeface="Times New Roman" panose="02020603050405020304" pitchFamily="18" charset="0"/>
+                <a:cs typeface="Times New Roman" panose="02020603050405020304" pitchFamily="18" charset="0"/>
+              </a:rPr>
+              <a:t>Abstract</a:t>
+            </a:r>
+            <a:endParaRPr sz="2400" dirty="0">
+              <a:latin typeface="Times New Roman" panose="02020603050405020304" pitchFamily="18" charset="0"/>
+              <a:cs typeface="Times New Roman" panose="02020603050405020304" pitchFamily="18" charset="0"/>
+            </a:endParaRPr>
+          </a:p>
+        </p:txBody>
+      </p:sp>
+      <p:sp>
+        <p:nvSpPr>
+          <p:cNvPr id="5" name="Google Shape;69;g78e6671419f8a2a0_22">
+            <a:extLst>
+              <a:ext uri="{FF2B5EF4-FFF2-40B4-BE49-F238E27FC236}">
+                <a16:creationId xmlns:a16="http://schemas.microsoft.com/office/drawing/2014/main" id="{13186C97-59A2-67F5-3892-203B43C861C9}"/>
+              </a:ext>
+            </a:extLst>
+          </p:cNvPr>
+          <p:cNvSpPr txBox="1"/>
+          <p:nvPr/>
+        </p:nvSpPr>
+        <p:spPr>
+          <a:xfrm>
+            <a:off x="685800" y="2011680"/>
+            <a:ext cx="7772400" cy="4206240"/>
           </a:xfrm>
           <a:prstGeom prst="rect">
             <a:avLst/>
@@ -8041,34 +5794,107 @@
           </a:bodyPr>
           <a:lstStyle/>
           <a:p>
-            <a:pPr algn="ctr">
+            <a:pPr marL="0" indent="0" algn="just">
               <a:lnSpc>
                 <a:spcPct val="90000"/>
               </a:lnSpc>
-              <a:buSzPts val="5200"/>
+              <a:spcBef>
+                <a:spcPts val="1000"/>
+              </a:spcBef>
+              <a:buNone/>
             </a:pPr>
             <a:r>
-              <a:rPr lang="en-GB" sz="3900" b="1" dirty="0">
-                <a:solidFill>
-                  <a:schemeClr val="dk1"/>
-                </a:solidFill>
-                <a:latin typeface="Times New Roman"/>
-                <a:ea typeface="Times New Roman"/>
-                <a:cs typeface="Times New Roman"/>
-                <a:sym typeface="Times New Roman"/>
-              </a:rPr>
-              <a:t>Thank You!</a:t>
-            </a:r>
-            <a:endParaRPr sz="1650" b="1" dirty="0"/>
+              <a:rPr lang="en-US" sz="1500" dirty="0">
+                <a:solidFill>
+                  <a:srgbClr val="595959"/>
+                </a:solidFill>
+              </a:rPr>
+              <a:t>India has 197 endangered languages, more than any other country, and most of its dialects exist only as speech. SwaraVeda is a community-driven web archive that records, transcribes and preserves the songs, stories and conversations of endangered Indian dialects.</a:t>
+            </a:r>
+          </a:p>
+          <a:p>
+            <a:pPr marL="0" indent="0" algn="just">
+              <a:lnSpc>
+                <a:spcPct val="90000"/>
+              </a:lnSpc>
+              <a:spcBef>
+                <a:spcPts val="1000"/>
+              </a:spcBef>
+              <a:buNone/>
+            </a:pPr>
+            <a:r>
+              <a:rPr lang="en-US" sz="1500" dirty="0">
+                <a:solidFill>
+                  <a:srgbClr val="595959"/>
+                </a:solidFill>
+              </a:rPr>
+              <a:t>Speakers record or upload audio with explicit consent. The audio is cleaned and Vani, the project’s speech AI agent built on Whisper large-v3, drafts a timestamped transcript. Native speakers correct it in a listening editor and verifiers approve each passage.</a:t>
+            </a:r>
+          </a:p>
+          <a:p>
+            <a:pPr marL="0" indent="0" algn="just">
+              <a:lnSpc>
+                <a:spcPct val="90000"/>
+              </a:lnSpc>
+              <a:spcBef>
+                <a:spcPts val="1000"/>
+              </a:spcBef>
+              <a:buNone/>
+            </a:pPr>
+            <a:r>
+              <a:rPr lang="en-US" sz="1500" dirty="0">
+                <a:solidFill>
+                  <a:srgbClr val="595959"/>
+                </a:solidFill>
+              </a:rPr>
+              <a:t>Verified transcripts become searchable by keyword and by meaning, and are exported as a consented dataset for training speech recognition in low-resource dialects. The system is live, catalogues 74 dialects and works offline.</a:t>
+            </a:r>
+          </a:p>
+        </p:txBody>
+      </p:sp>
+      <p:sp>
+        <p:nvSpPr>
+          <p:cNvPr id="6" name="TextBox 5"/>
+          <p:cNvSpPr txBox="1"/>
+          <p:nvPr/>
+        </p:nvSpPr>
+        <p:spPr>
+          <a:xfrm>
+            <a:off x="685800" y="5989320"/>
+            <a:ext cx="7772400" cy="365760"/>
+          </a:xfrm>
+          <a:prstGeom prst="rect">
+            <a:avLst/>
+          </a:prstGeom>
+          <a:noFill/>
+        </p:spPr>
+        <p:txBody>
+          <a:bodyPr wrap="square">
+            <a:spAutoFit/>
+          </a:bodyPr>
+          <a:lstStyle/>
+          <a:p>
+            <a:pPr algn="l"/>
+            <a:r>
+              <a:rPr sz="1100" b="1">
+                <a:solidFill>
+                  <a:srgbClr val="595959"/>
+                </a:solidFill>
+              </a:rPr>
+              <a:t>Keywords: </a:t>
+            </a:r>
+            <a:r>
+              <a:rPr sz="1100" i="1">
+                <a:solidFill>
+                  <a:srgbClr val="595959"/>
+                </a:solidFill>
+              </a:rPr>
+              <a:t>endangered languages, speech recognition, Whisper, crowdsourcing, semantic search, language documentation</a:t>
+            </a:r>
           </a:p>
         </p:txBody>
       </p:sp>
     </p:spTree>
-    <p:extLst>
-      <p:ext uri="{BB962C8B-B14F-4D97-AF65-F5344CB8AC3E}">
-        <p14:creationId xmlns:p14="http://schemas.microsoft.com/office/powerpoint/2010/main" val="3488515421"/>
-      </p:ext>
-    </p:extLst>
   </p:cSld>
   <p:clrMapOvr>
     <a:masterClrMapping/>
@@ -8095,14 +5921,20 @@
       </p:grpSpPr>
       <p:sp>
         <p:nvSpPr>
-          <p:cNvPr id="11" name="Title 11"/>
+          <p:cNvPr id="3" name="Google Shape;68;g78e6671419f8a2a0_22">
+            <a:extLst>
+              <a:ext uri="{FF2B5EF4-FFF2-40B4-BE49-F238E27FC236}">
+                <a16:creationId xmlns:a16="http://schemas.microsoft.com/office/drawing/2014/main" id="{BA677A83-D006-E1F4-CCF8-948027C21AB2}"/>
+              </a:ext>
+            </a:extLst>
+          </p:cNvPr>
           <p:cNvSpPr txBox="1"/>
           <p:nvPr/>
         </p:nvSpPr>
         <p:spPr>
           <a:xfrm>
             <a:off x="628650" y="1131097"/>
-            <a:ext cx="7886700" cy="760000"/>
+            <a:ext cx="7886700" cy="994275"/>
           </a:xfrm>
           <a:prstGeom prst="rect">
             <a:avLst/>
@@ -8113,12 +5945,12 @@
           </a:ln>
         </p:spPr>
         <p:txBody>
-          <a:bodyPr wrap="square" lIns="68569" tIns="34275" rIns="68569" bIns="34275" anchor="ctr">
+          <a:bodyPr spcFirstLastPara="1" wrap="square" lIns="68569" tIns="34275" rIns="68569" bIns="34275" anchor="ctr" anchorCtr="0">
             <a:normAutofit/>
           </a:bodyPr>
           <a:lstStyle/>
           <a:p>
-            <a:pPr algn="ctr">
+            <a:pPr algn="ctr" defTabSz="685800">
               <a:lnSpc>
                 <a:spcPct val="90000"/>
               </a:lnSpc>
@@ -8128,21 +5960,31 @@
                 <a:latin typeface="Times New Roman" panose="02020603050405020304" pitchFamily="18" charset="0"/>
                 <a:cs typeface="Times New Roman" panose="02020603050405020304" pitchFamily="18" charset="0"/>
               </a:rPr>
-              <a:t>Abstract</a:t>
-            </a:r>
+              <a:t>Introduction</a:t>
+            </a:r>
+            <a:endParaRPr sz="2400" dirty="0">
+              <a:latin typeface="Times New Roman" panose="02020603050405020304" pitchFamily="18" charset="0"/>
+              <a:cs typeface="Times New Roman" panose="02020603050405020304" pitchFamily="18" charset="0"/>
+            </a:endParaRPr>
           </a:p>
         </p:txBody>
       </p:sp>
       <p:sp>
         <p:nvSpPr>
-          <p:cNvPr id="12" name="Text 12"/>
+          <p:cNvPr id="5" name="Google Shape;69;g78e6671419f8a2a0_22">
+            <a:extLst>
+              <a:ext uri="{FF2B5EF4-FFF2-40B4-BE49-F238E27FC236}">
+                <a16:creationId xmlns:a16="http://schemas.microsoft.com/office/drawing/2014/main" id="{13186C97-59A2-67F5-3892-203B43C861C9}"/>
+              </a:ext>
+            </a:extLst>
+          </p:cNvPr>
           <p:cNvSpPr txBox="1"/>
           <p:nvPr/>
         </p:nvSpPr>
         <p:spPr>
           <a:xfrm>
-            <a:off x="685800" y="2011680"/>
-            <a:ext cx="7772400" cy="3566160"/>
+            <a:off x="822960" y="2011680"/>
+            <a:ext cx="7589520" cy="4206240"/>
           </a:xfrm>
           <a:prstGeom prst="rect">
             <a:avLst/>
@@ -8153,118 +5995,113 @@
           </a:ln>
         </p:spPr>
         <p:txBody>
-          <a:bodyPr wrap="square" lIns="73152" tIns="73152" rIns="73152" bIns="73152" anchor="t">
+          <a:bodyPr spcFirstLastPara="1" wrap="square" lIns="68569" tIns="34275" rIns="68569" bIns="34275" anchor="t" anchorCtr="0">
             <a:noAutofit/>
           </a:bodyPr>
           <a:lstStyle/>
           <a:p>
-            <a:pPr marL="0" indent="0" algn="just">
-              <a:lnSpc>
-                <a:spcPct val="115000"/>
-              </a:lnSpc>
-              <a:spcBef>
-                <a:spcPts val="0"/>
-              </a:spcBef>
-              <a:buNone/>
+            <a:pPr marL="457200" indent="-342900">
+              <a:lnSpc>
+                <a:spcPct val="90000"/>
+              </a:lnSpc>
+              <a:spcBef>
+                <a:spcPts val="1200"/>
+              </a:spcBef>
+              <a:buSzPts val="1800"/>
+              <a:buFont typeface="Arial"/>
+              <a:buChar char="•"/>
             </a:pPr>
             <a:r>
-              <a:rPr lang="en-US" sz="1400" dirty="0">
+              <a:rPr lang="en-US" sz="1700" dirty="0">
                 <a:solidFill>
                   <a:srgbClr val="595959"/>
                 </a:solidFill>
               </a:rPr>
-              <a:t>India has 197 endangered languages, more than any other country, and most of its dialects exist only as speech. SwaraVeda is a community-driven web archive that records, transcribes and preserves the songs, stories and conversations of endangered Indian dialects.</a:t>
-            </a:r>
-          </a:p>
-          <a:p>
-            <a:pPr marL="0" indent="0" algn="just">
-              <a:lnSpc>
-                <a:spcPct val="115000"/>
-              </a:lnSpc>
-              <a:spcBef>
-                <a:spcPts val="1000"/>
-              </a:spcBef>
-              <a:buNone/>
+              <a:t>Many Indian dialects are purely oral: no written texts, no dictionaries, no speech technology</a:t>
+            </a:r>
+          </a:p>
+          <a:p>
+            <a:pPr marL="457200" indent="-342900">
+              <a:lnSpc>
+                <a:spcPct val="90000"/>
+              </a:lnSpc>
+              <a:spcBef>
+                <a:spcPts val="1200"/>
+              </a:spcBef>
+              <a:buSzPts val="1800"/>
+              <a:buFont typeface="Arial"/>
+              <a:buChar char="•"/>
             </a:pPr>
             <a:r>
-              <a:rPr lang="en-US" sz="1400" dirty="0">
+              <a:rPr lang="en-US" sz="1700" dirty="0">
                 <a:solidFill>
                   <a:srgbClr val="595959"/>
                 </a:solidFill>
               </a:rPr>
-              <a:t>Speakers record or upload audio with explicit consent. The system cleans the audio and uses the Whisper large-v3 speech model to draft a timestamped transcript. Native speakers correct it in a listening editor, with AI-suggested English translations, and verifiers approve each passage.</a:t>
-            </a:r>
-          </a:p>
-          <a:p>
-            <a:pPr marL="0" indent="0" algn="just">
-              <a:lnSpc>
-                <a:spcPct val="115000"/>
-              </a:lnSpc>
-              <a:spcBef>
-                <a:spcPts val="1000"/>
-              </a:spcBef>
-              <a:buNone/>
+              <a:t>Elders carry songs, rituals and knowledge (e.g. Tulu paddanas) that are lost when they are</a:t>
+            </a:r>
+          </a:p>
+          <a:p>
+            <a:pPr marL="457200" indent="-342900">
+              <a:lnSpc>
+                <a:spcPct val="90000"/>
+              </a:lnSpc>
+              <a:spcBef>
+                <a:spcPts val="1200"/>
+              </a:spcBef>
+              <a:buSzPts val="1800"/>
+              <a:buFont typeface="Arial"/>
+              <a:buChar char="•"/>
             </a:pPr>
             <a:r>
-              <a:rPr lang="en-US" sz="1400" dirty="0">
+              <a:rPr lang="en-US" sz="1700" dirty="0">
                 <a:solidFill>
                   <a:srgbClr val="595959"/>
                 </a:solidFill>
               </a:rPr>
-              <a:t>Corrected transcripts become searchable by keyword and by meaning, and are exported as a consented dataset for training speech recognition in low-resource languages. The system is deployed live and catalogues 74 dialects.</a:t>
-            </a:r>
-          </a:p>
-        </p:txBody>
-      </p:sp>
-      <p:sp>
-        <p:nvSpPr>
-          <p:cNvPr id="13" name="Text 13"/>
-          <p:cNvSpPr txBox="1"/>
-          <p:nvPr/>
-        </p:nvSpPr>
-        <p:spPr>
-          <a:xfrm>
-            <a:off x="685800" y="5715000"/>
-            <a:ext cx="7772400" cy="457200"/>
-          </a:xfrm>
-          <a:prstGeom prst="rect">
-            <a:avLst/>
-          </a:prstGeom>
-          <a:noFill/>
-          <a:ln>
-            <a:noFill/>
-          </a:ln>
-        </p:spPr>
-        <p:txBody>
-          <a:bodyPr wrap="square" lIns="73152" tIns="73152" rIns="73152" bIns="73152" anchor="t">
-            <a:noAutofit/>
-          </a:bodyPr>
-          <a:lstStyle/>
-          <a:p>
-            <a:pPr marL="0" indent="0" algn="l">
-              <a:lnSpc>
-                <a:spcPct val="100000"/>
-              </a:lnSpc>
-              <a:spcBef>
-                <a:spcPts val="0"/>
-              </a:spcBef>
-              <a:buNone/>
+              <a:t>Speech AI works for Hindi, Kannada or Tamil, but not for Tulu, Toda, Kodava or Santali</a:t>
+            </a:r>
+          </a:p>
+          <a:p>
+            <a:pPr marL="457200" indent="-342900">
+              <a:lnSpc>
+                <a:spcPct val="90000"/>
+              </a:lnSpc>
+              <a:spcBef>
+                <a:spcPts val="1200"/>
+              </a:spcBef>
+              <a:buSzPts val="1800"/>
+              <a:buFont typeface="Arial"/>
+              <a:buChar char="•"/>
             </a:pPr>
             <a:r>
-              <a:rPr lang="en-US" sz="1200" b="1" dirty="0">
-                <a:solidFill>
-                  <a:srgbClr val="262626"/>
-                </a:solidFill>
-              </a:rPr>
-              <a:t xml:space="preserve">Keywords: </a:t>
-            </a:r>
-            <a:r>
-              <a:rPr lang="en-US" sz="1200" i="1" dirty="0">
+              <a:rPr lang="en-US" sz="1700" dirty="0">
                 <a:solidFill>
                   <a:srgbClr val="595959"/>
                 </a:solidFill>
               </a:rPr>
-              <a:t>endangered languages, speech recognition, Whisper, crowdsourcing, semantic search, language documentation</a:t>
+              <a:t>Manual transcription is slow and needs native speakers, so recordings sit unused</a:t>
+            </a:r>
+          </a:p>
+          <a:p>
+            <a:pPr marL="457200" indent="-342900">
+              <a:lnSpc>
+                <a:spcPct val="90000"/>
+              </a:lnSpc>
+              <a:spcBef>
+                <a:spcPts val="1200"/>
+              </a:spcBef>
+              <a:buSzPts val="1800"/>
+              <a:buFont typeface="Arial"/>
+              <a:buChar char="•"/>
+            </a:pPr>
+            <a:r>
+              <a:rPr lang="en-US" sz="1700" dirty="0">
+                <a:solidFill>
+                  <a:srgbClr val="595959"/>
+                </a:solidFill>
+              </a:rPr>
+              <a:t>SwaraVeda pairs an AI first draft (Vani) with community correction, so every recorded hour becomes verified, searchable text</a:t>
             </a:r>
           </a:p>
         </p:txBody>
@@ -8296,14 +6133,20 @@
       </p:grpSpPr>
       <p:sp>
         <p:nvSpPr>
-          <p:cNvPr id="11" name="Title 11"/>
+          <p:cNvPr id="3" name="Google Shape;68;g78e6671419f8a2a0_22">
+            <a:extLst>
+              <a:ext uri="{FF2B5EF4-FFF2-40B4-BE49-F238E27FC236}">
+                <a16:creationId xmlns:a16="http://schemas.microsoft.com/office/drawing/2014/main" id="{BA677A83-D006-E1F4-CCF8-948027C21AB2}"/>
+              </a:ext>
+            </a:extLst>
+          </p:cNvPr>
           <p:cNvSpPr txBox="1"/>
           <p:nvPr/>
         </p:nvSpPr>
         <p:spPr>
           <a:xfrm>
             <a:off x="628650" y="1131097"/>
-            <a:ext cx="7886700" cy="760000"/>
+            <a:ext cx="7886700" cy="994275"/>
           </a:xfrm>
           <a:prstGeom prst="rect">
             <a:avLst/>
@@ -8314,12 +6157,12 @@
           </a:ln>
         </p:spPr>
         <p:txBody>
-          <a:bodyPr wrap="square" lIns="68569" tIns="34275" rIns="68569" bIns="34275" anchor="ctr">
+          <a:bodyPr spcFirstLastPara="1" wrap="square" lIns="68569" tIns="34275" rIns="68569" bIns="34275" anchor="ctr" anchorCtr="0">
             <a:normAutofit/>
           </a:bodyPr>
           <a:lstStyle/>
           <a:p>
-            <a:pPr algn="ctr">
+            <a:pPr algn="ctr" defTabSz="685800">
               <a:lnSpc>
                 <a:spcPct val="90000"/>
               </a:lnSpc>
@@ -8329,21 +6172,31 @@
                 <a:latin typeface="Times New Roman" panose="02020603050405020304" pitchFamily="18" charset="0"/>
                 <a:cs typeface="Times New Roman" panose="02020603050405020304" pitchFamily="18" charset="0"/>
               </a:rPr>
-              <a:t>Introduction</a:t>
-            </a:r>
+              <a:t>Objectives and Problem Statement</a:t>
+            </a:r>
+            <a:endParaRPr sz="2400" dirty="0">
+              <a:latin typeface="Times New Roman" panose="02020603050405020304" pitchFamily="18" charset="0"/>
+              <a:cs typeface="Times New Roman" panose="02020603050405020304" pitchFamily="18" charset="0"/>
+            </a:endParaRPr>
           </a:p>
         </p:txBody>
       </p:sp>
       <p:sp>
         <p:nvSpPr>
-          <p:cNvPr id="12" name="Text 12"/>
+          <p:cNvPr id="5" name="Google Shape;69;g78e6671419f8a2a0_22">
+            <a:extLst>
+              <a:ext uri="{FF2B5EF4-FFF2-40B4-BE49-F238E27FC236}">
+                <a16:creationId xmlns:a16="http://schemas.microsoft.com/office/drawing/2014/main" id="{13186C97-59A2-67F5-3892-203B43C861C9}"/>
+              </a:ext>
+            </a:extLst>
+          </p:cNvPr>
           <p:cNvSpPr txBox="1"/>
           <p:nvPr/>
         </p:nvSpPr>
         <p:spPr>
           <a:xfrm>
-            <a:off x="548640" y="2011680"/>
-            <a:ext cx="5120640" cy="4206240"/>
+            <a:off x="822960" y="3154680"/>
+            <a:ext cx="7589520" cy="3108960"/>
           </a:xfrm>
           <a:prstGeom prst="rect">
             <a:avLst/>
@@ -8354,20 +6207,20 @@
           </a:ln>
         </p:spPr>
         <p:txBody>
-          <a:bodyPr wrap="square" lIns="73152" tIns="73152" rIns="73152" bIns="73152" anchor="t">
+          <a:bodyPr spcFirstLastPara="1" wrap="square" lIns="68569" tIns="34275" rIns="68569" bIns="34275" anchor="t" anchorCtr="0">
             <a:noAutofit/>
           </a:bodyPr>
           <a:lstStyle/>
           <a:p>
-            <a:pPr marL="256032" indent="-228600" algn="l">
-              <a:lnSpc>
-                <a:spcPct val="105000"/>
-              </a:lnSpc>
-              <a:spcBef>
-                <a:spcPts val="0"/>
-              </a:spcBef>
-              <a:buFont typeface="Arial"/>
-              <a:buChar char="•"/>
+            <a:pPr marL="457200" indent="-342900">
+              <a:lnSpc>
+                <a:spcPct val="90000"/>
+              </a:lnSpc>
+              <a:spcBef>
+                <a:spcPts val="900"/>
+              </a:spcBef>
+              <a:buFont typeface="+mj-lt"/>
+              <a:buAutoNum type="arabicPeriod"/>
             </a:pPr>
             <a:r>
               <a:rPr lang="en-US" sz="1500" dirty="0">
@@ -8375,19 +6228,19 @@
                   <a:srgbClr val="595959"/>
                 </a:solidFill>
               </a:rPr>
-              <a:t>Many Indian dialects are purely oral: no written corpus and no speech technology supports them</a:t>
-            </a:r>
-          </a:p>
-          <a:p>
-            <a:pPr marL="256032" indent="-228600" algn="l">
-              <a:lnSpc>
-                <a:spcPct val="105000"/>
-              </a:lnSpc>
-              <a:spcBef>
-                <a:spcPts val="1200"/>
-              </a:spcBef>
-              <a:buFont typeface="Arial"/>
-              <a:buChar char="•"/>
+              <a:t>Collect recordings in the browser or by upload, with explicit speaker consent, even without internet</a:t>
+            </a:r>
+          </a:p>
+          <a:p>
+            <a:pPr marL="457200" indent="-342900">
+              <a:lnSpc>
+                <a:spcPct val="90000"/>
+              </a:lnSpc>
+              <a:spcBef>
+                <a:spcPts val="900"/>
+              </a:spcBef>
+              <a:buFont typeface="+mj-lt"/>
+              <a:buAutoNum type="arabicPeriod"/>
             </a:pPr>
             <a:r>
               <a:rPr lang="en-US" sz="1500" dirty="0">
@@ -8395,19 +6248,19 @@
                   <a:srgbClr val="595959"/>
                 </a:solidFill>
               </a:rPr>
-              <a:t>Elders carry songs, rituals and knowledge that are lost when they are</a:t>
-            </a:r>
-          </a:p>
-          <a:p>
-            <a:pPr marL="256032" indent="-228600" algn="l">
-              <a:lnSpc>
-                <a:spcPct val="105000"/>
-              </a:lnSpc>
-              <a:spcBef>
-                <a:spcPts val="1200"/>
-              </a:spcBef>
-              <a:buFont typeface="Arial"/>
-              <a:buChar char="•"/>
+              <a:t>Pre-process audio and generate timestamped transcripts automatically with Vani</a:t>
+            </a:r>
+          </a:p>
+          <a:p>
+            <a:pPr marL="457200" indent="-342900">
+              <a:lnSpc>
+                <a:spcPct val="90000"/>
+              </a:lnSpc>
+              <a:spcBef>
+                <a:spcPts val="900"/>
+              </a:spcBef>
+              <a:buFont typeface="+mj-lt"/>
+              <a:buAutoNum type="arabicPeriod"/>
             </a:pPr>
             <a:r>
               <a:rPr lang="en-US" sz="1500" dirty="0">
@@ -8415,19 +6268,19 @@
                   <a:srgbClr val="595959"/>
                 </a:solidFill>
               </a:rPr>
-              <a:t>Speech AI works well for Hindi or Kannada, but not for Tulu, Toda or Kodava</a:t>
-            </a:r>
-          </a:p>
-          <a:p>
-            <a:pPr marL="256032" indent="-228600" algn="l">
-              <a:lnSpc>
-                <a:spcPct val="105000"/>
-              </a:lnSpc>
-              <a:spcBef>
-                <a:spcPts val="1200"/>
-              </a:spcBef>
-              <a:buFont typeface="Arial"/>
-              <a:buChar char="•"/>
+              <a:t>Let native speakers correct, and verifiers approve, every passage</a:t>
+            </a:r>
+          </a:p>
+          <a:p>
+            <a:pPr marL="457200" indent="-342900">
+              <a:lnSpc>
+                <a:spcPct val="90000"/>
+              </a:lnSpc>
+              <a:spcBef>
+                <a:spcPts val="900"/>
+              </a:spcBef>
+              <a:buFont typeface="+mj-lt"/>
+              <a:buAutoNum type="arabicPeriod"/>
             </a:pPr>
             <a:r>
               <a:rPr lang="en-US" sz="1500" dirty="0">
@@ -8435,19 +6288,19 @@
                   <a:srgbClr val="595959"/>
                 </a:solidFill>
               </a:rPr>
-              <a:t>Manual transcription is slow and needs native speakers</a:t>
-            </a:r>
-          </a:p>
-          <a:p>
-            <a:pPr marL="256032" indent="-228600" algn="l">
-              <a:lnSpc>
-                <a:spcPct val="105000"/>
-              </a:lnSpc>
-              <a:spcBef>
-                <a:spcPts val="1200"/>
-              </a:spcBef>
-              <a:buFont typeface="Arial"/>
-              <a:buChar char="•"/>
+              <a:t>Make the archive searchable by words and by meaning, with passage playback</a:t>
+            </a:r>
+          </a:p>
+          <a:p>
+            <a:pPr marL="457200" indent="-342900">
+              <a:lnSpc>
+                <a:spcPct val="90000"/>
+              </a:lnSpc>
+              <a:spcBef>
+                <a:spcPts val="900"/>
+              </a:spcBef>
+              <a:buFont typeface="+mj-lt"/>
+              <a:buAutoNum type="arabicPeriod"/>
             </a:pPr>
             <a:r>
               <a:rPr lang="en-US" sz="1500" dirty="0">
@@ -8455,162 +6308,83 @@
                   <a:srgbClr val="595959"/>
                 </a:solidFill>
               </a:rPr>
-              <a:t>SwaraVeda pairs AI first drafts with community correction, so each hour of speech becomes searchable, verified text</a:t>
+              <a:t>Export corrected, consented data to train speech models for these dialects</a:t>
             </a:r>
           </a:p>
         </p:txBody>
       </p:sp>
       <p:sp>
         <p:nvSpPr>
-          <p:cNvPr id="13" name="Text 13"/>
+          <p:cNvPr id="6" name="TextBox 5"/>
           <p:cNvSpPr txBox="1"/>
           <p:nvPr/>
         </p:nvSpPr>
         <p:spPr>
           <a:xfrm>
-            <a:off x="5989320" y="2240280"/>
-            <a:ext cx="2606040" cy="2377440"/>
+            <a:off x="822960" y="1965960"/>
+            <a:ext cx="7589520" cy="1005840"/>
           </a:xfrm>
-          <a:prstGeom prst="roundRect">
-            <a:avLst>
-              <a:gd name="adj" fmla="val 8000"/>
-            </a:avLst>
+          <a:prstGeom prst="rect">
+            <a:avLst/>
           </a:prstGeom>
-          <a:solidFill>
-            <a:srgbClr val="FDF4E6"/>
-          </a:solidFill>
-          <a:ln>
-            <a:noFill/>
-          </a:ln>
+          <a:noFill/>
         </p:spPr>
         <p:txBody>
-          <a:bodyPr wrap="square" lIns="137160" tIns="137160" rIns="137160" bIns="137160" anchor="ctr">
-            <a:noAutofit/>
+          <a:bodyPr wrap="square">
+            <a:spAutoFit/>
           </a:bodyPr>
           <a:lstStyle/>
           <a:p>
-            <a:pPr marL="0" indent="0" algn="ctr">
-              <a:lnSpc>
-                <a:spcPct val="100000"/>
-              </a:lnSpc>
-              <a:spcBef>
-                <a:spcPts val="0"/>
-              </a:spcBef>
-              <a:buNone/>
-            </a:pPr>
-            <a:r>
-              <a:rPr lang="en-US" sz="5400" b="1" dirty="0">
-                <a:solidFill>
-                  <a:srgbClr val="B45309"/>
-                </a:solidFill>
-              </a:rPr>
-              <a:t>197</a:t>
-            </a:r>
-          </a:p>
-          <a:p>
-            <a:pPr marL="0" indent="0" algn="ctr">
-              <a:lnSpc>
-                <a:spcPct val="100000"/>
-              </a:lnSpc>
-              <a:spcBef>
-                <a:spcPts val="400"/>
-              </a:spcBef>
-              <a:buNone/>
-            </a:pPr>
-            <a:r>
-              <a:rPr lang="en-US" sz="1300" dirty="0">
-                <a:solidFill>
-                  <a:srgbClr val="262626"/>
-                </a:solidFill>
-              </a:rPr>
-              <a:t>endangered languages in India, the most of any country</a:t>
-            </a:r>
-          </a:p>
-          <a:p>
-            <a:pPr marL="0" indent="0" algn="ctr">
-              <a:lnSpc>
-                <a:spcPct val="100000"/>
-              </a:lnSpc>
-              <a:spcBef>
-                <a:spcPts val="800"/>
-              </a:spcBef>
-              <a:buNone/>
-            </a:pPr>
-            <a:r>
-              <a:rPr lang="en-US" sz="1000" i="1" dirty="0">
+            <a:pPr algn="l"/>
+            <a:r>
+              <a:rPr sz="1500" b="1">
                 <a:solidFill>
                   <a:srgbClr val="595959"/>
                 </a:solidFill>
               </a:rPr>
-              <a:t>UNESCO Atlas of the World's Languages in Danger</a:t>
+              <a:t>Problem statement: </a:t>
+            </a:r>
+            <a:r>
+              <a:rPr sz="1500" i="0">
+                <a:solidFill>
+                  <a:srgbClr val="595959"/>
+                </a:solidFill>
+              </a:rPr>
+              <a:t>There is no simple, consent-aware platform where communities can record endangered dialects, get machine-drafted transcripts, correct and verify them, and turn them into a reusable dataset for speech technology.</a:t>
             </a:r>
           </a:p>
         </p:txBody>
       </p:sp>
       <p:sp>
         <p:nvSpPr>
-          <p:cNvPr id="14" name="Text 14"/>
+          <p:cNvPr id="7" name="TextBox 6"/>
           <p:cNvSpPr txBox="1"/>
           <p:nvPr/>
         </p:nvSpPr>
         <p:spPr>
           <a:xfrm>
-            <a:off x="5989320" y="4846320"/>
-            <a:ext cx="2606040" cy="1234440"/>
+            <a:off x="822960" y="2834640"/>
+            <a:ext cx="2743200" cy="320040"/>
           </a:xfrm>
-          <a:prstGeom prst="roundRect">
-            <a:avLst>
-              <a:gd name="adj" fmla="val 8000"/>
-            </a:avLst>
+          <a:prstGeom prst="rect">
+            <a:avLst/>
           </a:prstGeom>
-          <a:solidFill>
-            <a:srgbClr val="FCF0F5"/>
-          </a:solidFill>
-          <a:ln>
-            <a:noFill/>
-          </a:ln>
+          <a:noFill/>
         </p:spPr>
         <p:txBody>
-          <a:bodyPr wrap="square" lIns="109728" tIns="109728" rIns="109728" bIns="109728" anchor="ctr">
-            <a:noAutofit/>
+          <a:bodyPr wrap="square">
+            <a:spAutoFit/>
           </a:bodyPr>
           <a:lstStyle/>
           <a:p>
-            <a:pPr marL="0" indent="0" algn="ctr">
-              <a:lnSpc>
-                <a:spcPct val="100000"/>
-              </a:lnSpc>
-              <a:spcBef>
-                <a:spcPts val="0"/>
-              </a:spcBef>
-              <a:buNone/>
-            </a:pPr>
-            <a:r>
-              <a:rPr lang="en-US" sz="3200" b="1" dirty="0">
-                <a:solidFill>
-                  <a:srgbClr val="A3326A"/>
-                </a:solidFill>
-              </a:rPr>
-              <a:t>74</a:t>
-            </a:r>
-          </a:p>
-          <a:p>
-            <a:pPr marL="0" indent="0" algn="ctr">
-              <a:lnSpc>
-                <a:spcPct val="100000"/>
-              </a:lnSpc>
-              <a:spcBef>
-                <a:spcPts val="200"/>
-              </a:spcBef>
-              <a:buNone/>
-            </a:pPr>
-            <a:r>
-              <a:rPr lang="en-US" sz="1200" dirty="0">
-                <a:solidFill>
-                  <a:srgbClr val="262626"/>
-                </a:solidFill>
-              </a:rPr>
-              <a:t>dialects catalogued in SwaraVeda so far</a:t>
+            <a:pPr algn="l"/>
+            <a:r>
+              <a:rPr sz="1500" i="0" b="1">
+                <a:solidFill>
+                  <a:srgbClr val="595959"/>
+                </a:solidFill>
+              </a:rPr>
+              <a:t>Objectives</a:t>
             </a:r>
           </a:p>
         </p:txBody>
@@ -8642,14 +6416,20 @@
       </p:grpSpPr>
       <p:sp>
         <p:nvSpPr>
-          <p:cNvPr id="11" name="Title 11"/>
+          <p:cNvPr id="3" name="Google Shape;68;g78e6671419f8a2a0_22">
+            <a:extLst>
+              <a:ext uri="{FF2B5EF4-FFF2-40B4-BE49-F238E27FC236}">
+                <a16:creationId xmlns:a16="http://schemas.microsoft.com/office/drawing/2014/main" id="{BA677A83-D006-E1F4-CCF8-948027C21AB2}"/>
+              </a:ext>
+            </a:extLst>
+          </p:cNvPr>
           <p:cNvSpPr txBox="1"/>
           <p:nvPr/>
         </p:nvSpPr>
         <p:spPr>
           <a:xfrm>
             <a:off x="628650" y="1131097"/>
-            <a:ext cx="7886700" cy="760000"/>
+            <a:ext cx="7886700" cy="994275"/>
           </a:xfrm>
           <a:prstGeom prst="rect">
             <a:avLst/>
@@ -8660,12 +6440,12 @@
           </a:ln>
         </p:spPr>
         <p:txBody>
-          <a:bodyPr wrap="square" lIns="68569" tIns="34275" rIns="68569" bIns="34275" anchor="ctr">
+          <a:bodyPr spcFirstLastPara="1" wrap="square" lIns="68569" tIns="34275" rIns="68569" bIns="34275" anchor="ctr" anchorCtr="0">
             <a:normAutofit/>
           </a:bodyPr>
           <a:lstStyle/>
           <a:p>
-            <a:pPr algn="ctr">
+            <a:pPr algn="ctr" defTabSz="685800">
               <a:lnSpc>
                 <a:spcPct val="90000"/>
               </a:lnSpc>
@@ -8675,21 +6455,25 @@
                 <a:latin typeface="Times New Roman" panose="02020603050405020304" pitchFamily="18" charset="0"/>
                 <a:cs typeface="Times New Roman" panose="02020603050405020304" pitchFamily="18" charset="0"/>
               </a:rPr>
-              <a:t>Objectives and Problem Statement</a:t>
-            </a:r>
+              <a:t>Proposed Model - Methodology (Architecture diagram)</a:t>
+            </a:r>
+            <a:endParaRPr sz="2400" dirty="0">
+              <a:latin typeface="Times New Roman" panose="02020603050405020304" pitchFamily="18" charset="0"/>
+              <a:cs typeface="Times New Roman" panose="02020603050405020304" pitchFamily="18" charset="0"/>
+            </a:endParaRPr>
           </a:p>
         </p:txBody>
       </p:sp>
       <p:sp>
         <p:nvSpPr>
-          <p:cNvPr id="12" name="Text 12"/>
-          <p:cNvSpPr txBox="1"/>
+          <p:cNvPr id="4" name="Rounded Rectangle 3"/>
+          <p:cNvSpPr/>
           <p:nvPr/>
         </p:nvSpPr>
         <p:spPr>
           <a:xfrm>
-            <a:off x="548640" y="1920240"/>
-            <a:ext cx="8046720" cy="1325880"/>
+            <a:off x="548640" y="2148840"/>
+            <a:ext cx="2331720" cy="868680"/>
           </a:xfrm>
           <a:prstGeom prst="roundRect">
             <a:avLst>
@@ -8697,224 +6481,1250 @@
             </a:avLst>
           </a:prstGeom>
           <a:solidFill>
-            <a:srgbClr val="FDF4E6"/>
+            <a:srgbClr val="FFFFFF"/>
           </a:solidFill>
-          <a:ln>
-            <a:noFill/>
+          <a:ln w="12700">
+            <a:solidFill>
+              <a:srgbClr val="8C8C8C"/>
+            </a:solidFill>
           </a:ln>
+          <a:effectLst/>
         </p:spPr>
+        <p:style>
+          <a:lnRef idx="1">
+            <a:schemeClr val="accent1"/>
+          </a:lnRef>
+          <a:fillRef idx="3">
+            <a:schemeClr val="accent1"/>
+          </a:fillRef>
+          <a:effectRef idx="2">
+            <a:schemeClr val="accent1"/>
+          </a:effectRef>
+          <a:fontRef idx="minor">
+            <a:schemeClr val="lt1"/>
+          </a:fontRef>
+        </p:style>
         <p:txBody>
-          <a:bodyPr wrap="square" lIns="137160" tIns="137160" rIns="137160" bIns="137160" anchor="t">
-            <a:noAutofit/>
-          </a:bodyPr>
+          <a:bodyPr rtlCol="0" anchor="ctr" wrap="square" lIns="54864" rIns="54864"/>
           <a:lstStyle/>
           <a:p>
-            <a:pPr marL="0" indent="0" algn="l">
-              <a:lnSpc>
-                <a:spcPct val="100000"/>
-              </a:lnSpc>
-              <a:spcBef>
-                <a:spcPts val="0"/>
-              </a:spcBef>
-              <a:buNone/>
-            </a:pPr>
-            <a:r>
-              <a:rPr lang="en-US" sz="1400" b="1" dirty="0">
-                <a:solidFill>
-                  <a:srgbClr val="B45309"/>
-                </a:solidFill>
-              </a:rPr>
-              <a:t>Problem statement</a:t>
-            </a:r>
-          </a:p>
-          <a:p>
-            <a:pPr marL="0" indent="0" algn="l">
-              <a:lnSpc>
-                <a:spcPct val="110000"/>
-              </a:lnSpc>
-              <a:spcBef>
-                <a:spcPts val="400"/>
-              </a:spcBef>
-              <a:buNone/>
-            </a:pPr>
-            <a:r>
-              <a:rPr lang="en-US" sz="1400" dirty="0">
+            <a:pPr algn="ctr"/>
+            <a:r>
+              <a:rPr sz="1100" b="1">
                 <a:solidFill>
                   <a:srgbClr val="262626"/>
                 </a:solidFill>
               </a:rPr>
-              <a:t>There is no simple, consent-aware platform where communities can record endangered dialects, get machine-drafted transcripts, correct and verify them, and turn them into a reusable dataset for speech technology.</a:t>
+              <a:t>Web client</a:t>
+            </a:r>
+          </a:p>
+          <a:p>
+            <a:pPr algn="ctr"/>
+            <a:r>
+              <a:rPr sz="850">
+                <a:solidFill>
+                  <a:srgbClr val="595959"/>
+                </a:solidFill>
+              </a:rPr>
+              <a:t>React + TypeScript, Vercel
+recording, offline queue</a:t>
             </a:r>
           </a:p>
         </p:txBody>
       </p:sp>
       <p:sp>
         <p:nvSpPr>
-          <p:cNvPr id="13" name="Text 13"/>
+          <p:cNvPr id="5" name="Rounded Rectangle 4"/>
+          <p:cNvSpPr/>
+          <p:nvPr/>
+        </p:nvSpPr>
+        <p:spPr>
+          <a:xfrm>
+            <a:off x="3401568" y="2148840"/>
+            <a:ext cx="2331720" cy="868680"/>
+          </a:xfrm>
+          <a:prstGeom prst="roundRect">
+            <a:avLst>
+              <a:gd name="adj" fmla="val 8000"/>
+            </a:avLst>
+          </a:prstGeom>
+          <a:solidFill>
+            <a:srgbClr val="FFFFFF"/>
+          </a:solidFill>
+          <a:ln w="12700">
+            <a:solidFill>
+              <a:srgbClr val="8C8C8C"/>
+            </a:solidFill>
+          </a:ln>
+          <a:effectLst/>
+        </p:spPr>
+        <p:style>
+          <a:lnRef idx="1">
+            <a:schemeClr val="accent1"/>
+          </a:lnRef>
+          <a:fillRef idx="3">
+            <a:schemeClr val="accent1"/>
+          </a:fillRef>
+          <a:effectRef idx="2">
+            <a:schemeClr val="accent1"/>
+          </a:effectRef>
+          <a:fontRef idx="minor">
+            <a:schemeClr val="lt1"/>
+          </a:fontRef>
+        </p:style>
+        <p:txBody>
+          <a:bodyPr rtlCol="0" anchor="ctr" wrap="square" lIns="54864" rIns="54864"/>
+          <a:lstStyle/>
+          <a:p>
+            <a:pPr algn="ctr"/>
+            <a:r>
+              <a:rPr sz="1100" b="1">
+                <a:solidFill>
+                  <a:srgbClr val="262626"/>
+                </a:solidFill>
+              </a:rPr>
+              <a:t>REST API (FastAPI)</a:t>
+            </a:r>
+          </a:p>
+          <a:p>
+            <a:pPr algn="ctr"/>
+            <a:r>
+              <a:rPr sz="850">
+                <a:solidFill>
+                  <a:srgbClr val="595959"/>
+                </a:solidFill>
+              </a:rPr>
+              <a:t>auth, recordings, review,
+search, export • Render</a:t>
+            </a:r>
+          </a:p>
+        </p:txBody>
+      </p:sp>
+      <p:sp>
+        <p:nvSpPr>
+          <p:cNvPr id="6" name="Rounded Rectangle 5"/>
+          <p:cNvSpPr/>
+          <p:nvPr/>
+        </p:nvSpPr>
+        <p:spPr>
+          <a:xfrm>
+            <a:off x="6254496" y="2148840"/>
+            <a:ext cx="2331720" cy="868680"/>
+          </a:xfrm>
+          <a:prstGeom prst="roundRect">
+            <a:avLst>
+              <a:gd name="adj" fmla="val 8000"/>
+            </a:avLst>
+          </a:prstGeom>
+          <a:solidFill>
+            <a:srgbClr val="FFFFFF"/>
+          </a:solidFill>
+          <a:ln w="12700">
+            <a:solidFill>
+              <a:srgbClr val="8C8C8C"/>
+            </a:solidFill>
+          </a:ln>
+          <a:effectLst/>
+        </p:spPr>
+        <p:style>
+          <a:lnRef idx="1">
+            <a:schemeClr val="accent1"/>
+          </a:lnRef>
+          <a:fillRef idx="3">
+            <a:schemeClr val="accent1"/>
+          </a:fillRef>
+          <a:effectRef idx="2">
+            <a:schemeClr val="accent1"/>
+          </a:effectRef>
+          <a:fontRef idx="minor">
+            <a:schemeClr val="lt1"/>
+          </a:fontRef>
+        </p:style>
+        <p:txBody>
+          <a:bodyPr rtlCol="0" anchor="ctr" wrap="square" lIns="54864" rIns="54864"/>
+          <a:lstStyle/>
+          <a:p>
+            <a:pPr algn="ctr"/>
+            <a:r>
+              <a:rPr sz="1100" b="1">
+                <a:solidFill>
+                  <a:srgbClr val="262626"/>
+                </a:solidFill>
+              </a:rPr>
+              <a:t>Vani AI services</a:t>
+            </a:r>
+          </a:p>
+          <a:p>
+            <a:pPr algn="ctr"/>
+            <a:r>
+              <a:rPr sz="850">
+                <a:solidFill>
+                  <a:srgbClr val="595959"/>
+                </a:solidFill>
+              </a:rPr>
+              <a:t>Whisper large-v3 (speech)
+Llama 3.3 • MiniLM embeddings</a:t>
+            </a:r>
+          </a:p>
+        </p:txBody>
+      </p:sp>
+      <p:sp>
+        <p:nvSpPr>
+          <p:cNvPr id="7" name="Rounded Rectangle 6"/>
+          <p:cNvSpPr/>
+          <p:nvPr/>
+        </p:nvSpPr>
+        <p:spPr>
+          <a:xfrm>
+            <a:off x="548640" y="3703320"/>
+            <a:ext cx="2331720" cy="868680"/>
+          </a:xfrm>
+          <a:prstGeom prst="roundRect">
+            <a:avLst>
+              <a:gd name="adj" fmla="val 8000"/>
+            </a:avLst>
+          </a:prstGeom>
+          <a:solidFill>
+            <a:srgbClr val="FFFFFF"/>
+          </a:solidFill>
+          <a:ln w="12700">
+            <a:solidFill>
+              <a:srgbClr val="8C8C8C"/>
+            </a:solidFill>
+          </a:ln>
+          <a:effectLst/>
+        </p:spPr>
+        <p:style>
+          <a:lnRef idx="1">
+            <a:schemeClr val="accent1"/>
+          </a:lnRef>
+          <a:fillRef idx="3">
+            <a:schemeClr val="accent1"/>
+          </a:fillRef>
+          <a:effectRef idx="2">
+            <a:schemeClr val="accent1"/>
+          </a:effectRef>
+          <a:fontRef idx="minor">
+            <a:schemeClr val="lt1"/>
+          </a:fontRef>
+        </p:style>
+        <p:txBody>
+          <a:bodyPr rtlCol="0" anchor="ctr" wrap="square" lIns="54864" rIns="54864"/>
+          <a:lstStyle/>
+          <a:p>
+            <a:pPr algn="ctr"/>
+            <a:r>
+              <a:rPr sz="1100" b="1">
+                <a:solidFill>
+                  <a:srgbClr val="262626"/>
+                </a:solidFill>
+              </a:rPr>
+              <a:t>Object storage</a:t>
+            </a:r>
+          </a:p>
+          <a:p>
+            <a:pPr algn="ctr"/>
+            <a:r>
+              <a:rPr sz="850">
+                <a:solidFill>
+                  <a:srgbClr val="595959"/>
+                </a:solidFill>
+              </a:rPr>
+              <a:t>Supabase Storage
+audio files</a:t>
+            </a:r>
+          </a:p>
+        </p:txBody>
+      </p:sp>
+      <p:sp>
+        <p:nvSpPr>
+          <p:cNvPr id="8" name="Rounded Rectangle 7"/>
+          <p:cNvSpPr/>
+          <p:nvPr/>
+        </p:nvSpPr>
+        <p:spPr>
+          <a:xfrm>
+            <a:off x="3401568" y="3703320"/>
+            <a:ext cx="2331720" cy="868680"/>
+          </a:xfrm>
+          <a:prstGeom prst="roundRect">
+            <a:avLst>
+              <a:gd name="adj" fmla="val 8000"/>
+            </a:avLst>
+          </a:prstGeom>
+          <a:solidFill>
+            <a:srgbClr val="FFFFFF"/>
+          </a:solidFill>
+          <a:ln w="12700">
+            <a:solidFill>
+              <a:srgbClr val="8C8C8C"/>
+            </a:solidFill>
+          </a:ln>
+          <a:effectLst/>
+        </p:spPr>
+        <p:style>
+          <a:lnRef idx="1">
+            <a:schemeClr val="accent1"/>
+          </a:lnRef>
+          <a:fillRef idx="3">
+            <a:schemeClr val="accent1"/>
+          </a:fillRef>
+          <a:effectRef idx="2">
+            <a:schemeClr val="accent1"/>
+          </a:effectRef>
+          <a:fontRef idx="minor">
+            <a:schemeClr val="lt1"/>
+          </a:fontRef>
+        </p:style>
+        <p:txBody>
+          <a:bodyPr rtlCol="0" anchor="ctr" wrap="square" lIns="54864" rIns="54864"/>
+          <a:lstStyle/>
+          <a:p>
+            <a:pPr algn="ctr"/>
+            <a:r>
+              <a:rPr sz="1100" b="1">
+                <a:solidFill>
+                  <a:srgbClr val="262626"/>
+                </a:solidFill>
+              </a:rPr>
+              <a:t>Database</a:t>
+            </a:r>
+          </a:p>
+          <a:p>
+            <a:pPr algn="ctr"/>
+            <a:r>
+              <a:rPr sz="850">
+                <a:solidFill>
+                  <a:srgbClr val="595959"/>
+                </a:solidFill>
+              </a:rPr>
+              <a:t>PostgreSQL + pgvector
+(Supabase)</a:t>
+            </a:r>
+          </a:p>
+        </p:txBody>
+      </p:sp>
+      <p:sp>
+        <p:nvSpPr>
+          <p:cNvPr id="9" name="Rounded Rectangle 8"/>
+          <p:cNvSpPr/>
+          <p:nvPr/>
+        </p:nvSpPr>
+        <p:spPr>
+          <a:xfrm>
+            <a:off x="6254496" y="3703320"/>
+            <a:ext cx="2331720" cy="868680"/>
+          </a:xfrm>
+          <a:prstGeom prst="roundRect">
+            <a:avLst>
+              <a:gd name="adj" fmla="val 8000"/>
+            </a:avLst>
+          </a:prstGeom>
+          <a:solidFill>
+            <a:srgbClr val="FFFFFF"/>
+          </a:solidFill>
+          <a:ln w="12700">
+            <a:solidFill>
+              <a:srgbClr val="8C8C8C"/>
+            </a:solidFill>
+          </a:ln>
+          <a:effectLst/>
+        </p:spPr>
+        <p:style>
+          <a:lnRef idx="1">
+            <a:schemeClr val="accent1"/>
+          </a:lnRef>
+          <a:fillRef idx="3">
+            <a:schemeClr val="accent1"/>
+          </a:fillRef>
+          <a:effectRef idx="2">
+            <a:schemeClr val="accent1"/>
+          </a:effectRef>
+          <a:fontRef idx="minor">
+            <a:schemeClr val="lt1"/>
+          </a:fontRef>
+        </p:style>
+        <p:txBody>
+          <a:bodyPr rtlCol="0" anchor="ctr" wrap="square" lIns="54864" rIns="54864"/>
+          <a:lstStyle/>
+          <a:p>
+            <a:pPr algn="ctr"/>
+            <a:r>
+              <a:rPr sz="1100" b="1">
+                <a:solidFill>
+                  <a:srgbClr val="262626"/>
+                </a:solidFill>
+              </a:rPr>
+              <a:t>Audio pre-processing</a:t>
+            </a:r>
+          </a:p>
+          <a:p>
+            <a:pPr algn="ctr"/>
+            <a:r>
+              <a:rPr sz="850">
+                <a:solidFill>
+                  <a:srgbClr val="595959"/>
+                </a:solidFill>
+              </a:rPr>
+              <a:t>ffmpeg: 16 kHz mono,
+high-pass, loudness</a:t>
+            </a:r>
+          </a:p>
+        </p:txBody>
+      </p:sp>
+      <p:cxnSp>
+        <p:nvCxnSpPr>
+          <p:cNvPr id="10" name="Connector 9"/>
+          <p:cNvCxnSpPr/>
+          <p:nvPr/>
+        </p:nvCxnSpPr>
+        <p:spPr>
+          <a:xfrm>
+            <a:off x="2880360" y="2578608"/>
+            <a:ext cx="521208" cy="0"/>
+          </a:xfrm>
+          <a:prstGeom prst="line">
+            <a:avLst/>
+          </a:prstGeom>
+          <a:ln w="15875">
+            <a:solidFill>
+              <a:srgbClr val="8C8C8C"/>
+            </a:solidFill>
+            <a:tailEnd type="triangle" w="med" len="med"/>
+          </a:ln>
+        </p:spPr>
+        <p:style>
+          <a:lnRef idx="2">
+            <a:schemeClr val="accent1"/>
+          </a:lnRef>
+          <a:fillRef idx="0">
+            <a:schemeClr val="accent1"/>
+          </a:fillRef>
+          <a:effectRef idx="1">
+            <a:schemeClr val="accent1"/>
+          </a:effectRef>
+          <a:fontRef idx="minor">
+            <a:schemeClr val="tx1"/>
+          </a:fontRef>
+        </p:style>
+      </p:cxnSp>
+      <p:sp>
+        <p:nvSpPr>
+          <p:cNvPr id="11" name="TextBox 10"/>
           <p:cNvSpPr txBox="1"/>
           <p:nvPr/>
         </p:nvSpPr>
         <p:spPr>
           <a:xfrm>
-            <a:off x="548640" y="3429000"/>
-            <a:ext cx="8046720" cy="365760"/>
+            <a:off x="2743200" y="2286000"/>
+            <a:ext cx="1188720" cy="228600"/>
           </a:xfrm>
           <a:prstGeom prst="rect">
             <a:avLst/>
           </a:prstGeom>
           <a:noFill/>
-          <a:ln>
-            <a:noFill/>
+        </p:spPr>
+        <p:txBody>
+          <a:bodyPr wrap="square">
+            <a:spAutoFit/>
+          </a:bodyPr>
+          <a:lstStyle/>
+          <a:p>
+            <a:pPr algn="l"/>
+            <a:r>
+              <a:rPr sz="800" i="1">
+                <a:solidFill>
+                  <a:srgbClr val="595959"/>
+                </a:solidFill>
+              </a:rPr>
+              <a:t>REST + JWT</a:t>
+            </a:r>
+          </a:p>
+        </p:txBody>
+      </p:sp>
+      <p:cxnSp>
+        <p:nvCxnSpPr>
+          <p:cNvPr id="12" name="Connector 11"/>
+          <p:cNvCxnSpPr/>
+          <p:nvPr/>
+        </p:nvCxnSpPr>
+        <p:spPr>
+          <a:xfrm>
+            <a:off x="5733288" y="2578608"/>
+            <a:ext cx="521208" cy="0"/>
+          </a:xfrm>
+          <a:prstGeom prst="line">
+            <a:avLst/>
+          </a:prstGeom>
+          <a:ln w="15875">
+            <a:solidFill>
+              <a:srgbClr val="8C8C8C"/>
+            </a:solidFill>
+            <a:tailEnd type="triangle" w="med" len="med"/>
           </a:ln>
         </p:spPr>
-        <p:txBody>
-          <a:bodyPr wrap="square" lIns="73152" tIns="73152" rIns="73152" bIns="73152" anchor="t">
-            <a:noAutofit/>
-          </a:bodyPr>
-          <a:lstStyle/>
-          <a:p>
-            <a:pPr marL="0" indent="0" algn="l">
-              <a:lnSpc>
-                <a:spcPct val="100000"/>
-              </a:lnSpc>
-              <a:spcBef>
-                <a:spcPts val="0"/>
-              </a:spcBef>
-              <a:buNone/>
-            </a:pPr>
-            <a:r>
-              <a:rPr lang="en-US" sz="1600" b="1" dirty="0">
-                <a:solidFill>
-                  <a:srgbClr val="262626"/>
-                </a:solidFill>
-              </a:rPr>
-              <a:t>Objectives</a:t>
-            </a:r>
-          </a:p>
-        </p:txBody>
-      </p:sp>
+        <p:style>
+          <a:lnRef idx="2">
+            <a:schemeClr val="accent1"/>
+          </a:lnRef>
+          <a:fillRef idx="0">
+            <a:schemeClr val="accent1"/>
+          </a:fillRef>
+          <a:effectRef idx="1">
+            <a:schemeClr val="accent1"/>
+          </a:effectRef>
+          <a:fontRef idx="minor">
+            <a:schemeClr val="tx1"/>
+          </a:fontRef>
+        </p:style>
+      </p:cxnSp>
       <p:sp>
         <p:nvSpPr>
-          <p:cNvPr id="14" name="Text 14"/>
+          <p:cNvPr id="13" name="TextBox 12"/>
           <p:cNvSpPr txBox="1"/>
           <p:nvPr/>
         </p:nvSpPr>
         <p:spPr>
           <a:xfrm>
-            <a:off x="548640" y="3794760"/>
-            <a:ext cx="8046720" cy="2468880"/>
+            <a:off x="5577840" y="2286000"/>
+            <a:ext cx="1188720" cy="228600"/>
           </a:xfrm>
           <a:prstGeom prst="rect">
             <a:avLst/>
           </a:prstGeom>
           <a:noFill/>
-          <a:ln>
-            <a:noFill/>
+        </p:spPr>
+        <p:txBody>
+          <a:bodyPr wrap="square">
+            <a:spAutoFit/>
+          </a:bodyPr>
+          <a:lstStyle/>
+          <a:p>
+            <a:pPr algn="l"/>
+            <a:r>
+              <a:rPr sz="800" i="1">
+                <a:solidFill>
+                  <a:srgbClr val="595959"/>
+                </a:solidFill>
+              </a:rPr>
+              <a:t>audio, text</a:t>
+            </a:r>
+          </a:p>
+        </p:txBody>
+      </p:sp>
+      <p:cxnSp>
+        <p:nvCxnSpPr>
+          <p:cNvPr id="14" name="Connector 13"/>
+          <p:cNvCxnSpPr/>
+          <p:nvPr/>
+        </p:nvCxnSpPr>
+        <p:spPr>
+          <a:xfrm>
+            <a:off x="1719072" y="3017520"/>
+            <a:ext cx="0" cy="685800"/>
+          </a:xfrm>
+          <a:prstGeom prst="line">
+            <a:avLst/>
+          </a:prstGeom>
+          <a:ln w="15875">
+            <a:solidFill>
+              <a:srgbClr val="8C8C8C"/>
+            </a:solidFill>
+            <a:tailEnd type="triangle" w="med" len="med"/>
           </a:ln>
         </p:spPr>
+        <p:style>
+          <a:lnRef idx="2">
+            <a:schemeClr val="accent1"/>
+          </a:lnRef>
+          <a:fillRef idx="0">
+            <a:schemeClr val="accent1"/>
+          </a:fillRef>
+          <a:effectRef idx="1">
+            <a:schemeClr val="accent1"/>
+          </a:effectRef>
+          <a:fontRef idx="minor">
+            <a:schemeClr val="tx1"/>
+          </a:fontRef>
+        </p:style>
+      </p:cxnSp>
+      <p:sp>
+        <p:nvSpPr>
+          <p:cNvPr id="15" name="TextBox 14"/>
+          <p:cNvSpPr txBox="1"/>
+          <p:nvPr/>
+        </p:nvSpPr>
+        <p:spPr>
+          <a:xfrm>
+            <a:off x="1783080" y="3246120"/>
+            <a:ext cx="1188720" cy="228600"/>
+          </a:xfrm>
+          <a:prstGeom prst="rect">
+            <a:avLst/>
+          </a:prstGeom>
+          <a:noFill/>
+        </p:spPr>
         <p:txBody>
-          <a:bodyPr wrap="square" lIns="73152" tIns="73152" rIns="73152" bIns="73152" anchor="t">
-            <a:noAutofit/>
+          <a:bodyPr wrap="square">
+            <a:spAutoFit/>
           </a:bodyPr>
           <a:lstStyle/>
           <a:p>
-            <a:pPr marL="292608" indent="-292608" algn="l">
-              <a:lnSpc>
-                <a:spcPct val="100000"/>
-              </a:lnSpc>
-              <a:spcBef>
-                <a:spcPts val="0"/>
-              </a:spcBef>
-              <a:buFont typeface="+mj-lt"/>
-              <a:buAutoNum type="arabicPeriod"/>
-            </a:pPr>
-            <a:r>
-              <a:rPr lang="en-US" sz="1400" dirty="0">
+            <a:pPr algn="l"/>
+            <a:r>
+              <a:rPr sz="800" i="1">
                 <a:solidFill>
                   <a:srgbClr val="595959"/>
                 </a:solidFill>
               </a:rPr>
-              <a:t>Collect recordings in the browser or by upload, with explicit speaker consent</a:t>
-            </a:r>
-          </a:p>
-          <a:p>
-            <a:pPr marL="292608" indent="-292608" algn="l">
-              <a:lnSpc>
-                <a:spcPct val="100000"/>
-              </a:lnSpc>
-              <a:spcBef>
-                <a:spcPts val="800"/>
-              </a:spcBef>
-              <a:buFont typeface="+mj-lt"/>
-              <a:buAutoNum type="arabicPeriod"/>
-            </a:pPr>
-            <a:r>
-              <a:rPr lang="en-US" sz="1400" dirty="0">
+              <a:t>signed upload</a:t>
+            </a:r>
+          </a:p>
+        </p:txBody>
+      </p:sp>
+      <p:cxnSp>
+        <p:nvCxnSpPr>
+          <p:cNvPr id="16" name="Connector 15"/>
+          <p:cNvCxnSpPr/>
+          <p:nvPr/>
+        </p:nvCxnSpPr>
+        <p:spPr>
+          <a:xfrm>
+            <a:off x="4572000" y="3017520"/>
+            <a:ext cx="0" cy="685800"/>
+          </a:xfrm>
+          <a:prstGeom prst="line">
+            <a:avLst/>
+          </a:prstGeom>
+          <a:ln w="15875">
+            <a:solidFill>
+              <a:srgbClr val="8C8C8C"/>
+            </a:solidFill>
+            <a:tailEnd type="triangle" w="med" len="med"/>
+          </a:ln>
+        </p:spPr>
+        <p:style>
+          <a:lnRef idx="2">
+            <a:schemeClr val="accent1"/>
+          </a:lnRef>
+          <a:fillRef idx="0">
+            <a:schemeClr val="accent1"/>
+          </a:fillRef>
+          <a:effectRef idx="1">
+            <a:schemeClr val="accent1"/>
+          </a:effectRef>
+          <a:fontRef idx="minor">
+            <a:schemeClr val="tx1"/>
+          </a:fontRef>
+        </p:style>
+      </p:cxnSp>
+      <p:sp>
+        <p:nvSpPr>
+          <p:cNvPr id="17" name="TextBox 16"/>
+          <p:cNvSpPr txBox="1"/>
+          <p:nvPr/>
+        </p:nvSpPr>
+        <p:spPr>
+          <a:xfrm>
+            <a:off x="4636008" y="3246120"/>
+            <a:ext cx="1188720" cy="228600"/>
+          </a:xfrm>
+          <a:prstGeom prst="rect">
+            <a:avLst/>
+          </a:prstGeom>
+          <a:noFill/>
+        </p:spPr>
+        <p:txBody>
+          <a:bodyPr wrap="square">
+            <a:spAutoFit/>
+          </a:bodyPr>
+          <a:lstStyle/>
+          <a:p>
+            <a:pPr algn="l"/>
+            <a:r>
+              <a:rPr sz="800" i="1">
                 <a:solidFill>
                   <a:srgbClr val="595959"/>
                 </a:solidFill>
               </a:rPr>
-              <a:t>Pre-process audio and generate timestamped transcripts automatically</a:t>
-            </a:r>
-          </a:p>
-          <a:p>
-            <a:pPr marL="292608" indent="-292608" algn="l">
-              <a:lnSpc>
-                <a:spcPct val="100000"/>
-              </a:lnSpc>
-              <a:spcBef>
-                <a:spcPts val="800"/>
-              </a:spcBef>
-              <a:buFont typeface="+mj-lt"/>
-              <a:buAutoNum type="arabicPeriod"/>
-            </a:pPr>
-            <a:r>
-              <a:rPr lang="en-US" sz="1400" dirty="0">
+              <a:t>SQL</a:t>
+            </a:r>
+          </a:p>
+        </p:txBody>
+      </p:sp>
+      <p:cxnSp>
+        <p:nvCxnSpPr>
+          <p:cNvPr id="18" name="Connector 17"/>
+          <p:cNvCxnSpPr/>
+          <p:nvPr/>
+        </p:nvCxnSpPr>
+        <p:spPr>
+          <a:xfrm>
+            <a:off x="5733288" y="2834640"/>
+            <a:ext cx="521208" cy="1097280"/>
+          </a:xfrm>
+          <a:prstGeom prst="line">
+            <a:avLst/>
+          </a:prstGeom>
+          <a:ln w="15875">
+            <a:solidFill>
+              <a:srgbClr val="8C8C8C"/>
+            </a:solidFill>
+            <a:tailEnd type="triangle" w="med" len="med"/>
+          </a:ln>
+        </p:spPr>
+        <p:style>
+          <a:lnRef idx="2">
+            <a:schemeClr val="accent1"/>
+          </a:lnRef>
+          <a:fillRef idx="0">
+            <a:schemeClr val="accent1"/>
+          </a:fillRef>
+          <a:effectRef idx="1">
+            <a:schemeClr val="accent1"/>
+          </a:effectRef>
+          <a:fontRef idx="minor">
+            <a:schemeClr val="tx1"/>
+          </a:fontRef>
+        </p:style>
+      </p:cxnSp>
+      <p:sp>
+        <p:nvSpPr>
+          <p:cNvPr id="19" name="Rounded Rectangle 18"/>
+          <p:cNvSpPr/>
+          <p:nvPr/>
+        </p:nvSpPr>
+        <p:spPr>
+          <a:xfrm>
+            <a:off x="548640" y="5074920"/>
+            <a:ext cx="1133856" cy="658368"/>
+          </a:xfrm>
+          <a:prstGeom prst="roundRect">
+            <a:avLst/>
+          </a:prstGeom>
+          <a:solidFill>
+            <a:srgbClr val="F2F2F2"/>
+          </a:solidFill>
+          <a:ln w="9525">
+            <a:solidFill>
+              <a:srgbClr val="8C8C8C"/>
+            </a:solidFill>
+          </a:ln>
+          <a:effectLst/>
+        </p:spPr>
+        <p:style>
+          <a:lnRef idx="1">
+            <a:schemeClr val="accent1"/>
+          </a:lnRef>
+          <a:fillRef idx="3">
+            <a:schemeClr val="accent1"/>
+          </a:fillRef>
+          <a:effectRef idx="2">
+            <a:schemeClr val="accent1"/>
+          </a:effectRef>
+          <a:fontRef idx="minor">
+            <a:schemeClr val="lt1"/>
+          </a:fontRef>
+        </p:style>
+        <p:txBody>
+          <a:bodyPr rtlCol="0" anchor="ctr" wrap="square"/>
+          <a:lstStyle/>
+          <a:p>
+            <a:pPr algn="ctr"/>
+            <a:r>
+              <a:rPr sz="1000">
+                <a:solidFill>
+                  <a:srgbClr val="262626"/>
+                </a:solidFill>
+              </a:rPr>
+              <a:t>1. Record &amp;
+consent</a:t>
+            </a:r>
+          </a:p>
+        </p:txBody>
+      </p:sp>
+      <p:cxnSp>
+        <p:nvCxnSpPr>
+          <p:cNvPr id="20" name="Connector 19"/>
+          <p:cNvCxnSpPr/>
+          <p:nvPr/>
+        </p:nvCxnSpPr>
+        <p:spPr>
+          <a:xfrm>
+            <a:off x="1682495" y="5404104"/>
+            <a:ext cx="219457" cy="0"/>
+          </a:xfrm>
+          <a:prstGeom prst="line">
+            <a:avLst/>
+          </a:prstGeom>
+          <a:ln w="15875">
+            <a:solidFill>
+              <a:srgbClr val="8C8C8C"/>
+            </a:solidFill>
+            <a:tailEnd type="triangle" w="med" len="med"/>
+          </a:ln>
+        </p:spPr>
+        <p:style>
+          <a:lnRef idx="2">
+            <a:schemeClr val="accent1"/>
+          </a:lnRef>
+          <a:fillRef idx="0">
+            <a:schemeClr val="accent1"/>
+          </a:fillRef>
+          <a:effectRef idx="1">
+            <a:schemeClr val="accent1"/>
+          </a:effectRef>
+          <a:fontRef idx="minor">
+            <a:schemeClr val="tx1"/>
+          </a:fontRef>
+        </p:style>
+      </p:cxnSp>
+      <p:sp>
+        <p:nvSpPr>
+          <p:cNvPr id="21" name="Rounded Rectangle 20"/>
+          <p:cNvSpPr/>
+          <p:nvPr/>
+        </p:nvSpPr>
+        <p:spPr>
+          <a:xfrm>
+            <a:off x="1901952" y="5074920"/>
+            <a:ext cx="1133856" cy="658368"/>
+          </a:xfrm>
+          <a:prstGeom prst="roundRect">
+            <a:avLst/>
+          </a:prstGeom>
+          <a:solidFill>
+            <a:srgbClr val="F2F2F2"/>
+          </a:solidFill>
+          <a:ln w="9525">
+            <a:solidFill>
+              <a:srgbClr val="8C8C8C"/>
+            </a:solidFill>
+          </a:ln>
+          <a:effectLst/>
+        </p:spPr>
+        <p:style>
+          <a:lnRef idx="1">
+            <a:schemeClr val="accent1"/>
+          </a:lnRef>
+          <a:fillRef idx="3">
+            <a:schemeClr val="accent1"/>
+          </a:fillRef>
+          <a:effectRef idx="2">
+            <a:schemeClr val="accent1"/>
+          </a:effectRef>
+          <a:fontRef idx="minor">
+            <a:schemeClr val="lt1"/>
+          </a:fontRef>
+        </p:style>
+        <p:txBody>
+          <a:bodyPr rtlCol="0" anchor="ctr" wrap="square"/>
+          <a:lstStyle/>
+          <a:p>
+            <a:pPr algn="ctr"/>
+            <a:r>
+              <a:rPr sz="1000">
+                <a:solidFill>
+                  <a:srgbClr val="262626"/>
+                </a:solidFill>
+              </a:rPr>
+              <a:t>2. Pre-process</a:t>
+            </a:r>
+          </a:p>
+        </p:txBody>
+      </p:sp>
+      <p:cxnSp>
+        <p:nvCxnSpPr>
+          <p:cNvPr id="22" name="Connector 21"/>
+          <p:cNvCxnSpPr/>
+          <p:nvPr/>
+        </p:nvCxnSpPr>
+        <p:spPr>
+          <a:xfrm>
+            <a:off x="3035808" y="5404104"/>
+            <a:ext cx="219456" cy="0"/>
+          </a:xfrm>
+          <a:prstGeom prst="line">
+            <a:avLst/>
+          </a:prstGeom>
+          <a:ln w="15875">
+            <a:solidFill>
+              <a:srgbClr val="8C8C8C"/>
+            </a:solidFill>
+            <a:tailEnd type="triangle" w="med" len="med"/>
+          </a:ln>
+        </p:spPr>
+        <p:style>
+          <a:lnRef idx="2">
+            <a:schemeClr val="accent1"/>
+          </a:lnRef>
+          <a:fillRef idx="0">
+            <a:schemeClr val="accent1"/>
+          </a:fillRef>
+          <a:effectRef idx="1">
+            <a:schemeClr val="accent1"/>
+          </a:effectRef>
+          <a:fontRef idx="minor">
+            <a:schemeClr val="tx1"/>
+          </a:fontRef>
+        </p:style>
+      </p:cxnSp>
+      <p:sp>
+        <p:nvSpPr>
+          <p:cNvPr id="23" name="Rounded Rectangle 22"/>
+          <p:cNvSpPr/>
+          <p:nvPr/>
+        </p:nvSpPr>
+        <p:spPr>
+          <a:xfrm>
+            <a:off x="3255264" y="5074920"/>
+            <a:ext cx="1133856" cy="658368"/>
+          </a:xfrm>
+          <a:prstGeom prst="roundRect">
+            <a:avLst/>
+          </a:prstGeom>
+          <a:solidFill>
+            <a:srgbClr val="F2F2F2"/>
+          </a:solidFill>
+          <a:ln w="9525">
+            <a:solidFill>
+              <a:srgbClr val="8C8C8C"/>
+            </a:solidFill>
+          </a:ln>
+          <a:effectLst/>
+        </p:spPr>
+        <p:style>
+          <a:lnRef idx="1">
+            <a:schemeClr val="accent1"/>
+          </a:lnRef>
+          <a:fillRef idx="3">
+            <a:schemeClr val="accent1"/>
+          </a:fillRef>
+          <a:effectRef idx="2">
+            <a:schemeClr val="accent1"/>
+          </a:effectRef>
+          <a:fontRef idx="minor">
+            <a:schemeClr val="lt1"/>
+          </a:fontRef>
+        </p:style>
+        <p:txBody>
+          <a:bodyPr rtlCol="0" anchor="ctr" wrap="square"/>
+          <a:lstStyle/>
+          <a:p>
+            <a:pPr algn="ctr"/>
+            <a:r>
+              <a:rPr sz="1000">
+                <a:solidFill>
+                  <a:srgbClr val="262626"/>
+                </a:solidFill>
+              </a:rPr>
+              <a:t>3. Transcribe
+(Vani)</a:t>
+            </a:r>
+          </a:p>
+        </p:txBody>
+      </p:sp>
+      <p:cxnSp>
+        <p:nvCxnSpPr>
+          <p:cNvPr id="24" name="Connector 23"/>
+          <p:cNvCxnSpPr/>
+          <p:nvPr/>
+        </p:nvCxnSpPr>
+        <p:spPr>
+          <a:xfrm>
+            <a:off x="4389120" y="5404104"/>
+            <a:ext cx="219456" cy="0"/>
+          </a:xfrm>
+          <a:prstGeom prst="line">
+            <a:avLst/>
+          </a:prstGeom>
+          <a:ln w="15875">
+            <a:solidFill>
+              <a:srgbClr val="8C8C8C"/>
+            </a:solidFill>
+            <a:tailEnd type="triangle" w="med" len="med"/>
+          </a:ln>
+        </p:spPr>
+        <p:style>
+          <a:lnRef idx="2">
+            <a:schemeClr val="accent1"/>
+          </a:lnRef>
+          <a:fillRef idx="0">
+            <a:schemeClr val="accent1"/>
+          </a:fillRef>
+          <a:effectRef idx="1">
+            <a:schemeClr val="accent1"/>
+          </a:effectRef>
+          <a:fontRef idx="minor">
+            <a:schemeClr val="tx1"/>
+          </a:fontRef>
+        </p:style>
+      </p:cxnSp>
+      <p:sp>
+        <p:nvSpPr>
+          <p:cNvPr id="25" name="Rounded Rectangle 24"/>
+          <p:cNvSpPr/>
+          <p:nvPr/>
+        </p:nvSpPr>
+        <p:spPr>
+          <a:xfrm>
+            <a:off x="4608576" y="5074920"/>
+            <a:ext cx="1133856" cy="658368"/>
+          </a:xfrm>
+          <a:prstGeom prst="roundRect">
+            <a:avLst/>
+          </a:prstGeom>
+          <a:solidFill>
+            <a:srgbClr val="F2F2F2"/>
+          </a:solidFill>
+          <a:ln w="9525">
+            <a:solidFill>
+              <a:srgbClr val="8C8C8C"/>
+            </a:solidFill>
+          </a:ln>
+          <a:effectLst/>
+        </p:spPr>
+        <p:style>
+          <a:lnRef idx="1">
+            <a:schemeClr val="accent1"/>
+          </a:lnRef>
+          <a:fillRef idx="3">
+            <a:schemeClr val="accent1"/>
+          </a:fillRef>
+          <a:effectRef idx="2">
+            <a:schemeClr val="accent1"/>
+          </a:effectRef>
+          <a:fontRef idx="minor">
+            <a:schemeClr val="lt1"/>
+          </a:fontRef>
+        </p:style>
+        <p:txBody>
+          <a:bodyPr rtlCol="0" anchor="ctr" wrap="square"/>
+          <a:lstStyle/>
+          <a:p>
+            <a:pPr algn="ctr"/>
+            <a:r>
+              <a:rPr sz="1000">
+                <a:solidFill>
+                  <a:srgbClr val="262626"/>
+                </a:solidFill>
+              </a:rPr>
+              <a:t>4. Correct</a:t>
+            </a:r>
+          </a:p>
+        </p:txBody>
+      </p:sp>
+      <p:cxnSp>
+        <p:nvCxnSpPr>
+          <p:cNvPr id="26" name="Connector 25"/>
+          <p:cNvCxnSpPr/>
+          <p:nvPr/>
+        </p:nvCxnSpPr>
+        <p:spPr>
+          <a:xfrm>
+            <a:off x="5742432" y="5404104"/>
+            <a:ext cx="219456" cy="0"/>
+          </a:xfrm>
+          <a:prstGeom prst="line">
+            <a:avLst/>
+          </a:prstGeom>
+          <a:ln w="15875">
+            <a:solidFill>
+              <a:srgbClr val="8C8C8C"/>
+            </a:solidFill>
+            <a:tailEnd type="triangle" w="med" len="med"/>
+          </a:ln>
+        </p:spPr>
+        <p:style>
+          <a:lnRef idx="2">
+            <a:schemeClr val="accent1"/>
+          </a:lnRef>
+          <a:fillRef idx="0">
+            <a:schemeClr val="accent1"/>
+          </a:fillRef>
+          <a:effectRef idx="1">
+            <a:schemeClr val="accent1"/>
+          </a:effectRef>
+          <a:fontRef idx="minor">
+            <a:schemeClr val="tx1"/>
+          </a:fontRef>
+        </p:style>
+      </p:cxnSp>
+      <p:sp>
+        <p:nvSpPr>
+          <p:cNvPr id="27" name="Rounded Rectangle 26"/>
+          <p:cNvSpPr/>
+          <p:nvPr/>
+        </p:nvSpPr>
+        <p:spPr>
+          <a:xfrm>
+            <a:off x="5961888" y="5074920"/>
+            <a:ext cx="1133856" cy="658368"/>
+          </a:xfrm>
+          <a:prstGeom prst="roundRect">
+            <a:avLst/>
+          </a:prstGeom>
+          <a:solidFill>
+            <a:srgbClr val="F2F2F2"/>
+          </a:solidFill>
+          <a:ln w="9525">
+            <a:solidFill>
+              <a:srgbClr val="8C8C8C"/>
+            </a:solidFill>
+          </a:ln>
+          <a:effectLst/>
+        </p:spPr>
+        <p:style>
+          <a:lnRef idx="1">
+            <a:schemeClr val="accent1"/>
+          </a:lnRef>
+          <a:fillRef idx="3">
+            <a:schemeClr val="accent1"/>
+          </a:fillRef>
+          <a:effectRef idx="2">
+            <a:schemeClr val="accent1"/>
+          </a:effectRef>
+          <a:fontRef idx="minor">
+            <a:schemeClr val="lt1"/>
+          </a:fontRef>
+        </p:style>
+        <p:txBody>
+          <a:bodyPr rtlCol="0" anchor="ctr" wrap="square"/>
+          <a:lstStyle/>
+          <a:p>
+            <a:pPr algn="ctr"/>
+            <a:r>
+              <a:rPr sz="1000">
+                <a:solidFill>
+                  <a:srgbClr val="262626"/>
+                </a:solidFill>
+              </a:rPr>
+              <a:t>5. Verify</a:t>
+            </a:r>
+          </a:p>
+        </p:txBody>
+      </p:sp>
+      <p:cxnSp>
+        <p:nvCxnSpPr>
+          <p:cNvPr id="28" name="Connector 27"/>
+          <p:cNvCxnSpPr/>
+          <p:nvPr/>
+        </p:nvCxnSpPr>
+        <p:spPr>
+          <a:xfrm>
+            <a:off x="7095744" y="5404104"/>
+            <a:ext cx="219456" cy="0"/>
+          </a:xfrm>
+          <a:prstGeom prst="line">
+            <a:avLst/>
+          </a:prstGeom>
+          <a:ln w="15875">
+            <a:solidFill>
+              <a:srgbClr val="8C8C8C"/>
+            </a:solidFill>
+            <a:tailEnd type="triangle" w="med" len="med"/>
+          </a:ln>
+        </p:spPr>
+        <p:style>
+          <a:lnRef idx="2">
+            <a:schemeClr val="accent1"/>
+          </a:lnRef>
+          <a:fillRef idx="0">
+            <a:schemeClr val="accent1"/>
+          </a:fillRef>
+          <a:effectRef idx="1">
+            <a:schemeClr val="accent1"/>
+          </a:effectRef>
+          <a:fontRef idx="minor">
+            <a:schemeClr val="tx1"/>
+          </a:fontRef>
+        </p:style>
+      </p:cxnSp>
+      <p:sp>
+        <p:nvSpPr>
+          <p:cNvPr id="29" name="Rounded Rectangle 28"/>
+          <p:cNvSpPr/>
+          <p:nvPr/>
+        </p:nvSpPr>
+        <p:spPr>
+          <a:xfrm>
+            <a:off x="7315200" y="5074920"/>
+            <a:ext cx="1133856" cy="658368"/>
+          </a:xfrm>
+          <a:prstGeom prst="roundRect">
+            <a:avLst/>
+          </a:prstGeom>
+          <a:solidFill>
+            <a:srgbClr val="F2F2F2"/>
+          </a:solidFill>
+          <a:ln w="9525">
+            <a:solidFill>
+              <a:srgbClr val="8C8C8C"/>
+            </a:solidFill>
+          </a:ln>
+          <a:effectLst/>
+        </p:spPr>
+        <p:style>
+          <a:lnRef idx="1">
+            <a:schemeClr val="accent1"/>
+          </a:lnRef>
+          <a:fillRef idx="3">
+            <a:schemeClr val="accent1"/>
+          </a:fillRef>
+          <a:effectRef idx="2">
+            <a:schemeClr val="accent1"/>
+          </a:effectRef>
+          <a:fontRef idx="minor">
+            <a:schemeClr val="lt1"/>
+          </a:fontRef>
+        </p:style>
+        <p:txBody>
+          <a:bodyPr rtlCol="0" anchor="ctr" wrap="square"/>
+          <a:lstStyle/>
+          <a:p>
+            <a:pPr algn="ctr"/>
+            <a:r>
+              <a:rPr sz="1000">
+                <a:solidFill>
+                  <a:srgbClr val="262626"/>
+                </a:solidFill>
+              </a:rPr>
+              <a:t>6. Search &amp;
+export</a:t>
+            </a:r>
+          </a:p>
+        </p:txBody>
+      </p:sp>
+      <p:sp>
+        <p:nvSpPr>
+          <p:cNvPr id="30" name="TextBox 29"/>
+          <p:cNvSpPr txBox="1"/>
+          <p:nvPr/>
+        </p:nvSpPr>
+        <p:spPr>
+          <a:xfrm>
+            <a:off x="548640" y="4709160"/>
+            <a:ext cx="5486400" cy="320040"/>
+          </a:xfrm>
+          <a:prstGeom prst="rect">
+            <a:avLst/>
+          </a:prstGeom>
+          <a:noFill/>
+        </p:spPr>
+        <p:txBody>
+          <a:bodyPr wrap="square">
+            <a:spAutoFit/>
+          </a:bodyPr>
+          <a:lstStyle/>
+          <a:p>
+            <a:pPr algn="l"/>
+            <a:r>
+              <a:rPr sz="1200" i="1">
                 <a:solidFill>
                   <a:srgbClr val="595959"/>
                 </a:solidFill>
               </a:rPr>
-              <a:t>Let native speakers correct, and verifiers approve, every passage</a:t>
-            </a:r>
-          </a:p>
-          <a:p>
-            <a:pPr marL="292608" indent="-292608" algn="l">
-              <a:lnSpc>
-                <a:spcPct val="100000"/>
-              </a:lnSpc>
-              <a:spcBef>
-                <a:spcPts val="800"/>
-              </a:spcBef>
-              <a:buFont typeface="+mj-lt"/>
-              <a:buAutoNum type="arabicPeriod"/>
-            </a:pPr>
-            <a:r>
-              <a:rPr lang="en-US" sz="1400" dirty="0">
-                <a:solidFill>
-                  <a:srgbClr val="595959"/>
-                </a:solidFill>
-              </a:rPr>
-              <a:t>Make the archive searchable by words and by meaning, with passage playback</a:t>
-            </a:r>
-          </a:p>
-          <a:p>
-            <a:pPr marL="292608" indent="-292608" algn="l">
-              <a:lnSpc>
-                <a:spcPct val="100000"/>
-              </a:lnSpc>
-              <a:spcBef>
-                <a:spcPts val="800"/>
-              </a:spcBef>
-              <a:buFont typeface="+mj-lt"/>
-              <a:buAutoNum type="arabicPeriod"/>
-            </a:pPr>
-            <a:r>
-              <a:rPr lang="en-US" sz="1400" dirty="0">
-                <a:solidFill>
-                  <a:srgbClr val="595959"/>
-                </a:solidFill>
-              </a:rPr>
-              <a:t>Export corrected, consented data for training speech models</a:t>
+              <a:t>Methodology: from a voice to verified, searchable text</a:t>
             </a:r>
           </a:p>
         </p:txBody>
@@ -8946,14 +7756,20 @@
       </p:grpSpPr>
       <p:sp>
         <p:nvSpPr>
-          <p:cNvPr id="11" name="Title 11"/>
+          <p:cNvPr id="3" name="Google Shape;68;g78e6671419f8a2a0_22">
+            <a:extLst>
+              <a:ext uri="{FF2B5EF4-FFF2-40B4-BE49-F238E27FC236}">
+                <a16:creationId xmlns:a16="http://schemas.microsoft.com/office/drawing/2014/main" id="{BA677A83-D006-E1F4-CCF8-948027C21AB2}"/>
+              </a:ext>
+            </a:extLst>
+          </p:cNvPr>
           <p:cNvSpPr txBox="1"/>
           <p:nvPr/>
         </p:nvSpPr>
         <p:spPr>
           <a:xfrm>
             <a:off x="628650" y="1131097"/>
-            <a:ext cx="7886700" cy="760000"/>
+            <a:ext cx="7886700" cy="994275"/>
           </a:xfrm>
           <a:prstGeom prst="rect">
             <a:avLst/>
@@ -8964,12 +7780,12 @@
           </a:ln>
         </p:spPr>
         <p:txBody>
-          <a:bodyPr wrap="square" lIns="68569" tIns="34275" rIns="68569" bIns="34275" anchor="ctr">
+          <a:bodyPr spcFirstLastPara="1" wrap="square" lIns="68569" tIns="34275" rIns="68569" bIns="34275" anchor="ctr" anchorCtr="0">
             <a:normAutofit/>
           </a:bodyPr>
           <a:lstStyle/>
           <a:p>
-            <a:pPr algn="ctr">
+            <a:pPr algn="ctr" defTabSz="685800">
               <a:lnSpc>
                 <a:spcPct val="90000"/>
               </a:lnSpc>
@@ -8979,801 +7795,31 @@
                 <a:latin typeface="Times New Roman" panose="02020603050405020304" pitchFamily="18" charset="0"/>
                 <a:cs typeface="Times New Roman" panose="02020603050405020304" pitchFamily="18" charset="0"/>
               </a:rPr>
-              <a:t>Proposed Model - System Architecture</a:t>
-            </a:r>
+              <a:t>Implementation Details (Algorithm)</a:t>
+            </a:r>
+            <a:endParaRPr sz="2400" dirty="0">
+              <a:latin typeface="Times New Roman" panose="02020603050405020304" pitchFamily="18" charset="0"/>
+              <a:cs typeface="Times New Roman" panose="02020603050405020304" pitchFamily="18" charset="0"/>
+            </a:endParaRPr>
           </a:p>
         </p:txBody>
       </p:sp>
       <p:sp>
         <p:nvSpPr>
-          <p:cNvPr id="12" name="Text 12"/>
+          <p:cNvPr id="5" name="Google Shape;69;g78e6671419f8a2a0_22">
+            <a:extLst>
+              <a:ext uri="{FF2B5EF4-FFF2-40B4-BE49-F238E27FC236}">
+                <a16:creationId xmlns:a16="http://schemas.microsoft.com/office/drawing/2014/main" id="{13186C97-59A2-67F5-3892-203B43C861C9}"/>
+              </a:ext>
+            </a:extLst>
+          </p:cNvPr>
           <p:cNvSpPr txBox="1"/>
           <p:nvPr/>
         </p:nvSpPr>
         <p:spPr>
           <a:xfrm>
-            <a:off x="457200" y="2103120"/>
-            <a:ext cx="2377440" cy="1371600"/>
-          </a:xfrm>
-          <a:prstGeom prst="roundRect">
-            <a:avLst>
-              <a:gd name="adj" fmla="val 8000"/>
-            </a:avLst>
-          </a:prstGeom>
-          <a:solidFill>
-            <a:srgbClr val="F2F2F2"/>
-          </a:solidFill>
-          <a:ln w="12700">
-            <a:solidFill>
-              <a:srgbClr val="7F7F7F"/>
-            </a:solidFill>
-          </a:ln>
-        </p:spPr>
-        <p:txBody>
-          <a:bodyPr wrap="square" lIns="54864" tIns="54864" rIns="54864" bIns="54864" anchor="ctr">
-            <a:noAutofit/>
-          </a:bodyPr>
-          <a:lstStyle/>
-          <a:p>
-            <a:pPr marL="0" indent="0" algn="ctr">
-              <a:lnSpc>
-                <a:spcPct val="100000"/>
-              </a:lnSpc>
-              <a:spcBef>
-                <a:spcPts val="0"/>
-              </a:spcBef>
-              <a:buNone/>
-            </a:pPr>
-            <a:r>
-              <a:rPr lang="en-US" sz="1200" b="1" dirty="0">
-                <a:solidFill>
-                  <a:srgbClr val="262626"/>
-                </a:solidFill>
-              </a:rPr>
-              <a:t>Web client</a:t>
-            </a:r>
-          </a:p>
-          <a:p>
-            <a:pPr marL="0" indent="0" algn="ctr">
-              <a:lnSpc>
-                <a:spcPct val="100000"/>
-              </a:lnSpc>
-              <a:spcBef>
-                <a:spcPts val="200"/>
-              </a:spcBef>
-              <a:buNone/>
-            </a:pPr>
-            <a:r>
-              <a:rPr lang="en-US" sz="1000" dirty="0">
-                <a:solidFill>
-                  <a:srgbClr val="595959"/>
-                </a:solidFill>
-              </a:rPr>
-              <a:t>React + TypeScript</a:t>
-            </a:r>
-          </a:p>
-          <a:p>
-            <a:pPr marL="0" indent="0" algn="ctr">
-              <a:lnSpc>
-                <a:spcPct val="100000"/>
-              </a:lnSpc>
-              <a:spcBef>
-                <a:spcPts val="200"/>
-              </a:spcBef>
-              <a:buNone/>
-            </a:pPr>
-            <a:r>
-              <a:rPr lang="en-US" sz="1000" dirty="0">
-                <a:solidFill>
-                  <a:srgbClr val="595959"/>
-                </a:solidFill>
-              </a:rPr>
-              <a:t>Vite, Tailwind CSS</a:t>
-            </a:r>
-          </a:p>
-          <a:p>
-            <a:pPr marL="0" indent="0" algn="ctr">
-              <a:lnSpc>
-                <a:spcPct val="100000"/>
-              </a:lnSpc>
-              <a:spcBef>
-                <a:spcPts val="200"/>
-              </a:spcBef>
-              <a:buNone/>
-            </a:pPr>
-            <a:r>
-              <a:rPr lang="en-US" sz="1000" dirty="0">
-                <a:solidFill>
-                  <a:srgbClr val="595959"/>
-                </a:solidFill>
-              </a:rPr>
-              <a:t>Hosted on Vercel</a:t>
-            </a:r>
-          </a:p>
-        </p:txBody>
-      </p:sp>
-      <p:sp>
-        <p:nvSpPr>
-          <p:cNvPr id="13" name="Text 13"/>
-          <p:cNvSpPr txBox="1"/>
-          <p:nvPr/>
-        </p:nvSpPr>
-        <p:spPr>
-          <a:xfrm>
-            <a:off x="3383280" y="2103120"/>
-            <a:ext cx="2377440" cy="1920240"/>
-          </a:xfrm>
-          <a:prstGeom prst="roundRect">
-            <a:avLst>
-              <a:gd name="adj" fmla="val 8000"/>
-            </a:avLst>
-          </a:prstGeom>
-          <a:solidFill>
-            <a:srgbClr val="FDF4E6"/>
-          </a:solidFill>
-          <a:ln w="12700">
-            <a:solidFill>
-              <a:srgbClr val="B45309"/>
-            </a:solidFill>
-          </a:ln>
-        </p:spPr>
-        <p:txBody>
-          <a:bodyPr wrap="square" lIns="54864" tIns="54864" rIns="54864" bIns="54864" anchor="ctr">
-            <a:noAutofit/>
-          </a:bodyPr>
-          <a:lstStyle/>
-          <a:p>
-            <a:pPr marL="0" indent="0" algn="ctr">
-              <a:lnSpc>
-                <a:spcPct val="100000"/>
-              </a:lnSpc>
-              <a:spcBef>
-                <a:spcPts val="0"/>
-              </a:spcBef>
-              <a:buNone/>
-            </a:pPr>
-            <a:r>
-              <a:rPr lang="en-US" sz="1200" b="1" dirty="0">
-                <a:solidFill>
-                  <a:srgbClr val="B45309"/>
-                </a:solidFill>
-              </a:rPr>
-              <a:t>REST API (FastAPI)</a:t>
-            </a:r>
-          </a:p>
-          <a:p>
-            <a:pPr marL="0" indent="0" algn="ctr">
-              <a:lnSpc>
-                <a:spcPct val="100000"/>
-              </a:lnSpc>
-              <a:spcBef>
-                <a:spcPts val="200"/>
-              </a:spcBef>
-              <a:buNone/>
-            </a:pPr>
-            <a:r>
-              <a:rPr lang="en-US" sz="1000" dirty="0">
-                <a:solidFill>
-                  <a:srgbClr val="595959"/>
-                </a:solidFill>
-              </a:rPr>
-              <a:t>Auth (JWT), recordings,</a:t>
-            </a:r>
-          </a:p>
-          <a:p>
-            <a:pPr marL="0" indent="0" algn="ctr">
-              <a:lnSpc>
-                <a:spcPct val="100000"/>
-              </a:lnSpc>
-              <a:spcBef>
-                <a:spcPts val="200"/>
-              </a:spcBef>
-              <a:buNone/>
-            </a:pPr>
-            <a:r>
-              <a:rPr lang="en-US" sz="1000" dirty="0">
-                <a:solidFill>
-                  <a:srgbClr val="595959"/>
-                </a:solidFill>
-              </a:rPr>
-              <a:t>segments, review, search,</a:t>
-            </a:r>
-          </a:p>
-          <a:p>
-            <a:pPr marL="0" indent="0" algn="ctr">
-              <a:lnSpc>
-                <a:spcPct val="100000"/>
-              </a:lnSpc>
-              <a:spcBef>
-                <a:spcPts val="200"/>
-              </a:spcBef>
-              <a:buNone/>
-            </a:pPr>
-            <a:r>
-              <a:rPr lang="en-US" sz="1000" dirty="0">
-                <a:solidFill>
-                  <a:srgbClr val="595959"/>
-                </a:solidFill>
-              </a:rPr>
-              <a:t>export, admin</a:t>
-            </a:r>
-          </a:p>
-          <a:p>
-            <a:pPr marL="0" indent="0" algn="ctr">
-              <a:lnSpc>
-                <a:spcPct val="100000"/>
-              </a:lnSpc>
-              <a:spcBef>
-                <a:spcPts val="200"/>
-              </a:spcBef>
-              <a:buNone/>
-            </a:pPr>
-            <a:r>
-              <a:rPr lang="en-US" sz="1000" dirty="0">
-                <a:solidFill>
-                  <a:srgbClr val="595959"/>
-                </a:solidFill>
-              </a:rPr>
-              <a:t>Audio pre-processing (ffmpeg)</a:t>
-            </a:r>
-          </a:p>
-          <a:p>
-            <a:pPr marL="0" indent="0" algn="ctr">
-              <a:lnSpc>
-                <a:spcPct val="100000"/>
-              </a:lnSpc>
-              <a:spcBef>
-                <a:spcPts val="200"/>
-              </a:spcBef>
-              <a:buNone/>
-            </a:pPr>
-            <a:r>
-              <a:rPr lang="en-US" sz="1000" dirty="0">
-                <a:solidFill>
-                  <a:srgbClr val="595959"/>
-                </a:solidFill>
-              </a:rPr>
-              <a:t>Hosted on Render (Docker)</a:t>
-            </a:r>
-          </a:p>
-        </p:txBody>
-      </p:sp>
-      <p:sp>
-        <p:nvSpPr>
-          <p:cNvPr id="14" name="Text 14"/>
-          <p:cNvSpPr txBox="1"/>
-          <p:nvPr/>
-        </p:nvSpPr>
-        <p:spPr>
-          <a:xfrm>
-            <a:off x="6309360" y="2103120"/>
-            <a:ext cx="2377440" cy="1920240"/>
-          </a:xfrm>
-          <a:prstGeom prst="roundRect">
-            <a:avLst>
-              <a:gd name="adj" fmla="val 8000"/>
-            </a:avLst>
-          </a:prstGeom>
-          <a:solidFill>
-            <a:srgbClr val="FCF0F5"/>
-          </a:solidFill>
-          <a:ln w="12700">
-            <a:solidFill>
-              <a:srgbClr val="A3326A"/>
-            </a:solidFill>
-          </a:ln>
-        </p:spPr>
-        <p:txBody>
-          <a:bodyPr wrap="square" lIns="54864" tIns="54864" rIns="54864" bIns="54864" anchor="ctr">
-            <a:noAutofit/>
-          </a:bodyPr>
-          <a:lstStyle/>
-          <a:p>
-            <a:pPr marL="0" indent="0" algn="ctr">
-              <a:lnSpc>
-                <a:spcPct val="100000"/>
-              </a:lnSpc>
-              <a:spcBef>
-                <a:spcPts val="0"/>
-              </a:spcBef>
-              <a:buNone/>
-            </a:pPr>
-            <a:r>
-              <a:rPr lang="en-US" sz="1200" b="1" dirty="0">
-                <a:solidFill>
-                  <a:srgbClr val="A3326A"/>
-                </a:solidFill>
-              </a:rPr>
-              <a:t>Hosted AI services</a:t>
-            </a:r>
-          </a:p>
-          <a:p>
-            <a:pPr marL="0" indent="0" algn="ctr">
-              <a:lnSpc>
-                <a:spcPct val="100000"/>
-              </a:lnSpc>
-              <a:spcBef>
-                <a:spcPts val="200"/>
-              </a:spcBef>
-              <a:buNone/>
-            </a:pPr>
-            <a:r>
-              <a:rPr lang="en-US" sz="1000" dirty="0">
-                <a:solidFill>
-                  <a:srgbClr val="595959"/>
-                </a:solidFill>
-              </a:rPr>
-              <a:t>Whisper large-v3 (speech-to-text)</a:t>
-            </a:r>
-          </a:p>
-          <a:p>
-            <a:pPr marL="0" indent="0" algn="ctr">
-              <a:lnSpc>
-                <a:spcPct val="100000"/>
-              </a:lnSpc>
-              <a:spcBef>
-                <a:spcPts val="200"/>
-              </a:spcBef>
-              <a:buNone/>
-            </a:pPr>
-            <a:r>
-              <a:rPr lang="en-US" sz="1000" dirty="0">
-                <a:solidFill>
-                  <a:srgbClr val="595959"/>
-                </a:solidFill>
-              </a:rPr>
-              <a:t>Llama 3.3 (translation)</a:t>
-            </a:r>
-          </a:p>
-          <a:p>
-            <a:pPr marL="0" indent="0" algn="ctr">
-              <a:lnSpc>
-                <a:spcPct val="100000"/>
-              </a:lnSpc>
-              <a:spcBef>
-                <a:spcPts val="200"/>
-              </a:spcBef>
-              <a:buNone/>
-            </a:pPr>
-            <a:r>
-              <a:rPr lang="en-US" sz="1000" dirty="0">
-                <a:solidFill>
-                  <a:srgbClr val="595959"/>
-                </a:solidFill>
-              </a:rPr>
-              <a:t>Multilingual MiniLM</a:t>
-            </a:r>
-          </a:p>
-          <a:p>
-            <a:pPr marL="0" indent="0" algn="ctr">
-              <a:lnSpc>
-                <a:spcPct val="100000"/>
-              </a:lnSpc>
-              <a:spcBef>
-                <a:spcPts val="200"/>
-              </a:spcBef>
-              <a:buNone/>
-            </a:pPr>
-            <a:r>
-              <a:rPr lang="en-US" sz="1000" dirty="0">
-                <a:solidFill>
-                  <a:srgbClr val="595959"/>
-                </a:solidFill>
-              </a:rPr>
-              <a:t>(embeddings)</a:t>
-            </a:r>
-          </a:p>
-        </p:txBody>
-      </p:sp>
-      <p:sp>
-        <p:nvSpPr>
-          <p:cNvPr id="15" name="Text 15"/>
-          <p:cNvSpPr txBox="1"/>
-          <p:nvPr/>
-        </p:nvSpPr>
-        <p:spPr>
-          <a:xfrm>
-            <a:off x="457200" y="4892040"/>
-            <a:ext cx="2377440" cy="1097280"/>
-          </a:xfrm>
-          <a:prstGeom prst="roundRect">
-            <a:avLst>
-              <a:gd name="adj" fmla="val 8000"/>
-            </a:avLst>
-          </a:prstGeom>
-          <a:solidFill>
-            <a:srgbClr val="F2F2F2"/>
-          </a:solidFill>
-          <a:ln w="12700">
-            <a:solidFill>
-              <a:srgbClr val="7F7F7F"/>
-            </a:solidFill>
-          </a:ln>
-        </p:spPr>
-        <p:txBody>
-          <a:bodyPr wrap="square" lIns="54864" tIns="54864" rIns="54864" bIns="54864" anchor="ctr">
-            <a:noAutofit/>
-          </a:bodyPr>
-          <a:lstStyle/>
-          <a:p>
-            <a:pPr marL="0" indent="0" algn="ctr">
-              <a:lnSpc>
-                <a:spcPct val="100000"/>
-              </a:lnSpc>
-              <a:spcBef>
-                <a:spcPts val="0"/>
-              </a:spcBef>
-              <a:buNone/>
-            </a:pPr>
-            <a:r>
-              <a:rPr lang="en-US" sz="1200" b="1" dirty="0">
-                <a:solidFill>
-                  <a:srgbClr val="262626"/>
-                </a:solidFill>
-              </a:rPr>
-              <a:t>Object storage</a:t>
-            </a:r>
-          </a:p>
-          <a:p>
-            <a:pPr marL="0" indent="0" algn="ctr">
-              <a:lnSpc>
-                <a:spcPct val="100000"/>
-              </a:lnSpc>
-              <a:spcBef>
-                <a:spcPts val="200"/>
-              </a:spcBef>
-              <a:buNone/>
-            </a:pPr>
-            <a:r>
-              <a:rPr lang="en-US" sz="1000" dirty="0">
-                <a:solidFill>
-                  <a:srgbClr val="595959"/>
-                </a:solidFill>
-              </a:rPr>
-              <a:t>Supabase Storage</a:t>
-            </a:r>
-          </a:p>
-          <a:p>
-            <a:pPr marL="0" indent="0" algn="ctr">
-              <a:lnSpc>
-                <a:spcPct val="100000"/>
-              </a:lnSpc>
-              <a:spcBef>
-                <a:spcPts val="200"/>
-              </a:spcBef>
-              <a:buNone/>
-            </a:pPr>
-            <a:r>
-              <a:rPr lang="en-US" sz="1000" dirty="0">
-                <a:solidFill>
-                  <a:srgbClr val="595959"/>
-                </a:solidFill>
-              </a:rPr>
-              <a:t>audio files</a:t>
-            </a:r>
-          </a:p>
-        </p:txBody>
-      </p:sp>
-      <p:sp>
-        <p:nvSpPr>
-          <p:cNvPr id="16" name="Text 16"/>
-          <p:cNvSpPr txBox="1"/>
-          <p:nvPr/>
-        </p:nvSpPr>
-        <p:spPr>
-          <a:xfrm>
-            <a:off x="3383280" y="4892040"/>
-            <a:ext cx="2377440" cy="1097280"/>
-          </a:xfrm>
-          <a:prstGeom prst="roundRect">
-            <a:avLst>
-              <a:gd name="adj" fmla="val 8000"/>
-            </a:avLst>
-          </a:prstGeom>
-          <a:solidFill>
-            <a:srgbClr val="F2F2F2"/>
-          </a:solidFill>
-          <a:ln w="12700">
-            <a:solidFill>
-              <a:srgbClr val="7F7F7F"/>
-            </a:solidFill>
-          </a:ln>
-        </p:spPr>
-        <p:txBody>
-          <a:bodyPr wrap="square" lIns="54864" tIns="54864" rIns="54864" bIns="54864" anchor="ctr">
-            <a:noAutofit/>
-          </a:bodyPr>
-          <a:lstStyle/>
-          <a:p>
-            <a:pPr marL="0" indent="0" algn="ctr">
-              <a:lnSpc>
-                <a:spcPct val="100000"/>
-              </a:lnSpc>
-              <a:spcBef>
-                <a:spcPts val="0"/>
-              </a:spcBef>
-              <a:buNone/>
-            </a:pPr>
-            <a:r>
-              <a:rPr lang="en-US" sz="1200" b="1" dirty="0">
-                <a:solidFill>
-                  <a:srgbClr val="262626"/>
-                </a:solidFill>
-              </a:rPr>
-              <a:t>Database</a:t>
-            </a:r>
-          </a:p>
-          <a:p>
-            <a:pPr marL="0" indent="0" algn="ctr">
-              <a:lnSpc>
-                <a:spcPct val="100000"/>
-              </a:lnSpc>
-              <a:spcBef>
-                <a:spcPts val="200"/>
-              </a:spcBef>
-              <a:buNone/>
-            </a:pPr>
-            <a:r>
-              <a:rPr lang="en-US" sz="1000" dirty="0">
-                <a:solidFill>
-                  <a:srgbClr val="595959"/>
-                </a:solidFill>
-              </a:rPr>
-              <a:t>PostgreSQL + pgvector</a:t>
-            </a:r>
-          </a:p>
-          <a:p>
-            <a:pPr marL="0" indent="0" algn="ctr">
-              <a:lnSpc>
-                <a:spcPct val="100000"/>
-              </a:lnSpc>
-              <a:spcBef>
-                <a:spcPts val="200"/>
-              </a:spcBef>
-              <a:buNone/>
-            </a:pPr>
-            <a:r>
-              <a:rPr lang="en-US" sz="1000" dirty="0">
-                <a:solidFill>
-                  <a:srgbClr val="595959"/>
-                </a:solidFill>
-              </a:rPr>
-              <a:t>(Supabase)</a:t>
-            </a:r>
-          </a:p>
-        </p:txBody>
-      </p:sp>
-      <p:sp>
-        <p:nvSpPr>
-          <p:cNvPr id="17" name="Text 17"/>
-          <p:cNvSpPr txBox="1"/>
-          <p:nvPr/>
-        </p:nvSpPr>
-        <p:spPr>
-          <a:xfrm>
-            <a:off x="6309360" y="4892040"/>
-            <a:ext cx="2377440" cy="1097280"/>
-          </a:xfrm>
-          <a:prstGeom prst="roundRect">
-            <a:avLst>
-              <a:gd name="adj" fmla="val 8000"/>
-            </a:avLst>
-          </a:prstGeom>
-          <a:solidFill>
-            <a:srgbClr val="F2F2F2"/>
-          </a:solidFill>
-          <a:ln w="12700">
-            <a:solidFill>
-              <a:srgbClr val="7F7F7F"/>
-            </a:solidFill>
-          </a:ln>
-        </p:spPr>
-        <p:txBody>
-          <a:bodyPr wrap="square" lIns="54864" tIns="54864" rIns="54864" bIns="54864" anchor="ctr">
-            <a:noAutofit/>
-          </a:bodyPr>
-          <a:lstStyle/>
-          <a:p>
-            <a:pPr marL="0" indent="0" algn="ctr">
-              <a:lnSpc>
-                <a:spcPct val="100000"/>
-              </a:lnSpc>
-              <a:spcBef>
-                <a:spcPts val="0"/>
-              </a:spcBef>
-              <a:buNone/>
-            </a:pPr>
-            <a:r>
-              <a:rPr lang="en-US" sz="1200" b="1" dirty="0">
-                <a:solidFill>
-                  <a:srgbClr val="262626"/>
-                </a:solidFill>
-              </a:rPr>
-              <a:t>Local ML worker (optional)</a:t>
-            </a:r>
-          </a:p>
-          <a:p>
-            <a:pPr marL="0" indent="0" algn="ctr">
-              <a:lnSpc>
-                <a:spcPct val="100000"/>
-              </a:lnSpc>
-              <a:spcBef>
-                <a:spcPts val="200"/>
-              </a:spcBef>
-              <a:buNone/>
-            </a:pPr>
-            <a:r>
-              <a:rPr lang="en-US" sz="1000" dirty="0">
-                <a:solidFill>
-                  <a:srgbClr val="595959"/>
-                </a:solidFill>
-              </a:rPr>
-              <a:t>faster-whisper, pyannote,</a:t>
-            </a:r>
-          </a:p>
-          <a:p>
-            <a:pPr marL="0" indent="0" algn="ctr">
-              <a:lnSpc>
-                <a:spcPct val="100000"/>
-              </a:lnSpc>
-              <a:spcBef>
-                <a:spcPts val="200"/>
-              </a:spcBef>
-              <a:buNone/>
-            </a:pPr>
-            <a:r>
-              <a:rPr lang="en-US" sz="1000" dirty="0">
-                <a:solidFill>
-                  <a:srgbClr val="595959"/>
-                </a:solidFill>
-              </a:rPr>
-              <a:t>for private recordings</a:t>
-            </a:r>
-          </a:p>
-        </p:txBody>
-      </p:sp>
-      <p:cxnSp>
-        <p:nvCxnSpPr>
-          <p:cNvPr id="18" name="Arrow 18"/>
-          <p:cNvCxnSpPr/>
-          <p:nvPr/>
-        </p:nvCxnSpPr>
-        <p:spPr>
-          <a:xfrm>
-            <a:off x="2834640" y="2788920"/>
-            <a:ext cx="548640" cy="0"/>
-          </a:xfrm>
-          <a:prstGeom prst="straightConnector1">
-            <a:avLst/>
-          </a:prstGeom>
-          <a:ln w="19050">
-            <a:solidFill>
-              <a:srgbClr val="7F7F7F"/>
-            </a:solidFill>
-            <a:tailEnd type="triangle" w="med" len="med"/>
-          </a:ln>
-        </p:spPr>
-      </p:cxnSp>
-      <p:cxnSp>
-        <p:nvCxnSpPr>
-          <p:cNvPr id="19" name="Arrow 19"/>
-          <p:cNvCxnSpPr/>
-          <p:nvPr/>
-        </p:nvCxnSpPr>
-        <p:spPr>
-          <a:xfrm>
-            <a:off x="5760720" y="3063240"/>
-            <a:ext cx="548640" cy="0"/>
-          </a:xfrm>
-          <a:prstGeom prst="straightConnector1">
-            <a:avLst/>
-          </a:prstGeom>
-          <a:ln w="19050">
-            <a:solidFill>
-              <a:srgbClr val="7F7F7F"/>
-            </a:solidFill>
-            <a:tailEnd type="triangle" w="med" len="med"/>
-          </a:ln>
-        </p:spPr>
-      </p:cxnSp>
-      <p:cxnSp>
-        <p:nvCxnSpPr>
-          <p:cNvPr id="20" name="Arrow 20"/>
-          <p:cNvCxnSpPr/>
-          <p:nvPr/>
-        </p:nvCxnSpPr>
-        <p:spPr>
-          <a:xfrm>
-            <a:off x="4572000" y="4023360"/>
-            <a:ext cx="0" cy="868680"/>
-          </a:xfrm>
-          <a:prstGeom prst="straightConnector1">
-            <a:avLst/>
-          </a:prstGeom>
-          <a:ln w="19050">
-            <a:solidFill>
-              <a:srgbClr val="7F7F7F"/>
-            </a:solidFill>
-            <a:tailEnd type="triangle" w="med" len="med"/>
-          </a:ln>
-        </p:spPr>
-      </p:cxnSp>
-      <p:cxnSp>
-        <p:nvCxnSpPr>
-          <p:cNvPr id="21" name="Arrow 21"/>
-          <p:cNvCxnSpPr/>
-          <p:nvPr/>
-        </p:nvCxnSpPr>
-        <p:spPr>
-          <a:xfrm>
-            <a:off x="1645920" y="3474720"/>
-            <a:ext cx="0" cy="1417320"/>
-          </a:xfrm>
-          <a:prstGeom prst="straightConnector1">
-            <a:avLst/>
-          </a:prstGeom>
-          <a:ln w="19050">
-            <a:solidFill>
-              <a:srgbClr val="7F7F7F"/>
-            </a:solidFill>
-            <a:tailEnd type="triangle" w="med" len="med"/>
-          </a:ln>
-        </p:spPr>
-      </p:cxnSp>
-      <p:cxnSp>
-        <p:nvCxnSpPr>
-          <p:cNvPr id="22" name="Arrow 22"/>
-          <p:cNvCxnSpPr/>
-          <p:nvPr/>
-        </p:nvCxnSpPr>
-        <p:spPr>
-          <a:xfrm flipH="1">
-            <a:off x="2834640" y="4023360"/>
-            <a:ext cx="731520" cy="1097280"/>
-          </a:xfrm>
-          <a:prstGeom prst="straightConnector1">
-            <a:avLst/>
-          </a:prstGeom>
-          <a:ln w="19050">
-            <a:solidFill>
-              <a:srgbClr val="7F7F7F"/>
-            </a:solidFill>
-            <a:tailEnd type="triangle" w="med" len="med"/>
-          </a:ln>
-        </p:spPr>
-      </p:cxnSp>
-      <p:cxnSp>
-        <p:nvCxnSpPr>
-          <p:cNvPr id="23" name="Arrow 23"/>
-          <p:cNvCxnSpPr/>
-          <p:nvPr/>
-        </p:nvCxnSpPr>
-        <p:spPr>
-          <a:xfrm flipH="1">
-            <a:off x="5760720" y="5440680"/>
-            <a:ext cx="548640" cy="0"/>
-          </a:xfrm>
-          <a:prstGeom prst="straightConnector1">
-            <a:avLst/>
-          </a:prstGeom>
-          <a:ln w="19050">
-            <a:solidFill>
-              <a:srgbClr val="7F7F7F"/>
-            </a:solidFill>
-            <a:tailEnd type="triangle" w="med" len="med"/>
-          </a:ln>
-        </p:spPr>
-      </p:cxnSp>
-      <p:sp>
-        <p:nvSpPr>
-          <p:cNvPr id="24" name="Text 24"/>
-          <p:cNvSpPr txBox="1"/>
-          <p:nvPr/>
-        </p:nvSpPr>
-        <p:spPr>
-          <a:xfrm>
-            <a:off x="2514600" y="2468880"/>
-            <a:ext cx="1188720" cy="274320"/>
+            <a:off x="822960" y="2286000"/>
+            <a:ext cx="7589520" cy="2834640"/>
           </a:xfrm>
           <a:prstGeom prst="rect">
             <a:avLst/>
@@ -9784,252 +7830,224 @@
           </a:ln>
         </p:spPr>
         <p:txBody>
-          <a:bodyPr wrap="square" lIns="0" tIns="0" rIns="0" bIns="0" anchor="t">
+          <a:bodyPr spcFirstLastPara="1" wrap="square" lIns="68569" tIns="34275" rIns="68569" bIns="34275" anchor="t" anchorCtr="0">
             <a:noAutofit/>
           </a:bodyPr>
           <a:lstStyle/>
           <a:p>
-            <a:pPr marL="0" indent="0" algn="ctr">
-              <a:lnSpc>
-                <a:spcPct val="100000"/>
-              </a:lnSpc>
-              <a:spcBef>
-                <a:spcPts val="0"/>
-              </a:spcBef>
-              <a:buNone/>
+            <a:pPr marL="457200" indent="-342900">
+              <a:lnSpc>
+                <a:spcPct val="90000"/>
+              </a:lnSpc>
+              <a:spcBef>
+                <a:spcPts val="700"/>
+              </a:spcBef>
+              <a:buFont typeface="+mj-lt"/>
+              <a:buAutoNum type="arabicPeriod"/>
             </a:pPr>
             <a:r>
-              <a:rPr lang="en-US" sz="1000" i="1" dirty="0">
+              <a:rPr lang="en-US" sz="1400" dirty="0">
                 <a:solidFill>
                   <a:srgbClr val="595959"/>
                 </a:solidFill>
               </a:rPr>
-              <a:t>REST + JWT</a:t>
+              <a:t>If a job for R is queued or running, return it; otherwise create job J</a:t>
+            </a:r>
+          </a:p>
+          <a:p>
+            <a:pPr marL="457200" indent="-342900">
+              <a:lnSpc>
+                <a:spcPct val="90000"/>
+              </a:lnSpc>
+              <a:spcBef>
+                <a:spcPts val="700"/>
+              </a:spcBef>
+              <a:buFont typeface="+mj-lt"/>
+              <a:buAutoNum type="arabicPeriod"/>
+            </a:pPr>
+            <a:r>
+              <a:rPr lang="en-US" sz="1400" dirty="0">
+                <a:solidFill>
+                  <a:srgbClr val="595959"/>
+                </a:solidFill>
+              </a:rPr>
+              <a:t>Download R’s audio (up to 200 MB)</a:t>
+            </a:r>
+          </a:p>
+          <a:p>
+            <a:pPr marL="457200" indent="-342900">
+              <a:lnSpc>
+                <a:spcPct val="90000"/>
+              </a:lnSpc>
+              <a:spcBef>
+                <a:spcPts val="700"/>
+              </a:spcBef>
+              <a:buFont typeface="+mj-lt"/>
+              <a:buAutoNum type="arabicPeriod"/>
+            </a:pPr>
+            <a:r>
+              <a:rPr lang="en-US" sz="1400" dirty="0">
+                <a:solidFill>
+                  <a:srgbClr val="595959"/>
+                </a:solidFill>
+              </a:rPr>
+              <a:t>a ← ffmpeg(audio): mono, 16 kHz, high-pass 80 Hz, loudness −18 LUFS, Opus 32 kbps</a:t>
+            </a:r>
+          </a:p>
+          <a:p>
+            <a:pPr marL="457200" indent="-342900">
+              <a:lnSpc>
+                <a:spcPct val="90000"/>
+              </a:lnSpc>
+              <a:spcBef>
+                <a:spcPts val="700"/>
+              </a:spcBef>
+              <a:buFont typeface="+mj-lt"/>
+              <a:buAutoNum type="arabicPeriod"/>
+            </a:pPr>
+            <a:r>
+              <a:rPr lang="en-US" sz="1400" dirty="0">
+                <a:solidFill>
+                  <a:srgbClr val="595959"/>
+                </a:solidFill>
+              </a:rPr>
+              <a:t>S ← Whisper-large-v3(a, language = D.asr_language) → timestamped segments</a:t>
+            </a:r>
+          </a:p>
+          <a:p>
+            <a:pPr marL="457200" indent="-342900">
+              <a:lnSpc>
+                <a:spcPct val="90000"/>
+              </a:lnSpc>
+              <a:spcBef>
+                <a:spcPts val="700"/>
+              </a:spcBef>
+              <a:buFont typeface="+mj-lt"/>
+              <a:buAutoNum type="arabicPeriod"/>
+            </a:pPr>
+            <a:r>
+              <a:rPr lang="en-US" sz="1400" dirty="0">
+                <a:solidFill>
+                  <a:srgbClr val="595959"/>
+                </a:solidFill>
+              </a:rPr>
+              <a:t>Replace R’s segments with S;  R.status ← transcribed</a:t>
+            </a:r>
+          </a:p>
+          <a:p>
+            <a:pPr marL="457200" indent="-342900">
+              <a:lnSpc>
+                <a:spcPct val="90000"/>
+              </a:lnSpc>
+              <a:spcBef>
+                <a:spcPts val="700"/>
+              </a:spcBef>
+              <a:buFont typeface="+mj-lt"/>
+              <a:buAutoNum type="arabicPeriod"/>
+            </a:pPr>
+            <a:r>
+              <a:rPr lang="en-US" sz="1400" dirty="0">
+                <a:solidFill>
+                  <a:srgbClr val="595959"/>
+                </a:solidFill>
+              </a:rPr>
+              <a:t>For each segment s:  s.embedding ← MiniLM(s.text)  (384-dimensional)</a:t>
+            </a:r>
+          </a:p>
+          <a:p>
+            <a:pPr marL="457200" indent="-342900">
+              <a:lnSpc>
+                <a:spcPct val="90000"/>
+              </a:lnSpc>
+              <a:spcBef>
+                <a:spcPts val="700"/>
+              </a:spcBef>
+              <a:buFont typeface="+mj-lt"/>
+              <a:buAutoNum type="arabicPeriod"/>
+            </a:pPr>
+            <a:r>
+              <a:rPr lang="en-US" sz="1400" dirty="0">
+                <a:solidFill>
+                  <a:srgbClr val="595959"/>
+                </a:solidFill>
+              </a:rPr>
+              <a:t>J.status ← completed (progress 5 → 25 → 70 → 85 → 100 %); on error J.status ← failed</a:t>
             </a:r>
           </a:p>
         </p:txBody>
       </p:sp>
       <p:sp>
         <p:nvSpPr>
-          <p:cNvPr id="25" name="Text 25"/>
+          <p:cNvPr id="6" name="TextBox 5"/>
           <p:cNvSpPr txBox="1"/>
           <p:nvPr/>
         </p:nvSpPr>
         <p:spPr>
           <a:xfrm>
-            <a:off x="5486400" y="2743200"/>
-            <a:ext cx="1097280" cy="274320"/>
+            <a:off x="822960" y="1920240"/>
+            <a:ext cx="7589520" cy="365760"/>
           </a:xfrm>
           <a:prstGeom prst="rect">
             <a:avLst/>
           </a:prstGeom>
           <a:noFill/>
-          <a:ln>
-            <a:noFill/>
-          </a:ln>
         </p:spPr>
         <p:txBody>
-          <a:bodyPr wrap="square" lIns="0" tIns="0" rIns="0" bIns="0" anchor="t">
-            <a:noAutofit/>
+          <a:bodyPr wrap="square">
+            <a:spAutoFit/>
           </a:bodyPr>
           <a:lstStyle/>
           <a:p>
-            <a:pPr marL="0" indent="0" algn="ctr">
-              <a:lnSpc>
-                <a:spcPct val="100000"/>
-              </a:lnSpc>
-              <a:spcBef>
-                <a:spcPts val="0"/>
-              </a:spcBef>
-              <a:buNone/>
-            </a:pPr>
-            <a:r>
-              <a:rPr lang="en-US" sz="1000" i="1" dirty="0">
+            <a:pPr algn="l"/>
+            <a:r>
+              <a:rPr sz="1400" i="0" b="1">
                 <a:solidFill>
                   <a:srgbClr val="595959"/>
                 </a:solidFill>
               </a:rPr>
-              <a:t>audio, text</a:t>
+              <a:t>Transcription with Vani — input: recording R with audio file, dialect D</a:t>
             </a:r>
           </a:p>
         </p:txBody>
       </p:sp>
       <p:sp>
         <p:nvSpPr>
-          <p:cNvPr id="26" name="Text 26"/>
+          <p:cNvPr id="7" name="TextBox 6"/>
           <p:cNvSpPr txBox="1"/>
           <p:nvPr/>
         </p:nvSpPr>
         <p:spPr>
           <a:xfrm>
-            <a:off x="4572000" y="4297680"/>
-            <a:ext cx="548640" cy="274320"/>
+            <a:off x="822960" y="4846320"/>
+            <a:ext cx="7589520" cy="731520"/>
           </a:xfrm>
           <a:prstGeom prst="rect">
             <a:avLst/>
           </a:prstGeom>
           <a:noFill/>
-          <a:ln>
-            <a:noFill/>
-          </a:ln>
         </p:spPr>
         <p:txBody>
-          <a:bodyPr wrap="square" lIns="0" tIns="0" rIns="0" bIns="0" anchor="t">
-            <a:noAutofit/>
+          <a:bodyPr wrap="square">
+            <a:spAutoFit/>
           </a:bodyPr>
           <a:lstStyle/>
           <a:p>
-            <a:pPr marL="0" indent="0" algn="ctr">
-              <a:lnSpc>
-                <a:spcPct val="100000"/>
-              </a:lnSpc>
-              <a:spcBef>
-                <a:spcPts val="0"/>
-              </a:spcBef>
-              <a:buNone/>
-            </a:pPr>
-            <a:r>
-              <a:rPr lang="en-US" sz="1000" i="1" dirty="0">
+            <a:pPr algn="l"/>
+            <a:r>
+              <a:rPr sz="1200" b="1">
                 <a:solidFill>
                   <a:srgbClr val="595959"/>
                 </a:solidFill>
               </a:rPr>
-              <a:t>SQL</a:t>
-            </a:r>
-          </a:p>
-        </p:txBody>
-      </p:sp>
-      <p:sp>
-        <p:nvSpPr>
-          <p:cNvPr id="27" name="Text 27"/>
-          <p:cNvSpPr txBox="1"/>
-          <p:nvPr/>
-        </p:nvSpPr>
-        <p:spPr>
-          <a:xfrm>
-            <a:off x="1645920" y="4069080"/>
-            <a:ext cx="1280160" cy="274320"/>
-          </a:xfrm>
-          <a:prstGeom prst="rect">
-            <a:avLst/>
-          </a:prstGeom>
-          <a:noFill/>
-          <a:ln>
-            <a:noFill/>
-          </a:ln>
-        </p:spPr>
-        <p:txBody>
-          <a:bodyPr wrap="square" lIns="0" tIns="0" rIns="0" bIns="0" anchor="t">
-            <a:noAutofit/>
-          </a:bodyPr>
-          <a:lstStyle/>
-          <a:p>
-            <a:pPr marL="0" indent="0" algn="ctr">
-              <a:lnSpc>
-                <a:spcPct val="100000"/>
-              </a:lnSpc>
-              <a:spcBef>
-                <a:spcPts val="0"/>
-              </a:spcBef>
-              <a:buNone/>
-            </a:pPr>
-            <a:r>
-              <a:rPr lang="en-US" sz="1000" i="1" dirty="0">
+              <a:t>Also: </a:t>
+            </a:r>
+            <a:r>
+              <a:rPr sz="1200" i="0">
                 <a:solidFill>
                   <a:srgbClr val="595959"/>
                 </a:solidFill>
               </a:rPr>
-              <a:t>signed upload</a:t>
-            </a:r>
-          </a:p>
-        </p:txBody>
-      </p:sp>
-      <p:sp>
-        <p:nvSpPr>
-          <p:cNvPr id="28" name="Text 28"/>
-          <p:cNvSpPr txBox="1"/>
-          <p:nvPr/>
-        </p:nvSpPr>
-        <p:spPr>
-          <a:xfrm>
-            <a:off x="2788920" y="4251960"/>
-            <a:ext cx="1097280" cy="274320"/>
-          </a:xfrm>
-          <a:prstGeom prst="rect">
-            <a:avLst/>
-          </a:prstGeom>
-          <a:noFill/>
-          <a:ln>
-            <a:noFill/>
-          </a:ln>
-        </p:spPr>
-        <p:txBody>
-          <a:bodyPr wrap="square" lIns="0" tIns="0" rIns="0" bIns="0" anchor="t">
-            <a:noAutofit/>
-          </a:bodyPr>
-          <a:lstStyle/>
-          <a:p>
-            <a:pPr marL="0" indent="0" algn="ctr">
-              <a:lnSpc>
-                <a:spcPct val="100000"/>
-              </a:lnSpc>
-              <a:spcBef>
-                <a:spcPts val="0"/>
-              </a:spcBef>
-              <a:buNone/>
-            </a:pPr>
-            <a:r>
-              <a:rPr lang="en-US" sz="1000" i="1" dirty="0">
-                <a:solidFill>
-                  <a:srgbClr val="595959"/>
-                </a:solidFill>
-              </a:rPr>
-              <a:t>download</a:t>
-            </a:r>
-          </a:p>
-        </p:txBody>
-      </p:sp>
-      <p:sp>
-        <p:nvSpPr>
-          <p:cNvPr id="29" name="Text 29"/>
-          <p:cNvSpPr txBox="1"/>
-          <p:nvPr/>
-        </p:nvSpPr>
-        <p:spPr>
-          <a:xfrm>
-            <a:off x="5577840" y="5486400"/>
-            <a:ext cx="914400" cy="274320"/>
-          </a:xfrm>
-          <a:prstGeom prst="rect">
-            <a:avLst/>
-          </a:prstGeom>
-          <a:noFill/>
-          <a:ln>
-            <a:noFill/>
-          </a:ln>
-        </p:spPr>
-        <p:txBody>
-          <a:bodyPr wrap="square" lIns="0" tIns="0" rIns="0" bIns="0" anchor="t">
-            <a:noAutofit/>
-          </a:bodyPr>
-          <a:lstStyle/>
-          <a:p>
-            <a:pPr marL="0" indent="0" algn="ctr">
-              <a:lnSpc>
-                <a:spcPct val="100000"/>
-              </a:lnSpc>
-              <a:spcBef>
-                <a:spcPts val="0"/>
-              </a:spcBef>
-              <a:buNone/>
-            </a:pPr>
-            <a:r>
-              <a:rPr lang="en-US" sz="1000" i="1" dirty="0">
-                <a:solidFill>
-                  <a:srgbClr val="595959"/>
-                </a:solidFill>
-              </a:rPr>
-              <a:t>polls jobs</a:t>
+              <a:t>keyword search with PostgreSQL full-text ranking; search by meaning with pgvector cosine distance; corrections are re-embedded; offline recordings wait in IndexedDB and upload when the connection returns.</a:t>
             </a:r>
           </a:p>
         </p:txBody>
@@ -10061,14 +8079,20 @@
       </p:grpSpPr>
       <p:sp>
         <p:nvSpPr>
-          <p:cNvPr id="11" name="Title 11"/>
+          <p:cNvPr id="3" name="Google Shape;68;g78e6671419f8a2a0_22">
+            <a:extLst>
+              <a:ext uri="{FF2B5EF4-FFF2-40B4-BE49-F238E27FC236}">
+                <a16:creationId xmlns:a16="http://schemas.microsoft.com/office/drawing/2014/main" id="{BA677A83-D006-E1F4-CCF8-948027C21AB2}"/>
+              </a:ext>
+            </a:extLst>
+          </p:cNvPr>
           <p:cNvSpPr txBox="1"/>
           <p:nvPr/>
         </p:nvSpPr>
         <p:spPr>
           <a:xfrm>
             <a:off x="628650" y="1131097"/>
-            <a:ext cx="7886700" cy="760000"/>
+            <a:ext cx="7886700" cy="994275"/>
           </a:xfrm>
           <a:prstGeom prst="rect">
             <a:avLst/>
@@ -10079,12 +8103,12 @@
           </a:ln>
         </p:spPr>
         <p:txBody>
-          <a:bodyPr wrap="square" lIns="68569" tIns="34275" rIns="68569" bIns="34275" anchor="ctr">
+          <a:bodyPr spcFirstLastPara="1" wrap="square" lIns="68569" tIns="34275" rIns="68569" bIns="34275" anchor="ctr" anchorCtr="0">
             <a:normAutofit/>
           </a:bodyPr>
           <a:lstStyle/>
           <a:p>
-            <a:pPr algn="ctr">
+            <a:pPr algn="ctr" defTabSz="685800">
               <a:lnSpc>
                 <a:spcPct val="90000"/>
               </a:lnSpc>
@@ -10094,785 +8118,368 @@
                 <a:latin typeface="Times New Roman" panose="02020603050405020304" pitchFamily="18" charset="0"/>
                 <a:cs typeface="Times New Roman" panose="02020603050405020304" pitchFamily="18" charset="0"/>
               </a:rPr>
-              <a:t>Methodology - From Voice to Verified Text</a:t>
-            </a:r>
+              <a:t>Results</a:t>
+            </a:r>
+            <a:endParaRPr sz="2400" dirty="0">
+              <a:latin typeface="Times New Roman" panose="02020603050405020304" pitchFamily="18" charset="0"/>
+              <a:cs typeface="Times New Roman" panose="02020603050405020304" pitchFamily="18" charset="0"/>
+            </a:endParaRPr>
           </a:p>
         </p:txBody>
       </p:sp>
+      <p:pic>
+        <p:nvPicPr>
+          <p:cNvPr id="4" name="Picture 3" descr="cover.png"/>
+          <p:cNvPicPr>
+            <a:picLocks noChangeAspect="1"/>
+          </p:cNvPicPr>
+          <p:nvPr/>
+        </p:nvPicPr>
+        <p:blipFill>
+          <a:blip r:embed="rId2"/>
+          <a:stretch>
+            <a:fillRect/>
+          </a:stretch>
+        </p:blipFill>
+        <p:spPr>
+          <a:xfrm>
+            <a:off x="502920" y="2011680"/>
+            <a:ext cx="2606040" cy="1628775"/>
+          </a:xfrm>
+          <a:prstGeom prst="rect">
+            <a:avLst/>
+          </a:prstGeom>
+          <a:ln w="9525">
+            <a:solidFill>
+              <a:srgbClr val="8C8C8C"/>
+            </a:solidFill>
+          </a:ln>
+        </p:spPr>
+      </p:pic>
       <p:sp>
         <p:nvSpPr>
-          <p:cNvPr id="12" name="Text 12"/>
+          <p:cNvPr id="5" name="TextBox 4"/>
           <p:cNvSpPr txBox="1"/>
           <p:nvPr/>
         </p:nvSpPr>
         <p:spPr>
           <a:xfrm>
-            <a:off x="502920" y="2057400"/>
-            <a:ext cx="2514600" cy="1920240"/>
+            <a:off x="502920" y="3630168"/>
+            <a:ext cx="2606040" cy="274320"/>
           </a:xfrm>
-          <a:prstGeom prst="roundRect">
-            <a:avLst>
-              <a:gd name="adj" fmla="val 8000"/>
-            </a:avLst>
+          <a:prstGeom prst="rect">
+            <a:avLst/>
           </a:prstGeom>
-          <a:solidFill>
-            <a:srgbClr val="F2F2F2"/>
-          </a:solidFill>
-          <a:ln>
-            <a:noFill/>
+          <a:noFill/>
+        </p:spPr>
+        <p:txBody>
+          <a:bodyPr wrap="square">
+            <a:spAutoFit/>
+          </a:bodyPr>
+          <a:lstStyle/>
+          <a:p>
+            <a:pPr algn="ctr"/>
+            <a:r>
+              <a:rPr sz="1000" i="1">
+                <a:solidFill>
+                  <a:srgbClr val="595959"/>
+                </a:solidFill>
+              </a:rPr>
+              <a:t>Sign-in page: logo in 10 scripts</a:t>
+            </a:r>
+          </a:p>
+        </p:txBody>
+      </p:sp>
+      <p:pic>
+        <p:nvPicPr>
+          <p:cNvPr id="6" name="Picture 5" descr="recording.png"/>
+          <p:cNvPicPr>
+            <a:picLocks noChangeAspect="1"/>
+          </p:cNvPicPr>
+          <p:nvPr/>
+        </p:nvPicPr>
+        <p:blipFill>
+          <a:blip r:embed="rId3"/>
+          <a:stretch>
+            <a:fillRect/>
+          </a:stretch>
+        </p:blipFill>
+        <p:spPr>
+          <a:xfrm>
+            <a:off x="3291839" y="2011680"/>
+            <a:ext cx="2606040" cy="1628775"/>
+          </a:xfrm>
+          <a:prstGeom prst="rect">
+            <a:avLst/>
+          </a:prstGeom>
+          <a:ln w="9525">
+            <a:solidFill>
+              <a:srgbClr val="8C8C8C"/>
+            </a:solidFill>
           </a:ln>
         </p:spPr>
-        <p:txBody>
-          <a:bodyPr wrap="square" lIns="137160" tIns="137160" rIns="137160" bIns="137160" anchor="t">
-            <a:noAutofit/>
-          </a:bodyPr>
-          <a:lstStyle/>
-          <a:p>
-            <a:pPr marL="502920" indent="0" algn="l">
-              <a:lnSpc>
-                <a:spcPct val="100000"/>
-              </a:lnSpc>
-              <a:spcBef>
-                <a:spcPts val="0"/>
-              </a:spcBef>
-              <a:buNone/>
-            </a:pPr>
-            <a:r>
-              <a:rPr lang="en-US" sz="1400" b="1" dirty="0">
-                <a:solidFill>
-                  <a:srgbClr val="262626"/>
-                </a:solidFill>
-              </a:rPr>
-              <a:t>Record &amp; consent</a:t>
-            </a:r>
-          </a:p>
-          <a:p>
-            <a:pPr marL="0" indent="0" algn="l">
-              <a:lnSpc>
-                <a:spcPct val="105000"/>
-              </a:lnSpc>
-              <a:spcBef>
-                <a:spcPts val="1000"/>
-              </a:spcBef>
-              <a:buNone/>
-            </a:pPr>
-            <a:r>
-              <a:rPr lang="en-US" sz="1200" dirty="0">
-                <a:solidFill>
-                  <a:srgbClr val="595959"/>
-                </a:solidFill>
-              </a:rPr>
-              <a:t>Browser recording or upload; speaker agrees separately to public listening and AI training</a:t>
-            </a:r>
-          </a:p>
-        </p:txBody>
-      </p:sp>
+      </p:pic>
       <p:sp>
         <p:nvSpPr>
-          <p:cNvPr id="13" name="Step 13"/>
-          <p:cNvSpPr/>
-          <p:nvPr/>
-        </p:nvSpPr>
-        <p:spPr>
-          <a:xfrm>
-            <a:off x="621792" y="2148840"/>
-            <a:ext cx="411480" cy="411480"/>
-          </a:xfrm>
-          <a:prstGeom prst="ellipse">
-            <a:avLst/>
-          </a:prstGeom>
-          <a:solidFill>
-            <a:srgbClr val="B45309"/>
-          </a:solidFill>
-          <a:ln>
-            <a:noFill/>
-          </a:ln>
-        </p:spPr>
-        <p:txBody>
-          <a:bodyPr lIns="0" tIns="0" rIns="0" bIns="0" anchor="ctr">
-            <a:noAutofit/>
-          </a:bodyPr>
-          <a:lstStyle/>
-          <a:p>
-            <a:pPr marL="0" indent="0" algn="ctr">
-              <a:lnSpc>
-                <a:spcPct val="100000"/>
-              </a:lnSpc>
-              <a:spcBef>
-                <a:spcPts val="0"/>
-              </a:spcBef>
-              <a:buNone/>
-            </a:pPr>
-            <a:r>
-              <a:rPr lang="en-US" sz="1400" b="1" dirty="0">
-                <a:solidFill>
-                  <a:srgbClr val="FFFFFF"/>
-                </a:solidFill>
-              </a:rPr>
-              <a:t>1</a:t>
-            </a:r>
-          </a:p>
-        </p:txBody>
-      </p:sp>
-      <p:cxnSp>
-        <p:nvCxnSpPr>
-          <p:cNvPr id="14" name="Arrow 14"/>
-          <p:cNvCxnSpPr/>
-          <p:nvPr/>
-        </p:nvCxnSpPr>
-        <p:spPr>
-          <a:xfrm>
-            <a:off x="3017520" y="3017520"/>
-            <a:ext cx="228600" cy="0"/>
-          </a:xfrm>
-          <a:prstGeom prst="straightConnector1">
-            <a:avLst/>
-          </a:prstGeom>
-          <a:ln w="19050">
-            <a:solidFill>
-              <a:srgbClr val="B45309"/>
-            </a:solidFill>
-            <a:tailEnd type="triangle" w="med" len="med"/>
-          </a:ln>
-        </p:spPr>
-      </p:cxnSp>
-      <p:sp>
-        <p:nvSpPr>
-          <p:cNvPr id="15" name="Text 15"/>
+          <p:cNvPr id="7" name="TextBox 6"/>
           <p:cNvSpPr txBox="1"/>
           <p:nvPr/>
         </p:nvSpPr>
         <p:spPr>
           <a:xfrm>
-            <a:off x="3246120" y="2057400"/>
-            <a:ext cx="2514600" cy="1920240"/>
+            <a:off x="3291839" y="3630168"/>
+            <a:ext cx="2606040" cy="274320"/>
           </a:xfrm>
-          <a:prstGeom prst="roundRect">
-            <a:avLst>
-              <a:gd name="adj" fmla="val 8000"/>
-            </a:avLst>
+          <a:prstGeom prst="rect">
+            <a:avLst/>
           </a:prstGeom>
-          <a:solidFill>
-            <a:srgbClr val="F2F2F2"/>
-          </a:solidFill>
-          <a:ln>
-            <a:noFill/>
+          <a:noFill/>
+        </p:spPr>
+        <p:txBody>
+          <a:bodyPr wrap="square">
+            <a:spAutoFit/>
+          </a:bodyPr>
+          <a:lstStyle/>
+          <a:p>
+            <a:pPr algn="ctr"/>
+            <a:r>
+              <a:rPr sz="1000" i="1">
+                <a:solidFill>
+                  <a:srgbClr val="595959"/>
+                </a:solidFill>
+              </a:rPr>
+              <a:t>Recording page: Vani’s transcript</a:t>
+            </a:r>
+          </a:p>
+        </p:txBody>
+      </p:sp>
+      <p:pic>
+        <p:nvPicPr>
+          <p:cNvPr id="8" name="Picture 7" descr="shelf.png"/>
+          <p:cNvPicPr>
+            <a:picLocks noChangeAspect="1"/>
+          </p:cNvPicPr>
+          <p:nvPr/>
+        </p:nvPicPr>
+        <p:blipFill>
+          <a:blip r:embed="rId4"/>
+          <a:stretch>
+            <a:fillRect/>
+          </a:stretch>
+        </p:blipFill>
+        <p:spPr>
+          <a:xfrm>
+            <a:off x="6080759" y="2011680"/>
+            <a:ext cx="2606040" cy="1628775"/>
+          </a:xfrm>
+          <a:prstGeom prst="rect">
+            <a:avLst/>
+          </a:prstGeom>
+          <a:ln w="9525">
+            <a:solidFill>
+              <a:srgbClr val="8C8C8C"/>
+            </a:solidFill>
           </a:ln>
         </p:spPr>
-        <p:txBody>
-          <a:bodyPr wrap="square" lIns="137160" tIns="137160" rIns="137160" bIns="137160" anchor="t">
-            <a:noAutofit/>
-          </a:bodyPr>
-          <a:lstStyle/>
-          <a:p>
-            <a:pPr marL="502920" indent="0" algn="l">
-              <a:lnSpc>
-                <a:spcPct val="100000"/>
-              </a:lnSpc>
-              <a:spcBef>
-                <a:spcPts val="0"/>
-              </a:spcBef>
-              <a:buNone/>
-            </a:pPr>
-            <a:r>
-              <a:rPr lang="en-US" sz="1400" b="1" dirty="0">
-                <a:solidFill>
-                  <a:srgbClr val="262626"/>
-                </a:solidFill>
-              </a:rPr>
-              <a:t>Pre-process</a:t>
-            </a:r>
-          </a:p>
-          <a:p>
-            <a:pPr marL="0" indent="0" algn="l">
-              <a:lnSpc>
-                <a:spcPct val="105000"/>
-              </a:lnSpc>
-              <a:spcBef>
-                <a:spcPts val="1000"/>
-              </a:spcBef>
-              <a:buNone/>
-            </a:pPr>
-            <a:r>
-              <a:rPr lang="en-US" sz="1200" dirty="0">
-                <a:solidFill>
-                  <a:srgbClr val="595959"/>
-                </a:solidFill>
-              </a:rPr>
-              <a:t>ffmpeg: mono, 16 kHz, 80 Hz high-pass, loudness normalised; no trimming</a:t>
-            </a:r>
-          </a:p>
-        </p:txBody>
-      </p:sp>
+      </p:pic>
       <p:sp>
         <p:nvSpPr>
-          <p:cNvPr id="16" name="Step 16"/>
-          <p:cNvSpPr/>
-          <p:nvPr/>
-        </p:nvSpPr>
-        <p:spPr>
-          <a:xfrm>
-            <a:off x="3364992" y="2148840"/>
-            <a:ext cx="411480" cy="411480"/>
-          </a:xfrm>
-          <a:prstGeom prst="ellipse">
-            <a:avLst/>
-          </a:prstGeom>
-          <a:solidFill>
-            <a:srgbClr val="B45309"/>
-          </a:solidFill>
-          <a:ln>
-            <a:noFill/>
-          </a:ln>
-        </p:spPr>
-        <p:txBody>
-          <a:bodyPr lIns="0" tIns="0" rIns="0" bIns="0" anchor="ctr">
-            <a:noAutofit/>
-          </a:bodyPr>
-          <a:lstStyle/>
-          <a:p>
-            <a:pPr marL="0" indent="0" algn="ctr">
-              <a:lnSpc>
-                <a:spcPct val="100000"/>
-              </a:lnSpc>
-              <a:spcBef>
-                <a:spcPts val="0"/>
-              </a:spcBef>
-              <a:buNone/>
-            </a:pPr>
-            <a:r>
-              <a:rPr lang="en-US" sz="1400" b="1" dirty="0">
-                <a:solidFill>
-                  <a:srgbClr val="FFFFFF"/>
-                </a:solidFill>
-              </a:rPr>
-              <a:t>2</a:t>
-            </a:r>
-          </a:p>
-        </p:txBody>
-      </p:sp>
-      <p:cxnSp>
-        <p:nvCxnSpPr>
-          <p:cNvPr id="17" name="Arrow 17"/>
-          <p:cNvCxnSpPr/>
-          <p:nvPr/>
-        </p:nvCxnSpPr>
-        <p:spPr>
-          <a:xfrm>
-            <a:off x="5760720" y="3017520"/>
-            <a:ext cx="228600" cy="0"/>
-          </a:xfrm>
-          <a:prstGeom prst="straightConnector1">
-            <a:avLst/>
-          </a:prstGeom>
-          <a:ln w="19050">
-            <a:solidFill>
-              <a:srgbClr val="B45309"/>
-            </a:solidFill>
-            <a:tailEnd type="triangle" w="med" len="med"/>
-          </a:ln>
-        </p:spPr>
-      </p:cxnSp>
-      <p:sp>
-        <p:nvSpPr>
-          <p:cNvPr id="18" name="Text 18"/>
+          <p:cNvPr id="9" name="TextBox 8"/>
           <p:cNvSpPr txBox="1"/>
           <p:nvPr/>
         </p:nvSpPr>
         <p:spPr>
           <a:xfrm>
-            <a:off x="5989320" y="2057400"/>
-            <a:ext cx="2514600" cy="1920240"/>
+            <a:off x="6080759" y="3630168"/>
+            <a:ext cx="2606040" cy="274320"/>
           </a:xfrm>
-          <a:prstGeom prst="roundRect">
-            <a:avLst>
-              <a:gd name="adj" fmla="val 8000"/>
-            </a:avLst>
+          <a:prstGeom prst="rect">
+            <a:avLst/>
           </a:prstGeom>
-          <a:solidFill>
-            <a:srgbClr val="F2F2F2"/>
-          </a:solidFill>
-          <a:ln>
-            <a:noFill/>
-          </a:ln>
+          <a:noFill/>
         </p:spPr>
         <p:txBody>
-          <a:bodyPr wrap="square" lIns="137160" tIns="137160" rIns="137160" bIns="137160" anchor="t">
-            <a:noAutofit/>
+          <a:bodyPr wrap="square">
+            <a:spAutoFit/>
           </a:bodyPr>
           <a:lstStyle/>
           <a:p>
-            <a:pPr marL="502920" indent="0" algn="l">
-              <a:lnSpc>
-                <a:spcPct val="100000"/>
-              </a:lnSpc>
-              <a:spcBef>
-                <a:spcPts val="0"/>
-              </a:spcBef>
-              <a:buNone/>
-            </a:pPr>
-            <a:r>
-              <a:rPr lang="en-US" sz="1400" b="1" dirty="0">
-                <a:solidFill>
-                  <a:srgbClr val="262626"/>
-                </a:solidFill>
-              </a:rPr>
-              <a:t>Transcribe</a:t>
-            </a:r>
-          </a:p>
-          <a:p>
-            <a:pPr marL="0" indent="0" algn="l">
-              <a:lnSpc>
-                <a:spcPct val="105000"/>
-              </a:lnSpc>
-              <a:spcBef>
-                <a:spcPts val="1000"/>
-              </a:spcBef>
-              <a:buNone/>
-            </a:pPr>
-            <a:r>
-              <a:rPr lang="en-US" sz="1200" dirty="0">
+            <a:pPr algn="ctr"/>
+            <a:r>
+              <a:rPr sz="1000" i="1">
                 <a:solidFill>
                   <a:srgbClr val="595959"/>
                 </a:solidFill>
               </a:rPr>
-              <a:t>Whisper large-v3 with the dialect's language hint (e.g. Tulu as Kannada)</a:t>
+              <a:t>Dialect shelf: 74 dialects</a:t>
             </a:r>
           </a:p>
         </p:txBody>
       </p:sp>
       <p:sp>
         <p:nvSpPr>
-          <p:cNvPr id="19" name="Step 19"/>
-          <p:cNvSpPr/>
-          <p:nvPr/>
-        </p:nvSpPr>
-        <p:spPr>
-          <a:xfrm>
-            <a:off x="6108192" y="2148840"/>
-            <a:ext cx="411480" cy="411480"/>
-          </a:xfrm>
-          <a:prstGeom prst="ellipse">
-            <a:avLst/>
-          </a:prstGeom>
-          <a:solidFill>
-            <a:srgbClr val="B45309"/>
-          </a:solidFill>
-          <a:ln>
-            <a:noFill/>
-          </a:ln>
-        </p:spPr>
-        <p:txBody>
-          <a:bodyPr lIns="0" tIns="0" rIns="0" bIns="0" anchor="ctr">
-            <a:noAutofit/>
-          </a:bodyPr>
-          <a:lstStyle/>
-          <a:p>
-            <a:pPr marL="0" indent="0" algn="ctr">
-              <a:lnSpc>
-                <a:spcPct val="100000"/>
-              </a:lnSpc>
-              <a:spcBef>
-                <a:spcPts val="0"/>
-              </a:spcBef>
-              <a:buNone/>
-            </a:pPr>
-            <a:r>
-              <a:rPr lang="en-US" sz="1400" b="1" dirty="0">
-                <a:solidFill>
-                  <a:srgbClr val="FFFFFF"/>
-                </a:solidFill>
-              </a:rPr>
-              <a:t>3</a:t>
-            </a:r>
-          </a:p>
-        </p:txBody>
-      </p:sp>
-      <p:sp>
-        <p:nvSpPr>
-          <p:cNvPr id="20" name="Text 20"/>
+          <p:cNvPr id="10" name="TextBox 9"/>
           <p:cNvSpPr txBox="1"/>
           <p:nvPr/>
         </p:nvSpPr>
         <p:spPr>
           <a:xfrm>
-            <a:off x="502920" y="4206240"/>
-            <a:ext cx="2514600" cy="1920240"/>
+            <a:off x="822960" y="4069080"/>
+            <a:ext cx="7589520" cy="2194560"/>
           </a:xfrm>
-          <a:prstGeom prst="roundRect">
-            <a:avLst>
-              <a:gd name="adj" fmla="val 8000"/>
-            </a:avLst>
+          <a:prstGeom prst="rect">
+            <a:avLst/>
           </a:prstGeom>
-          <a:solidFill>
-            <a:srgbClr val="F2F2F2"/>
-          </a:solidFill>
-          <a:ln>
-            <a:noFill/>
-          </a:ln>
+          <a:noFill/>
         </p:spPr>
         <p:txBody>
-          <a:bodyPr wrap="square" lIns="137160" tIns="137160" rIns="137160" bIns="137160" anchor="t">
-            <a:noAutofit/>
+          <a:bodyPr wrap="square">
+            <a:spAutoFit/>
           </a:bodyPr>
           <a:lstStyle/>
           <a:p>
-            <a:pPr marL="502920" indent="0" algn="l">
-              <a:lnSpc>
-                <a:spcPct val="100000"/>
-              </a:lnSpc>
-              <a:spcBef>
-                <a:spcPts val="0"/>
-              </a:spcBef>
-              <a:buNone/>
+            <a:pPr marL="457200" indent="-342900">
+              <a:lnSpc>
+                <a:spcPct val="90000"/>
+              </a:lnSpc>
+              <a:spcBef>
+                <a:spcPts val="500"/>
+              </a:spcBef>
+              <a:buSzPts val="1800"/>
+              <a:buFont typeface="Arial"/>
+              <a:buChar char="•"/>
             </a:pPr>
             <a:r>
-              <a:rPr lang="en-US" sz="1400" b="1" dirty="0">
-                <a:solidFill>
-                  <a:srgbClr val="262626"/>
-                </a:solidFill>
-              </a:rPr>
-              <a:t>Correct</a:t>
-            </a:r>
-          </a:p>
-          <a:p>
-            <a:pPr marL="0" indent="0" algn="l">
-              <a:lnSpc>
-                <a:spcPct val="105000"/>
-              </a:lnSpc>
-              <a:spcBef>
-                <a:spcPts val="1000"/>
-              </a:spcBef>
-              <a:buNone/>
+              <a:rPr lang="en-US" sz="1400" dirty="0" b="1">
+                <a:solidFill>
+                  <a:srgbClr val="595959"/>
+                </a:solidFill>
+              </a:rPr>
+              <a:t>Deployed live: </a:t>
+            </a:r>
+            <a:r>
+              <a:rPr lang="en-US" sz="1400" dirty="0">
+                <a:solidFill>
+                  <a:srgbClr val="595959"/>
+                </a:solidFill>
+              </a:rPr>
+              <a:t>swara-veda.vercel.app with a FastAPI server on Render and a Supabase database</a:t>
+            </a:r>
+          </a:p>
+          <a:p>
+            <a:pPr marL="457200" indent="-342900">
+              <a:lnSpc>
+                <a:spcPct val="90000"/>
+              </a:lnSpc>
+              <a:spcBef>
+                <a:spcPts val="500"/>
+              </a:spcBef>
+              <a:buSzPts val="1800"/>
+              <a:buFont typeface="Arial"/>
+              <a:buChar char="•"/>
             </a:pPr>
             <a:r>
-              <a:rPr lang="en-US" sz="1200" dirty="0">
+              <a:rPr lang="en-US" sz="1400" dirty="0" b="1">
                 <a:solidFill>
                   <a:srgbClr val="595959"/>
                 </a:solidFill>
               </a:rPr>
-              <a:t>Native speakers fix each passage while it loops; AI suggests English and Latin script</a:t>
-            </a:r>
-          </a:p>
-        </p:txBody>
-      </p:sp>
-      <p:sp>
-        <p:nvSpPr>
-          <p:cNvPr id="21" name="Step 21"/>
-          <p:cNvSpPr/>
-          <p:nvPr/>
-        </p:nvSpPr>
-        <p:spPr>
-          <a:xfrm>
-            <a:off x="621792" y="4297680"/>
-            <a:ext cx="411480" cy="411480"/>
-          </a:xfrm>
-          <a:prstGeom prst="ellipse">
-            <a:avLst/>
-          </a:prstGeom>
-          <a:solidFill>
-            <a:srgbClr val="B45309"/>
-          </a:solidFill>
-          <a:ln>
-            <a:noFill/>
-          </a:ln>
-        </p:spPr>
-        <p:txBody>
-          <a:bodyPr lIns="0" tIns="0" rIns="0" bIns="0" anchor="ctr">
-            <a:noAutofit/>
-          </a:bodyPr>
-          <a:lstStyle/>
-          <a:p>
-            <a:pPr marL="0" indent="0" algn="ctr">
-              <a:lnSpc>
-                <a:spcPct val="100000"/>
-              </a:lnSpc>
-              <a:spcBef>
-                <a:spcPts val="0"/>
-              </a:spcBef>
-              <a:buNone/>
+              <a:t>74 dialects </a:t>
+            </a:r>
+            <a:r>
+              <a:rPr lang="en-US" sz="1400" dirty="0">
+                <a:solidFill>
+                  <a:srgbClr val="595959"/>
+                </a:solidFill>
+              </a:rPr>
+              <a:t>catalogued with region, script, ISO code and Vani’s language hint</a:t>
+            </a:r>
+          </a:p>
+          <a:p>
+            <a:pPr marL="457200" indent="-342900">
+              <a:lnSpc>
+                <a:spcPct val="90000"/>
+              </a:lnSpc>
+              <a:spcBef>
+                <a:spcPts val="500"/>
+              </a:spcBef>
+              <a:buSzPts val="1800"/>
+              <a:buFont typeface="Arial"/>
+              <a:buChar char="•"/>
             </a:pPr>
             <a:r>
-              <a:rPr lang="en-US" sz="1400" b="1" dirty="0">
-                <a:solidFill>
-                  <a:srgbClr val="FFFFFF"/>
-                </a:solidFill>
-              </a:rPr>
-              <a:t>4</a:t>
-            </a:r>
-          </a:p>
-        </p:txBody>
-      </p:sp>
-      <p:cxnSp>
-        <p:nvCxnSpPr>
-          <p:cNvPr id="22" name="Arrow 22"/>
-          <p:cNvCxnSpPr/>
-          <p:nvPr/>
-        </p:nvCxnSpPr>
-        <p:spPr>
-          <a:xfrm>
-            <a:off x="3017520" y="5166360"/>
-            <a:ext cx="228600" cy="0"/>
-          </a:xfrm>
-          <a:prstGeom prst="straightConnector1">
-            <a:avLst/>
-          </a:prstGeom>
-          <a:ln w="19050">
-            <a:solidFill>
-              <a:srgbClr val="B45309"/>
-            </a:solidFill>
-            <a:tailEnd type="triangle" w="med" len="med"/>
-          </a:ln>
-        </p:spPr>
-      </p:cxnSp>
-      <p:sp>
-        <p:nvSpPr>
-          <p:cNvPr id="23" name="Text 23"/>
-          <p:cNvSpPr txBox="1"/>
-          <p:nvPr/>
-        </p:nvSpPr>
-        <p:spPr>
-          <a:xfrm>
-            <a:off x="3246120" y="4206240"/>
-            <a:ext cx="2514600" cy="1920240"/>
-          </a:xfrm>
-          <a:prstGeom prst="roundRect">
-            <a:avLst>
-              <a:gd name="adj" fmla="val 8000"/>
-            </a:avLst>
-          </a:prstGeom>
-          <a:solidFill>
-            <a:srgbClr val="F2F2F2"/>
-          </a:solidFill>
-          <a:ln>
-            <a:noFill/>
-          </a:ln>
-        </p:spPr>
-        <p:txBody>
-          <a:bodyPr wrap="square" lIns="137160" tIns="137160" rIns="137160" bIns="137160" anchor="t">
-            <a:noAutofit/>
-          </a:bodyPr>
-          <a:lstStyle/>
-          <a:p>
-            <a:pPr marL="502920" indent="0" algn="l">
-              <a:lnSpc>
-                <a:spcPct val="100000"/>
-              </a:lnSpc>
-              <a:spcBef>
-                <a:spcPts val="0"/>
-              </a:spcBef>
-              <a:buNone/>
+              <a:rPr lang="en-US" sz="1400" dirty="0" b="1">
+                <a:solidFill>
+                  <a:srgbClr val="595959"/>
+                </a:solidFill>
+              </a:rPr>
+              <a:t>100+ automated tests </a:t>
+            </a:r>
+            <a:r>
+              <a:rPr lang="en-US" sz="1400" dirty="0">
+                <a:solidFill>
+                  <a:srgbClr val="595959"/>
+                </a:solidFill>
+              </a:rPr>
+              <a:t>pass, plus tests on real PostgreSQL; end-to-end browser tests show no errors</a:t>
+            </a:r>
+          </a:p>
+          <a:p>
+            <a:pPr marL="457200" indent="-342900">
+              <a:lnSpc>
+                <a:spcPct val="90000"/>
+              </a:lnSpc>
+              <a:spcBef>
+                <a:spcPts val="500"/>
+              </a:spcBef>
+              <a:buSzPts val="1800"/>
+              <a:buFont typeface="Arial"/>
+              <a:buChar char="•"/>
             </a:pPr>
             <a:r>
-              <a:rPr lang="en-US" sz="1400" b="1" dirty="0">
-                <a:solidFill>
-                  <a:srgbClr val="262626"/>
-                </a:solidFill>
-              </a:rPr>
-              <a:t>Verify</a:t>
-            </a:r>
-          </a:p>
-          <a:p>
-            <a:pPr marL="0" indent="0" algn="l">
-              <a:lnSpc>
-                <a:spcPct val="105000"/>
-              </a:lnSpc>
-              <a:spcBef>
-                <a:spcPts val="1000"/>
-              </a:spcBef>
-              <a:buNone/>
+              <a:rPr lang="en-US" sz="1400" dirty="0" b="1">
+                <a:solidFill>
+                  <a:srgbClr val="595959"/>
+                </a:solidFill>
+              </a:rPr>
+              <a:t>Pre-processing: </a:t>
+            </a:r>
+            <a:r>
+              <a:rPr lang="en-US" sz="1400" dirty="0">
+                <a:solidFill>
+                  <a:srgbClr val="595959"/>
+                </a:solidFill>
+              </a:rPr>
+              <a:t>a 2 MB stereo WAV becomes 24 KB before it is sent to Whisper</a:t>
+            </a:r>
+          </a:p>
+          <a:p>
+            <a:pPr marL="457200" indent="-342900">
+              <a:lnSpc>
+                <a:spcPct val="90000"/>
+              </a:lnSpc>
+              <a:spcBef>
+                <a:spcPts val="500"/>
+              </a:spcBef>
+              <a:buSzPts val="1800"/>
+              <a:buFont typeface="Arial"/>
+              <a:buChar char="•"/>
             </a:pPr>
             <a:r>
-              <a:rPr lang="en-US" sz="1200" dirty="0">
+              <a:rPr lang="en-US" sz="1400" dirty="0" b="1">
                 <a:solidFill>
                   <a:srgbClr val="595959"/>
                 </a:solidFill>
               </a:rPr>
-              <a:t>Verifiers approve corrections; passages move draft, corrected, verified</a:t>
-            </a:r>
-          </a:p>
-        </p:txBody>
-      </p:sp>
-      <p:sp>
-        <p:nvSpPr>
-          <p:cNvPr id="24" name="Step 24"/>
-          <p:cNvSpPr/>
-          <p:nvPr/>
-        </p:nvSpPr>
-        <p:spPr>
-          <a:xfrm>
-            <a:off x="3364992" y="4297680"/>
-            <a:ext cx="411480" cy="411480"/>
-          </a:xfrm>
-          <a:prstGeom prst="ellipse">
-            <a:avLst/>
-          </a:prstGeom>
-          <a:solidFill>
-            <a:srgbClr val="B45309"/>
-          </a:solidFill>
-          <a:ln>
-            <a:noFill/>
-          </a:ln>
-        </p:spPr>
-        <p:txBody>
-          <a:bodyPr lIns="0" tIns="0" rIns="0" bIns="0" anchor="ctr">
-            <a:noAutofit/>
-          </a:bodyPr>
-          <a:lstStyle/>
-          <a:p>
-            <a:pPr marL="0" indent="0" algn="ctr">
-              <a:lnSpc>
-                <a:spcPct val="100000"/>
-              </a:lnSpc>
-              <a:spcBef>
-                <a:spcPts val="0"/>
-              </a:spcBef>
-              <a:buNone/>
-            </a:pPr>
-            <a:r>
-              <a:rPr lang="en-US" sz="1400" b="1" dirty="0">
-                <a:solidFill>
-                  <a:srgbClr val="FFFFFF"/>
-                </a:solidFill>
-              </a:rPr>
-              <a:t>5</a:t>
-            </a:r>
-          </a:p>
-        </p:txBody>
-      </p:sp>
-      <p:cxnSp>
-        <p:nvCxnSpPr>
-          <p:cNvPr id="25" name="Arrow 25"/>
-          <p:cNvCxnSpPr/>
-          <p:nvPr/>
-        </p:nvCxnSpPr>
-        <p:spPr>
-          <a:xfrm>
-            <a:off x="5760720" y="5166360"/>
-            <a:ext cx="228600" cy="0"/>
-          </a:xfrm>
-          <a:prstGeom prst="straightConnector1">
-            <a:avLst/>
-          </a:prstGeom>
-          <a:ln w="19050">
-            <a:solidFill>
-              <a:srgbClr val="B45309"/>
-            </a:solidFill>
-            <a:tailEnd type="triangle" w="med" len="med"/>
-          </a:ln>
-        </p:spPr>
-      </p:cxnSp>
-      <p:sp>
-        <p:nvSpPr>
-          <p:cNvPr id="26" name="Text 26"/>
-          <p:cNvSpPr txBox="1"/>
-          <p:nvPr/>
-        </p:nvSpPr>
-        <p:spPr>
-          <a:xfrm>
-            <a:off x="5989320" y="4206240"/>
-            <a:ext cx="2514600" cy="1920240"/>
-          </a:xfrm>
-          <a:prstGeom prst="roundRect">
-            <a:avLst>
-              <a:gd name="adj" fmla="val 8000"/>
-            </a:avLst>
-          </a:prstGeom>
-          <a:solidFill>
-            <a:srgbClr val="F2F2F2"/>
-          </a:solidFill>
-          <a:ln>
-            <a:noFill/>
-          </a:ln>
-        </p:spPr>
-        <p:txBody>
-          <a:bodyPr wrap="square" lIns="137160" tIns="137160" rIns="137160" bIns="137160" anchor="t">
-            <a:noAutofit/>
-          </a:bodyPr>
-          <a:lstStyle/>
-          <a:p>
-            <a:pPr marL="502920" indent="0" algn="l">
-              <a:lnSpc>
-                <a:spcPct val="100000"/>
-              </a:lnSpc>
-              <a:spcBef>
-                <a:spcPts val="0"/>
-              </a:spcBef>
-              <a:buNone/>
-            </a:pPr>
-            <a:r>
-              <a:rPr lang="en-US" sz="1400" b="1" dirty="0">
-                <a:solidFill>
-                  <a:srgbClr val="262626"/>
-                </a:solidFill>
-              </a:rPr>
-              <a:t>Search &amp; export</a:t>
-            </a:r>
-          </a:p>
-          <a:p>
-            <a:pPr marL="0" indent="0" algn="l">
-              <a:lnSpc>
-                <a:spcPct val="105000"/>
-              </a:lnSpc>
-              <a:spcBef>
-                <a:spcPts val="1000"/>
-              </a:spcBef>
-              <a:buNone/>
-            </a:pPr>
-            <a:r>
-              <a:rPr lang="en-US" sz="1200" dirty="0">
+              <a:t>Works offline: </a:t>
+            </a:r>
+            <a:r>
+              <a:rPr lang="en-US" sz="1400" dirty="0">
                 <a:solidFill>
                   <a:srgbClr val="595959"/>
                 </a:solidFill>
               </a:rPr>
-              <a:t>Keyword and meaning search with playback; consented dataset export</a:t>
-            </a:r>
-          </a:p>
-        </p:txBody>
-      </p:sp>
-      <p:sp>
-        <p:nvSpPr>
-          <p:cNvPr id="27" name="Step 27"/>
-          <p:cNvSpPr/>
-          <p:nvPr/>
-        </p:nvSpPr>
-        <p:spPr>
-          <a:xfrm>
-            <a:off x="6108192" y="4297680"/>
-            <a:ext cx="411480" cy="411480"/>
-          </a:xfrm>
-          <a:prstGeom prst="ellipse">
-            <a:avLst/>
-          </a:prstGeom>
-          <a:solidFill>
-            <a:srgbClr val="B45309"/>
-          </a:solidFill>
-          <a:ln>
-            <a:noFill/>
-          </a:ln>
-        </p:spPr>
-        <p:txBody>
-          <a:bodyPr lIns="0" tIns="0" rIns="0" bIns="0" anchor="ctr">
-            <a:noAutofit/>
-          </a:bodyPr>
-          <a:lstStyle/>
-          <a:p>
-            <a:pPr marL="0" indent="0" algn="ctr">
-              <a:lnSpc>
-                <a:spcPct val="100000"/>
-              </a:lnSpc>
-              <a:spcBef>
-                <a:spcPts val="0"/>
-              </a:spcBef>
-              <a:buNone/>
-            </a:pPr>
-            <a:r>
-              <a:rPr lang="en-US" sz="1400" b="1" dirty="0">
-                <a:solidFill>
-                  <a:srgbClr val="FFFFFF"/>
-                </a:solidFill>
-              </a:rPr>
-              <a:t>6</a:t>
+              <a:t>recordings are saved on the device and upload by themselves later</a:t>
             </a:r>
           </a:p>
         </p:txBody>
@@ -10904,14 +8511,20 @@
       </p:grpSpPr>
       <p:sp>
         <p:nvSpPr>
-          <p:cNvPr id="11" name="Title 11"/>
+          <p:cNvPr id="3" name="Google Shape;68;g78e6671419f8a2a0_22">
+            <a:extLst>
+              <a:ext uri="{FF2B5EF4-FFF2-40B4-BE49-F238E27FC236}">
+                <a16:creationId xmlns:a16="http://schemas.microsoft.com/office/drawing/2014/main" id="{BA677A83-D006-E1F4-CCF8-948027C21AB2}"/>
+              </a:ext>
+            </a:extLst>
+          </p:cNvPr>
           <p:cNvSpPr txBox="1"/>
           <p:nvPr/>
         </p:nvSpPr>
         <p:spPr>
           <a:xfrm>
             <a:off x="628650" y="1131097"/>
-            <a:ext cx="7886700" cy="760000"/>
+            <a:ext cx="7886700" cy="994275"/>
           </a:xfrm>
           <a:prstGeom prst="rect">
             <a:avLst/>
@@ -10922,12 +8535,12 @@
           </a:ln>
         </p:spPr>
         <p:txBody>
-          <a:bodyPr wrap="square" lIns="68569" tIns="34275" rIns="68569" bIns="34275" anchor="ctr">
+          <a:bodyPr spcFirstLastPara="1" wrap="square" lIns="68569" tIns="34275" rIns="68569" bIns="34275" anchor="ctr" anchorCtr="0">
             <a:normAutofit/>
           </a:bodyPr>
           <a:lstStyle/>
           <a:p>
-            <a:pPr algn="ctr">
+            <a:pPr algn="ctr" defTabSz="685800">
               <a:lnSpc>
                 <a:spcPct val="90000"/>
               </a:lnSpc>
@@ -10937,313 +8550,31 @@
                 <a:latin typeface="Times New Roman" panose="02020603050405020304" pitchFamily="18" charset="0"/>
                 <a:cs typeface="Times New Roman" panose="02020603050405020304" pitchFamily="18" charset="0"/>
               </a:rPr>
-              <a:t>Implementation - Transcription Algorithm</a:t>
-            </a:r>
+              <a:t>Conclusion</a:t>
+            </a:r>
+            <a:endParaRPr sz="2400" dirty="0">
+              <a:latin typeface="Times New Roman" panose="02020603050405020304" pitchFamily="18" charset="0"/>
+              <a:cs typeface="Times New Roman" panose="02020603050405020304" pitchFamily="18" charset="0"/>
+            </a:endParaRPr>
           </a:p>
         </p:txBody>
       </p:sp>
       <p:sp>
         <p:nvSpPr>
-          <p:cNvPr id="12" name="Text 12"/>
+          <p:cNvPr id="5" name="Google Shape;69;g78e6671419f8a2a0_22">
+            <a:extLst>
+              <a:ext uri="{FF2B5EF4-FFF2-40B4-BE49-F238E27FC236}">
+                <a16:creationId xmlns:a16="http://schemas.microsoft.com/office/drawing/2014/main" id="{13186C97-59A2-67F5-3892-203B43C861C9}"/>
+              </a:ext>
+            </a:extLst>
+          </p:cNvPr>
           <p:cNvSpPr txBox="1"/>
           <p:nvPr/>
         </p:nvSpPr>
         <p:spPr>
           <a:xfrm>
-            <a:off x="502920" y="1965960"/>
-            <a:ext cx="8138160" cy="3566160"/>
-          </a:xfrm>
-          <a:prstGeom prst="roundRect">
-            <a:avLst>
-              <a:gd name="adj" fmla="val 8000"/>
-            </a:avLst>
-          </a:prstGeom>
-          <a:solidFill>
-            <a:srgbClr val="F2F2F2"/>
-          </a:solidFill>
-          <a:ln>
-            <a:noFill/>
-          </a:ln>
-        </p:spPr>
-        <p:txBody>
-          <a:bodyPr wrap="square" lIns="182880" tIns="182880" rIns="182880" bIns="182880" anchor="t">
-            <a:noAutofit/>
-          </a:bodyPr>
-          <a:lstStyle/>
-          <a:p>
-            <a:pPr marL="0" indent="0" algn="l">
-              <a:lnSpc>
-                <a:spcPct val="100000"/>
-              </a:lnSpc>
-              <a:spcBef>
-                <a:spcPts val="600"/>
-              </a:spcBef>
-              <a:buNone/>
-            </a:pPr>
-            <a:r>
-              <a:rPr lang="en-US" sz="1300" b="1" dirty="0">
-                <a:solidFill>
-                  <a:srgbClr val="B45309"/>
-                </a:solidFill>
-              </a:rPr>
-              <a:t xml:space="preserve">Input: </a:t>
-            </a:r>
-            <a:r>
-              <a:rPr lang="en-US" sz="1300" dirty="0">
-                <a:solidFill>
-                  <a:srgbClr val="262626"/>
-                </a:solidFill>
-              </a:rPr>
-              <a:t>recording R with audio URL, dialect D</a:t>
-            </a:r>
-          </a:p>
-          <a:p>
-            <a:pPr marL="0" indent="0" algn="l">
-              <a:lnSpc>
-                <a:spcPct val="100000"/>
-              </a:lnSpc>
-              <a:spcBef>
-                <a:spcPts val="0"/>
-              </a:spcBef>
-              <a:buNone/>
-            </a:pPr>
-            <a:r>
-              <a:rPr lang="en-US" sz="600" dirty="0">
-                <a:solidFill>
-                  <a:srgbClr val="595959"/>
-                </a:solidFill>
-              </a:rPr>
-              <a:t xml:space="preserve"> </a:t>
-            </a:r>
-          </a:p>
-          <a:p>
-            <a:pPr marL="0" indent="0" algn="l">
-              <a:lnSpc>
-                <a:spcPct val="100000"/>
-              </a:lnSpc>
-              <a:spcBef>
-                <a:spcPts val="600"/>
-              </a:spcBef>
-              <a:buNone/>
-            </a:pPr>
-            <a:r>
-              <a:rPr lang="en-US" sz="1300" b="1" dirty="0">
-                <a:solidFill>
-                  <a:srgbClr val="B45309"/>
-                </a:solidFill>
-              </a:rPr>
-              <a:t xml:space="preserve">1. </a:t>
-            </a:r>
-            <a:r>
-              <a:rPr lang="en-US" sz="1300" dirty="0">
-                <a:solidFill>
-                  <a:srgbClr val="262626"/>
-                </a:solidFill>
-              </a:rPr>
-              <a:t>If a job for R is queued or running, return it; else create job J</a:t>
-            </a:r>
-          </a:p>
-          <a:p>
-            <a:pPr marL="0" indent="0" algn="l">
-              <a:lnSpc>
-                <a:spcPct val="100000"/>
-              </a:lnSpc>
-              <a:spcBef>
-                <a:spcPts val="600"/>
-              </a:spcBef>
-              <a:buNone/>
-            </a:pPr>
-            <a:r>
-              <a:rPr lang="en-US" sz="1300" b="1" dirty="0">
-                <a:solidFill>
-                  <a:srgbClr val="B45309"/>
-                </a:solidFill>
-              </a:rPr>
-              <a:t xml:space="preserve">2. </a:t>
-            </a:r>
-            <a:r>
-              <a:rPr lang="en-US" sz="1300" dirty="0">
-                <a:solidFill>
-                  <a:srgbClr val="262626"/>
-                </a:solidFill>
-              </a:rPr>
-              <a:t>Stream R's audio to disk (up to 200 MB)</a:t>
-            </a:r>
-          </a:p>
-          <a:p>
-            <a:pPr marL="0" indent="0" algn="l">
-              <a:lnSpc>
-                <a:spcPct val="100000"/>
-              </a:lnSpc>
-              <a:spcBef>
-                <a:spcPts val="600"/>
-              </a:spcBef>
-              <a:buNone/>
-            </a:pPr>
-            <a:r>
-              <a:rPr lang="en-US" sz="1300" b="1" dirty="0">
-                <a:solidFill>
-                  <a:srgbClr val="B45309"/>
-                </a:solidFill>
-              </a:rPr>
-              <a:t xml:space="preserve">3. </a:t>
-            </a:r>
-            <a:r>
-              <a:rPr lang="en-US" sz="1300" dirty="0">
-                <a:solidFill>
-                  <a:srgbClr val="262626"/>
-                </a:solidFill>
-              </a:rPr>
-              <a:t>a ← ffmpeg(audio): mono, 16 kHz, high-pass 80 Hz, loudnorm −18 LUFS, Opus 32 kbps</a:t>
-            </a:r>
-          </a:p>
-          <a:p>
-            <a:pPr marL="0" indent="0" algn="l">
-              <a:lnSpc>
-                <a:spcPct val="100000"/>
-              </a:lnSpc>
-              <a:spcBef>
-                <a:spcPts val="600"/>
-              </a:spcBef>
-              <a:buNone/>
-            </a:pPr>
-            <a:r>
-              <a:rPr lang="en-US" sz="1300" b="1" dirty="0">
-                <a:solidFill>
-                  <a:srgbClr val="B45309"/>
-                </a:solidFill>
-              </a:rPr>
-              <a:t xml:space="preserve">4. </a:t>
-            </a:r>
-            <a:r>
-              <a:rPr lang="en-US" sz="1300" dirty="0">
-                <a:solidFill>
-                  <a:srgbClr val="262626"/>
-                </a:solidFill>
-              </a:rPr>
-              <a:t>S ← Whisper-large-v3(a, language = D.asr_language)  → timestamped segments</a:t>
-            </a:r>
-          </a:p>
-          <a:p>
-            <a:pPr marL="0" indent="0" algn="l">
-              <a:lnSpc>
-                <a:spcPct val="100000"/>
-              </a:lnSpc>
-              <a:spcBef>
-                <a:spcPts val="600"/>
-              </a:spcBef>
-              <a:buNone/>
-            </a:pPr>
-            <a:r>
-              <a:rPr lang="en-US" sz="1300" b="1" dirty="0">
-                <a:solidFill>
-                  <a:srgbClr val="B45309"/>
-                </a:solidFill>
-              </a:rPr>
-              <a:t xml:space="preserve">5. </a:t>
-            </a:r>
-            <a:r>
-              <a:rPr lang="en-US" sz="1300" dirty="0">
-                <a:solidFill>
-                  <a:srgbClr val="262626"/>
-                </a:solidFill>
-              </a:rPr>
-              <a:t>Replace R's segments with S;  R.status ← transcribed</a:t>
-            </a:r>
-          </a:p>
-          <a:p>
-            <a:pPr marL="0" indent="0" algn="l">
-              <a:lnSpc>
-                <a:spcPct val="100000"/>
-              </a:lnSpc>
-              <a:spcBef>
-                <a:spcPts val="600"/>
-              </a:spcBef>
-              <a:buNone/>
-            </a:pPr>
-            <a:r>
-              <a:rPr lang="en-US" sz="1300" b="1" dirty="0">
-                <a:solidFill>
-                  <a:srgbClr val="B45309"/>
-                </a:solidFill>
-              </a:rPr>
-              <a:t xml:space="preserve">6. </a:t>
-            </a:r>
-            <a:r>
-              <a:rPr lang="en-US" sz="1300" dirty="0">
-                <a:solidFill>
-                  <a:srgbClr val="262626"/>
-                </a:solidFill>
-              </a:rPr>
-              <a:t>For each segment s:  s.embedding ← MiniLM(s.text)  (384-d, normalised)</a:t>
-            </a:r>
-          </a:p>
-          <a:p>
-            <a:pPr marL="0" indent="0" algn="l">
-              <a:lnSpc>
-                <a:spcPct val="100000"/>
-              </a:lnSpc>
-              <a:spcBef>
-                <a:spcPts val="600"/>
-              </a:spcBef>
-              <a:buNone/>
-            </a:pPr>
-            <a:r>
-              <a:rPr lang="en-US" sz="1300" b="1" dirty="0">
-                <a:solidFill>
-                  <a:srgbClr val="B45309"/>
-                </a:solidFill>
-              </a:rPr>
-              <a:t xml:space="preserve">7. </a:t>
-            </a:r>
-            <a:r>
-              <a:rPr lang="en-US" sz="1300" dirty="0">
-                <a:solidFill>
-                  <a:srgbClr val="262626"/>
-                </a:solidFill>
-              </a:rPr>
-              <a:t>J.status ← completed;  progress reported 5 → 25 → 70 → 85 → 100 %</a:t>
-            </a:r>
-          </a:p>
-          <a:p>
-            <a:pPr marL="0" indent="0" algn="l">
-              <a:lnSpc>
-                <a:spcPct val="100000"/>
-              </a:lnSpc>
-              <a:spcBef>
-                <a:spcPts val="600"/>
-              </a:spcBef>
-              <a:buNone/>
-            </a:pPr>
-            <a:r>
-              <a:rPr lang="en-US" sz="1300" b="1" dirty="0">
-                <a:solidFill>
-                  <a:srgbClr val="B45309"/>
-                </a:solidFill>
-              </a:rPr>
-              <a:t xml:space="preserve">On error: </a:t>
-            </a:r>
-            <a:r>
-              <a:rPr lang="en-US" sz="1300" dirty="0">
-                <a:solidFill>
-                  <a:srgbClr val="262626"/>
-                </a:solidFill>
-              </a:rPr>
-              <a:t>J.status ← failed with the reason;  R.status ← uploaded (retry possible)</a:t>
-            </a:r>
-          </a:p>
-        </p:txBody>
-      </p:sp>
-      <p:sp>
-        <p:nvSpPr>
-          <p:cNvPr id="13" name="Text 13"/>
-          <p:cNvSpPr txBox="1"/>
-          <p:nvPr/>
-        </p:nvSpPr>
-        <p:spPr>
-          <a:xfrm>
-            <a:off x="502920" y="5669280"/>
-            <a:ext cx="8138160" cy="594360"/>
+            <a:off x="822960" y="2011680"/>
+            <a:ext cx="7589520" cy="4206240"/>
           </a:xfrm>
           <a:prstGeom prst="rect">
             <a:avLst/>
@@ -11254,35 +8585,113 @@
           </a:ln>
         </p:spPr>
         <p:txBody>
-          <a:bodyPr wrap="square" lIns="73152" tIns="73152" rIns="73152" bIns="73152" anchor="t">
+          <a:bodyPr spcFirstLastPara="1" wrap="square" lIns="68569" tIns="34275" rIns="68569" bIns="34275" anchor="t" anchorCtr="0">
             <a:noAutofit/>
           </a:bodyPr>
           <a:lstStyle/>
           <a:p>
-            <a:pPr marL="0" indent="0" algn="l">
-              <a:lnSpc>
-                <a:spcPct val="100000"/>
-              </a:lnSpc>
-              <a:spcBef>
-                <a:spcPts val="0"/>
-              </a:spcBef>
-              <a:buNone/>
+            <a:pPr marL="457200" indent="-342900">
+              <a:lnSpc>
+                <a:spcPct val="90000"/>
+              </a:lnSpc>
+              <a:spcBef>
+                <a:spcPts val="1200"/>
+              </a:spcBef>
+              <a:buSzPts val="1800"/>
+              <a:buFont typeface="Arial"/>
+              <a:buChar char="•"/>
             </a:pPr>
             <a:r>
-              <a:rPr lang="en-US" sz="1200" b="1" dirty="0">
-                <a:solidFill>
-                  <a:srgbClr val="262626"/>
-                </a:solidFill>
-              </a:rPr>
-              <a:t xml:space="preserve">Design choice: </a:t>
-            </a:r>
-            <a:r>
-              <a:rPr lang="en-US" sz="1200" dirty="0">
+              <a:rPr lang="en-US" sz="1700" dirty="0">
                 <a:solidFill>
                   <a:srgbClr val="595959"/>
                 </a:solidFill>
               </a:rPr>
-              <a:t>audio is never trimmed, so every timestamp still points at the right moment in the original recording.</a:t>
+              <a:t>SwaraVeda turns oral recordings of endangered dialects into verified, searchable text</a:t>
+            </a:r>
+          </a:p>
+          <a:p>
+            <a:pPr marL="457200" indent="-342900">
+              <a:lnSpc>
+                <a:spcPct val="90000"/>
+              </a:lnSpc>
+              <a:spcBef>
+                <a:spcPts val="1200"/>
+              </a:spcBef>
+              <a:buSzPts val="1800"/>
+              <a:buFont typeface="Arial"/>
+              <a:buChar char="•"/>
+            </a:pPr>
+            <a:r>
+              <a:rPr lang="en-US" sz="1700" dirty="0">
+                <a:solidFill>
+                  <a:srgbClr val="595959"/>
+                </a:solidFill>
+              </a:rPr>
+              <a:t>Vani does the first draft; native speakers keep authority over every word</a:t>
+            </a:r>
+          </a:p>
+          <a:p>
+            <a:pPr marL="457200" indent="-342900">
+              <a:lnSpc>
+                <a:spcPct val="90000"/>
+              </a:lnSpc>
+              <a:spcBef>
+                <a:spcPts val="1200"/>
+              </a:spcBef>
+              <a:buSzPts val="1800"/>
+              <a:buFont typeface="Arial"/>
+              <a:buChar char="•"/>
+            </a:pPr>
+            <a:r>
+              <a:rPr lang="en-US" sz="1700" dirty="0">
+                <a:solidFill>
+                  <a:srgbClr val="595959"/>
+                </a:solidFill>
+              </a:rPr>
+              <a:t>Audio pre-processing and per-dialect language hints make a general speech model usable for low-resource dialects</a:t>
+            </a:r>
+          </a:p>
+          <a:p>
+            <a:pPr marL="457200" indent="-342900">
+              <a:lnSpc>
+                <a:spcPct val="90000"/>
+              </a:lnSpc>
+              <a:spcBef>
+                <a:spcPts val="1200"/>
+              </a:spcBef>
+              <a:buSzPts val="1800"/>
+              <a:buFont typeface="Arial"/>
+              <a:buChar char="•"/>
+            </a:pPr>
+            <a:r>
+              <a:rPr lang="en-US" sz="1700" dirty="0">
+                <a:solidFill>
+                  <a:srgbClr val="595959"/>
+                </a:solidFill>
+              </a:rPr>
+              <a:t>Consent is explicit and enforced: private recordings stay private and only consented data is exported</a:t>
+            </a:r>
+          </a:p>
+          <a:p>
+            <a:pPr marL="457200" indent="-342900">
+              <a:lnSpc>
+                <a:spcPct val="90000"/>
+              </a:lnSpc>
+              <a:spcBef>
+                <a:spcPts val="1200"/>
+              </a:spcBef>
+              <a:buSzPts val="1800"/>
+              <a:buFont typeface="Arial"/>
+              <a:buChar char="•"/>
+            </a:pPr>
+            <a:r>
+              <a:rPr lang="en-US" sz="1700" dirty="0">
+                <a:solidFill>
+                  <a:srgbClr val="595959"/>
+                </a:solidFill>
+              </a:rPr>
+              <a:t>The verified dataset is the foundation for training Vani to understand these dialects directly</a:t>
             </a:r>
           </a:p>
         </p:txBody>
